--- a/fig/fig.pptx
+++ b/fig/fig.pptx
@@ -9,11 +9,11 @@
   </p:notesMasterIdLst>
   <p:sldIdLst>
     <p:sldId id="256" r:id="rId2"/>
-    <p:sldId id="262" r:id="rId3"/>
-    <p:sldId id="261" r:id="rId4"/>
-    <p:sldId id="259" r:id="rId5"/>
-    <p:sldId id="257" r:id="rId6"/>
-    <p:sldId id="263" r:id="rId7"/>
+    <p:sldId id="259" r:id="rId3"/>
+    <p:sldId id="257" r:id="rId4"/>
+    <p:sldId id="263" r:id="rId5"/>
+    <p:sldId id="262" r:id="rId6"/>
+    <p:sldId id="261" r:id="rId7"/>
     <p:sldId id="264" r:id="rId8"/>
     <p:sldId id="266" r:id="rId9"/>
     <p:sldId id="265" r:id="rId10"/>
@@ -216,7 +216,7 @@
           <a:p>
             <a:fld id="{BFB44AB8-C8D2-6C48-A188-05D311D83888}" type="datetimeFigureOut">
               <a:rPr lang="en-US" smtClean="0"/>
-              <a:t>3/11/26</a:t>
+              <a:t>3/16/26</a:t>
             </a:fld>
             <a:endParaRPr lang="en-US"/>
           </a:p>
@@ -645,6 +645,772 @@
   <p:cSld>
     <p:spTree>
       <p:nvGrpSpPr>
+        <p:cNvPr id="1" name=""/>
+        <p:cNvGrpSpPr/>
+        <p:nvPr/>
+      </p:nvGrpSpPr>
+      <p:grpSpPr>
+        <a:xfrm>
+          <a:off x="0" y="0"/>
+          <a:ext cx="0" cy="0"/>
+          <a:chOff x="0" y="0"/>
+          <a:chExt cx="0" cy="0"/>
+        </a:xfrm>
+      </p:grpSpPr>
+      <p:sp>
+        <p:nvSpPr>
+          <p:cNvPr id="2" name="Slide Image Placeholder 1"/>
+          <p:cNvSpPr>
+            <a:spLocks noGrp="1" noRot="1" noChangeAspect="1"/>
+          </p:cNvSpPr>
+          <p:nvPr>
+            <p:ph type="sldImg"/>
+          </p:nvPr>
+        </p:nvSpPr>
+        <p:spPr>
+          <a:xfrm>
+            <a:off x="1885950" y="1143000"/>
+            <a:ext cx="3086100" cy="3086100"/>
+          </a:xfrm>
+        </p:spPr>
+      </p:sp>
+      <p:sp>
+        <p:nvSpPr>
+          <p:cNvPr id="3" name="Notes Placeholder 2"/>
+          <p:cNvSpPr>
+            <a:spLocks noGrp="1"/>
+          </p:cNvSpPr>
+          <p:nvPr>
+            <p:ph type="body" idx="1"/>
+          </p:nvPr>
+        </p:nvSpPr>
+        <p:spPr/>
+        <p:txBody>
+          <a:bodyPr/>
+          <a:lstStyle/>
+          <a:p>
+            <a:r>
+              <a:rPr lang="en-US" b="1" dirty="0"/>
+              <a:t>Figure 4. Biological Interpreter Agent performs autonomous spatial cell-cell interaction analysis.</a:t>
+            </a:r>
+            <a:endParaRPr lang="en-US" dirty="0"/>
+          </a:p>
+          <a:p>
+            <a:r>
+              <a:rPr lang="en-US" b="1" dirty="0"/>
+              <a:t>(A)</a:t>
+            </a:r>
+            <a:r>
+              <a:rPr lang="en-US" dirty="0"/>
+              <a:t> Detailed architecture of the Biological Interpreter Agent. The agent utilizes multiple MCP servers to perform automated biological interpretation with human-in-the-loop validation at critical decision points.</a:t>
+            </a:r>
+          </a:p>
+          <a:p>
+            <a:r>
+              <a:rPr lang="en-US" b="1" dirty="0"/>
+              <a:t>(B)</a:t>
+            </a:r>
+            <a:r>
+              <a:rPr lang="en-US" dirty="0"/>
+              <a:t> Workflow of the ST-CCI MCP server. The analysis consists of three parts: Part 1 (Steps 1-5) performs exploratory spatial analysis. Part 2 (Steps 6-9) conducts cell-cell interaction analysis using non-negative matrix factorization (NMF) to identify ligand-receptor (LR) interaction patterns. Part 3 (Steps 10-11) provides characterization and visualization of key LR pairs with quantitative analysis. The workflow concludes with an integrated summary of findings, clinical and therapeutic implications, and methodological innovations.</a:t>
+            </a:r>
+          </a:p>
+        </p:txBody>
+      </p:sp>
+      <p:sp>
+        <p:nvSpPr>
+          <p:cNvPr id="4" name="Slide Number Placeholder 3"/>
+          <p:cNvSpPr>
+            <a:spLocks noGrp="1"/>
+          </p:cNvSpPr>
+          <p:nvPr>
+            <p:ph type="sldNum" sz="quarter" idx="5"/>
+          </p:nvPr>
+        </p:nvSpPr>
+        <p:spPr/>
+        <p:txBody>
+          <a:bodyPr/>
+          <a:lstStyle/>
+          <a:p>
+            <a:fld id="{8FCACE96-7AB2-B243-B3F0-FB78F0A5C4C3}" type="slidenum">
+              <a:rPr lang="en-US" smtClean="0"/>
+              <a:t>2</a:t>
+            </a:fld>
+            <a:endParaRPr lang="en-US"/>
+          </a:p>
+        </p:txBody>
+      </p:sp>
+    </p:spTree>
+    <p:extLst>
+      <p:ext uri="{BB962C8B-B14F-4D97-AF65-F5344CB8AC3E}">
+        <p14:creationId xmlns:p14="http://schemas.microsoft.com/office/powerpoint/2010/main" val="1426929292"/>
+      </p:ext>
+    </p:extLst>
+  </p:cSld>
+  <p:clrMapOvr>
+    <a:masterClrMapping/>
+  </p:clrMapOvr>
+</p:notes>
+</file>
+
+<file path=ppt/notesSlides/notesSlide3.xml><?xml version="1.0" encoding="utf-8"?>
+<p:notes xmlns:a="http://schemas.openxmlformats.org/drawingml/2006/main" xmlns:r="http://schemas.openxmlformats.org/officeDocument/2006/relationships" xmlns:p="http://schemas.openxmlformats.org/presentationml/2006/main">
+  <p:cSld>
+    <p:spTree>
+      <p:nvGrpSpPr>
+        <p:cNvPr id="1" name=""/>
+        <p:cNvGrpSpPr/>
+        <p:nvPr/>
+      </p:nvGrpSpPr>
+      <p:grpSpPr>
+        <a:xfrm>
+          <a:off x="0" y="0"/>
+          <a:ext cx="0" cy="0"/>
+          <a:chOff x="0" y="0"/>
+          <a:chExt cx="0" cy="0"/>
+        </a:xfrm>
+      </p:grpSpPr>
+      <p:sp>
+        <p:nvSpPr>
+          <p:cNvPr id="2" name="Slide Image Placeholder 1"/>
+          <p:cNvSpPr>
+            <a:spLocks noGrp="1" noRot="1" noChangeAspect="1"/>
+          </p:cNvSpPr>
+          <p:nvPr>
+            <p:ph type="sldImg"/>
+          </p:nvPr>
+        </p:nvSpPr>
+        <p:spPr/>
+      </p:sp>
+      <p:sp>
+        <p:nvSpPr>
+          <p:cNvPr id="3" name="Notes Placeholder 2"/>
+          <p:cNvSpPr>
+            <a:spLocks noGrp="1"/>
+          </p:cNvSpPr>
+          <p:nvPr>
+            <p:ph type="body" idx="1"/>
+          </p:nvPr>
+        </p:nvSpPr>
+        <p:spPr/>
+        <p:txBody>
+          <a:bodyPr/>
+          <a:lstStyle/>
+          <a:p>
+            <a:r>
+              <a:rPr lang="ko-KR" altLang="en-US" dirty="0"/>
+              <a:t> </a:t>
+            </a:r>
+            <a:r>
+              <a:rPr lang="en-US" altLang="ko-KR" dirty="0"/>
+              <a:t>- </a:t>
+            </a:r>
+            <a:r>
+              <a:rPr lang="ko-KR" altLang="en-US" dirty="0"/>
+              <a:t>본문에 **통합 멀티패널 </a:t>
+            </a:r>
+            <a:r>
+              <a:rPr lang="en-US" altLang="ko-KR" dirty="0"/>
+              <a:t>1</a:t>
+            </a:r>
+            <a:r>
+              <a:rPr lang="ko-KR" altLang="en-US" dirty="0"/>
+              <a:t>개</a:t>
+            </a:r>
+            <a:r>
+              <a:rPr lang="en-US" altLang="ko-KR" dirty="0"/>
+              <a:t>(</a:t>
+            </a:r>
+            <a:r>
+              <a:rPr lang="en-US" dirty="0" err="1"/>
+              <a:t>Fig.Xa</a:t>
+            </a:r>
+            <a:r>
+              <a:rPr lang="en-US" dirty="0"/>
+              <a:t>/b/c)**</a:t>
+            </a:r>
+            <a:r>
+              <a:rPr lang="ko-KR" altLang="en-US" dirty="0"/>
+              <a:t>만 둡니다</a:t>
+            </a:r>
+            <a:r>
+              <a:rPr lang="en-US" altLang="ko-KR" dirty="0"/>
+              <a:t>.</a:t>
+            </a:r>
+          </a:p>
+          <a:p>
+            <a:endParaRPr lang="en-US" altLang="ko-KR" dirty="0"/>
+          </a:p>
+          <a:p>
+            <a:r>
+              <a:rPr lang="en-US" altLang="ko-KR" dirty="0"/>
+              <a:t>  1. </a:t>
+            </a:r>
+            <a:r>
+              <a:rPr lang="en-US" dirty="0"/>
+              <a:t>Panel a: </a:t>
+            </a:r>
+            <a:r>
+              <a:rPr lang="en-US" dirty="0" err="1"/>
+              <a:t>fig_composite_cov_boxplot_case_mean.png</a:t>
+            </a:r>
+            <a:endParaRPr lang="en-US" dirty="0"/>
+          </a:p>
+          <a:p>
+            <a:r>
+              <a:rPr lang="en-US" dirty="0"/>
+              <a:t>     </a:t>
+            </a:r>
+            <a:r>
+              <a:rPr lang="ko-KR" altLang="en-US" dirty="0"/>
+              <a:t>목적</a:t>
+            </a:r>
+            <a:r>
+              <a:rPr lang="en-US" altLang="ko-KR" dirty="0"/>
+              <a:t>: “</a:t>
+            </a:r>
+            <a:r>
+              <a:rPr lang="ko-KR" altLang="en-US" dirty="0"/>
+              <a:t>찾아내는 양</a:t>
+            </a:r>
+            <a:r>
+              <a:rPr lang="en-US" altLang="ko-KR" dirty="0"/>
+              <a:t>(</a:t>
+            </a:r>
+            <a:r>
+              <a:rPr lang="en-US" dirty="0"/>
+              <a:t>coverage) </a:t>
+            </a:r>
+            <a:r>
+              <a:rPr lang="ko-KR" altLang="en-US" dirty="0"/>
+              <a:t>자체가 </a:t>
+            </a:r>
+            <a:r>
+              <a:rPr lang="en-US" dirty="0"/>
+              <a:t>baseline</a:t>
+            </a:r>
+            <a:r>
+              <a:rPr lang="ko-KR" altLang="en-US" dirty="0"/>
+              <a:t>보다 충분히 높다”</a:t>
+            </a:r>
+          </a:p>
+          <a:p>
+            <a:r>
+              <a:rPr lang="ko-KR" altLang="en-US" dirty="0"/>
+              <a:t>  </a:t>
+            </a:r>
+            <a:r>
+              <a:rPr lang="en-US" altLang="ko-KR" dirty="0"/>
+              <a:t>2. </a:t>
+            </a:r>
+            <a:r>
+              <a:rPr lang="en-US" dirty="0"/>
+              <a:t>Panel b: </a:t>
+            </a:r>
+            <a:r>
+              <a:rPr lang="en-US" dirty="0" err="1"/>
+              <a:t>fig_contamination_boxplot_case_mean.png</a:t>
+            </a:r>
+            <a:endParaRPr lang="en-US" dirty="0"/>
+          </a:p>
+          <a:p>
+            <a:r>
+              <a:rPr lang="en-US" dirty="0"/>
+              <a:t>     </a:t>
+            </a:r>
+            <a:r>
+              <a:rPr lang="ko-KR" altLang="en-US" dirty="0"/>
+              <a:t>목적</a:t>
+            </a:r>
+            <a:r>
+              <a:rPr lang="en-US" altLang="ko-KR" dirty="0"/>
+              <a:t>: “</a:t>
+            </a:r>
+            <a:r>
+              <a:rPr lang="ko-KR" altLang="en-US" dirty="0"/>
+              <a:t>질병 필터가 오염</a:t>
+            </a:r>
+            <a:r>
+              <a:rPr lang="en-US" altLang="ko-KR" dirty="0"/>
+              <a:t>(</a:t>
+            </a:r>
+            <a:r>
+              <a:rPr lang="ko-KR" altLang="en-US" dirty="0" err="1"/>
+              <a:t>할루시네이션성</a:t>
+            </a:r>
+            <a:r>
+              <a:rPr lang="ko-KR" altLang="en-US" dirty="0"/>
+              <a:t> 문맥 미스매치</a:t>
+            </a:r>
+            <a:r>
+              <a:rPr lang="en-US" altLang="ko-KR" dirty="0"/>
+              <a:t>)</a:t>
+            </a:r>
+            <a:r>
+              <a:rPr lang="ko-KR" altLang="en-US" dirty="0"/>
+              <a:t>을 강하게 억제한다”</a:t>
+            </a:r>
+          </a:p>
+          <a:p>
+            <a:r>
+              <a:rPr lang="ko-KR" altLang="en-US" dirty="0"/>
+              <a:t>  </a:t>
+            </a:r>
+            <a:r>
+              <a:rPr lang="en-US" altLang="ko-KR" dirty="0"/>
+              <a:t>3. </a:t>
+            </a:r>
+            <a:r>
+              <a:rPr lang="en-US" dirty="0"/>
+              <a:t>Panel c: fig_dynamic_repro_top10_vs_tail20_case_boxplot.png</a:t>
+            </a:r>
+          </a:p>
+          <a:p>
+            <a:r>
+              <a:rPr lang="en-US" dirty="0"/>
+              <a:t>     </a:t>
+            </a:r>
+            <a:r>
+              <a:rPr lang="ko-KR" altLang="en-US" dirty="0"/>
+              <a:t>목적</a:t>
+            </a:r>
+            <a:r>
+              <a:rPr lang="en-US" altLang="ko-KR" dirty="0"/>
+              <a:t>: “</a:t>
+            </a:r>
+            <a:r>
+              <a:rPr lang="en-US" dirty="0"/>
+              <a:t>Top-10</a:t>
+            </a:r>
+            <a:r>
+              <a:rPr lang="ko-KR" altLang="en-US" dirty="0"/>
+              <a:t>은 안정적</a:t>
+            </a:r>
+            <a:r>
+              <a:rPr lang="en-US" altLang="ko-KR" dirty="0"/>
+              <a:t>(</a:t>
+            </a:r>
+            <a:r>
+              <a:rPr lang="ko-KR" altLang="en-US" dirty="0"/>
+              <a:t>재현성 높음</a:t>
+            </a:r>
+            <a:r>
+              <a:rPr lang="en-US" altLang="ko-KR" dirty="0"/>
+              <a:t>), </a:t>
+            </a:r>
+            <a:r>
+              <a:rPr lang="en-US" dirty="0"/>
+              <a:t>Tail-20</a:t>
+            </a:r>
+            <a:r>
+              <a:rPr lang="ko-KR" altLang="en-US" dirty="0"/>
+              <a:t>은 다양성 유지”</a:t>
+            </a:r>
+          </a:p>
+          <a:p>
+            <a:endParaRPr lang="ko-KR" altLang="en-US" dirty="0"/>
+          </a:p>
+          <a:p>
+            <a:r>
+              <a:rPr lang="ko-KR" altLang="en-US" dirty="0"/>
+              <a:t>  왜 이 구성이 맞나</a:t>
+            </a:r>
+          </a:p>
+          <a:p>
+            <a:endParaRPr lang="ko-KR" altLang="en-US" dirty="0"/>
+          </a:p>
+          <a:p>
+            <a:r>
+              <a:rPr lang="ko-KR" altLang="en-US" dirty="0"/>
+              <a:t>  </a:t>
+            </a:r>
+            <a:r>
+              <a:rPr lang="en-US" altLang="ko-KR" dirty="0"/>
+              <a:t>- </a:t>
+            </a:r>
+            <a:r>
+              <a:rPr lang="en-US" dirty="0" err="1"/>
+              <a:t>a+b</a:t>
+            </a:r>
+            <a:r>
+              <a:rPr lang="ko-KR" altLang="en-US" dirty="0"/>
+              <a:t>가 “정확도</a:t>
+            </a:r>
+            <a:r>
+              <a:rPr lang="en-US" altLang="ko-KR" dirty="0"/>
+              <a:t>/</a:t>
+            </a:r>
+            <a:r>
+              <a:rPr lang="ko-KR" altLang="en-US" dirty="0"/>
+              <a:t>안전성</a:t>
+            </a:r>
+            <a:r>
+              <a:rPr lang="en-US" altLang="ko-KR" dirty="0"/>
+              <a:t>(</a:t>
+            </a:r>
+            <a:r>
+              <a:rPr lang="ko-KR" altLang="en-US" dirty="0" err="1"/>
+              <a:t>무할루시네이션</a:t>
+            </a:r>
+            <a:r>
+              <a:rPr lang="en-US" altLang="ko-KR" dirty="0"/>
+              <a:t>)”</a:t>
+            </a:r>
+            <a:r>
+              <a:rPr lang="ko-KR" altLang="en-US" dirty="0"/>
+              <a:t>의 핵심 증거 사슬</a:t>
+            </a:r>
+          </a:p>
+          <a:p>
+            <a:r>
+              <a:rPr lang="ko-KR" altLang="en-US" dirty="0"/>
+              <a:t>  </a:t>
+            </a:r>
+            <a:r>
+              <a:rPr lang="en-US" altLang="ko-KR" dirty="0"/>
+              <a:t>- </a:t>
+            </a:r>
+            <a:r>
+              <a:rPr lang="en-US" dirty="0"/>
+              <a:t>c</a:t>
+            </a:r>
+            <a:r>
+              <a:rPr lang="ko-KR" altLang="en-US" dirty="0"/>
+              <a:t>가 “안전하게 찾은 결과가 반복 시 어떻게 동작하는지</a:t>
+            </a:r>
+            <a:r>
+              <a:rPr lang="en-US" altLang="ko-KR" dirty="0"/>
+              <a:t>(</a:t>
+            </a:r>
+            <a:r>
+              <a:rPr lang="ko-KR" altLang="en-US" dirty="0"/>
+              <a:t>안정성</a:t>
+            </a:r>
+            <a:r>
+              <a:rPr lang="en-US" altLang="ko-KR" dirty="0"/>
+              <a:t>+</a:t>
+            </a:r>
+            <a:r>
+              <a:rPr lang="ko-KR" altLang="en-US" dirty="0" err="1"/>
+              <a:t>탐색성</a:t>
+            </a:r>
+            <a:r>
+              <a:rPr lang="en-US" altLang="ko-KR" dirty="0"/>
+              <a:t>)”</a:t>
+            </a:r>
+            <a:r>
+              <a:rPr lang="ko-KR" altLang="en-US" dirty="0" err="1"/>
+              <a:t>를</a:t>
+            </a:r>
+            <a:r>
+              <a:rPr lang="ko-KR" altLang="en-US" dirty="0"/>
+              <a:t> 보강</a:t>
+            </a:r>
+          </a:p>
+          <a:p>
+            <a:r>
+              <a:rPr lang="ko-KR" altLang="en-US" dirty="0"/>
+              <a:t>  </a:t>
+            </a:r>
+            <a:r>
+              <a:rPr lang="en-US" altLang="ko-KR" dirty="0"/>
+              <a:t>- </a:t>
+            </a:r>
+            <a:r>
+              <a:rPr lang="ko-KR" altLang="en-US" dirty="0"/>
+              <a:t>즉</a:t>
+            </a:r>
+            <a:r>
+              <a:rPr lang="en-US" altLang="ko-KR" dirty="0"/>
+              <a:t>, “</a:t>
+            </a:r>
+            <a:r>
+              <a:rPr lang="ko-KR" altLang="en-US" dirty="0"/>
+              <a:t>많이 찾기만 한 게 아니라</a:t>
+            </a:r>
+            <a:r>
+              <a:rPr lang="en-US" altLang="ko-KR" dirty="0"/>
+              <a:t>, </a:t>
+            </a:r>
+            <a:r>
+              <a:rPr lang="ko-KR" altLang="en-US" dirty="0"/>
+              <a:t>오염을 통제하면서 핵심은 </a:t>
+            </a:r>
+            <a:r>
+              <a:rPr lang="ko-KR" altLang="en-US" dirty="0" err="1"/>
+              <a:t>안정적”이라는</a:t>
+            </a:r>
+            <a:r>
+              <a:rPr lang="ko-KR" altLang="en-US" dirty="0"/>
+              <a:t> 논리</a:t>
+            </a:r>
+          </a:p>
+          <a:p>
+            <a:r>
+              <a:rPr lang="ko-KR" altLang="en-US" dirty="0"/>
+              <a:t>    흐름이 완성됩니다</a:t>
+            </a:r>
+            <a:r>
+              <a:rPr lang="en-US" altLang="ko-KR" dirty="0"/>
+              <a:t>.</a:t>
+            </a:r>
+          </a:p>
+          <a:p>
+            <a:endParaRPr lang="en-US" altLang="ko-KR" dirty="0"/>
+          </a:p>
+          <a:p>
+            <a:r>
+              <a:rPr lang="en-US" altLang="ko-KR" dirty="0"/>
+              <a:t>  </a:t>
+            </a:r>
+            <a:r>
+              <a:rPr lang="en-US" dirty="0"/>
+              <a:t>Supplement</a:t>
+            </a:r>
+            <a:r>
+              <a:rPr lang="ko-KR" altLang="en-US" dirty="0"/>
+              <a:t>로 보내는 것</a:t>
+            </a:r>
+          </a:p>
+          <a:p>
+            <a:endParaRPr lang="ko-KR" altLang="en-US" dirty="0"/>
+          </a:p>
+          <a:p>
+            <a:r>
+              <a:rPr lang="ko-KR" altLang="en-US" dirty="0"/>
+              <a:t>  </a:t>
+            </a:r>
+            <a:r>
+              <a:rPr lang="en-US" altLang="ko-KR" dirty="0"/>
+              <a:t>- </a:t>
+            </a:r>
+            <a:r>
+              <a:rPr lang="en-US" dirty="0"/>
+              <a:t>fig_dynamic_repro_top10_vs_tail20_pair_violin_box.png</a:t>
+            </a:r>
+          </a:p>
+          <a:p>
+            <a:r>
+              <a:rPr lang="en-US" dirty="0"/>
+              <a:t>    </a:t>
+            </a:r>
+            <a:r>
+              <a:rPr lang="ko-KR" altLang="en-US" dirty="0"/>
+              <a:t>역할</a:t>
+            </a:r>
+            <a:r>
+              <a:rPr lang="en-US" altLang="ko-KR" dirty="0"/>
+              <a:t>: </a:t>
+            </a:r>
+            <a:r>
+              <a:rPr lang="en-US" dirty="0"/>
+              <a:t>case-level </a:t>
+            </a:r>
+            <a:r>
+              <a:rPr lang="ko-KR" altLang="en-US" dirty="0"/>
+              <a:t>결론을 </a:t>
+            </a:r>
+            <a:r>
+              <a:rPr lang="en-US" dirty="0"/>
+              <a:t>pairwise(5700</a:t>
+            </a:r>
+            <a:r>
+              <a:rPr lang="ko-KR" altLang="en-US" dirty="0"/>
+              <a:t>쌍</a:t>
+            </a:r>
+            <a:r>
+              <a:rPr lang="en-US" altLang="ko-KR" dirty="0"/>
+              <a:t>)</a:t>
+            </a:r>
+            <a:r>
+              <a:rPr lang="ko-KR" altLang="en-US" dirty="0"/>
+              <a:t>에서도 재확인하는 보강 증거</a:t>
+            </a:r>
+          </a:p>
+          <a:p>
+            <a:r>
+              <a:rPr lang="ko-KR" altLang="en-US" dirty="0"/>
+              <a:t>  </a:t>
+            </a:r>
+            <a:r>
+              <a:rPr lang="en-US" altLang="ko-KR" dirty="0"/>
+              <a:t>- </a:t>
+            </a:r>
+            <a:r>
+              <a:rPr lang="ko-KR" altLang="en-US" dirty="0"/>
+              <a:t>필요 시 </a:t>
+            </a:r>
+            <a:r>
+              <a:rPr lang="en-US" dirty="0" err="1"/>
+              <a:t>fig_dynamic_repro_pairwise_violin_box.png</a:t>
+            </a:r>
+            <a:r>
+              <a:rPr lang="en-US" dirty="0"/>
+              <a:t>(Jaccard vs Top-10) </a:t>
+            </a:r>
+            <a:r>
+              <a:rPr lang="ko-KR" altLang="en-US" dirty="0"/>
+              <a:t>추가</a:t>
+            </a:r>
+          </a:p>
+          <a:p>
+            <a:endParaRPr lang="ko-KR" altLang="en-US" dirty="0"/>
+          </a:p>
+          <a:p>
+            <a:r>
+              <a:rPr lang="ko-KR" altLang="en-US" dirty="0"/>
+              <a:t>  캡션 문구 핵심 프레임</a:t>
+            </a:r>
+          </a:p>
+          <a:p>
+            <a:endParaRPr lang="ko-KR" altLang="en-US" dirty="0"/>
+          </a:p>
+          <a:p>
+            <a:r>
+              <a:rPr lang="ko-KR" altLang="en-US" dirty="0"/>
+              <a:t>  </a:t>
+            </a:r>
+            <a:r>
+              <a:rPr lang="en-US" altLang="ko-KR" dirty="0"/>
+              <a:t>- “</a:t>
+            </a:r>
+            <a:r>
+              <a:rPr lang="en-US" dirty="0"/>
+              <a:t>Dynamic</a:t>
+            </a:r>
+            <a:r>
+              <a:rPr lang="ko-KR" altLang="en-US" dirty="0"/>
+              <a:t>은 </a:t>
+            </a:r>
+            <a:r>
+              <a:rPr lang="en-US" dirty="0"/>
+              <a:t>baseline </a:t>
+            </a:r>
+            <a:r>
+              <a:rPr lang="ko-KR" altLang="en-US" dirty="0"/>
+              <a:t>대비 높은 </a:t>
+            </a:r>
+            <a:r>
+              <a:rPr lang="en-US" dirty="0"/>
+              <a:t>coverage</a:t>
+            </a:r>
+            <a:r>
+              <a:rPr lang="ko-KR" altLang="en-US" dirty="0" err="1"/>
+              <a:t>를</a:t>
+            </a:r>
+            <a:r>
+              <a:rPr lang="ko-KR" altLang="en-US" dirty="0"/>
+              <a:t> 유지하면서</a:t>
+            </a:r>
+            <a:r>
+              <a:rPr lang="en-US" altLang="ko-KR" dirty="0"/>
+              <a:t>, </a:t>
+            </a:r>
+            <a:r>
+              <a:rPr lang="en-US" dirty="0"/>
+              <a:t>disease filter</a:t>
+            </a:r>
+            <a:r>
+              <a:rPr lang="ko-KR" altLang="en-US" dirty="0"/>
+              <a:t>로</a:t>
+            </a:r>
+          </a:p>
+          <a:p>
+            <a:r>
+              <a:rPr lang="ko-KR" altLang="en-US" dirty="0"/>
+              <a:t>    </a:t>
+            </a:r>
+            <a:r>
+              <a:rPr lang="en-US" dirty="0"/>
+              <a:t>contamination</a:t>
+            </a:r>
+            <a:r>
+              <a:rPr lang="ko-KR" altLang="en-US" dirty="0"/>
+              <a:t>을 억제한다</a:t>
+            </a:r>
+            <a:r>
+              <a:rPr lang="en-US" altLang="ko-KR" dirty="0"/>
+              <a:t>. </a:t>
+            </a:r>
+            <a:r>
+              <a:rPr lang="ko-KR" altLang="en-US" dirty="0"/>
+              <a:t>또한 반복 실행에서 </a:t>
+            </a:r>
+            <a:r>
+              <a:rPr lang="en-US" dirty="0"/>
+              <a:t>Top-10 </a:t>
+            </a:r>
+            <a:r>
+              <a:rPr lang="ko-KR" altLang="en-US" dirty="0"/>
+              <a:t>후보는 높은 일치도를</a:t>
+            </a:r>
+          </a:p>
+          <a:p>
+            <a:r>
+              <a:rPr lang="ko-KR" altLang="en-US" dirty="0"/>
+              <a:t>    보이고</a:t>
+            </a:r>
+            <a:r>
+              <a:rPr lang="en-US" altLang="ko-KR" dirty="0"/>
+              <a:t>, </a:t>
+            </a:r>
+            <a:r>
+              <a:rPr lang="en-US" dirty="0"/>
+              <a:t>Tail-20</a:t>
+            </a:r>
+            <a:r>
+              <a:rPr lang="ko-KR" altLang="en-US" dirty="0"/>
+              <a:t>은 상대적으로 다양한 후보를 제공한다</a:t>
+            </a:r>
+            <a:r>
+              <a:rPr lang="en-US" altLang="ko-KR" dirty="0"/>
+              <a:t>.”</a:t>
+            </a:r>
+            <a:endParaRPr lang="en-US" dirty="0"/>
+          </a:p>
+        </p:txBody>
+      </p:sp>
+      <p:sp>
+        <p:nvSpPr>
+          <p:cNvPr id="4" name="Slide Number Placeholder 3"/>
+          <p:cNvSpPr>
+            <a:spLocks noGrp="1"/>
+          </p:cNvSpPr>
+          <p:nvPr>
+            <p:ph type="sldNum" sz="quarter" idx="5"/>
+          </p:nvPr>
+        </p:nvSpPr>
+        <p:spPr/>
+        <p:txBody>
+          <a:bodyPr/>
+          <a:lstStyle/>
+          <a:p>
+            <a:fld id="{8FCACE96-7AB2-B243-B3F0-FB78F0A5C4C3}" type="slidenum">
+              <a:rPr lang="en-US" smtClean="0"/>
+              <a:t>3</a:t>
+            </a:fld>
+            <a:endParaRPr lang="en-US"/>
+          </a:p>
+        </p:txBody>
+      </p:sp>
+    </p:spTree>
+    <p:extLst>
+      <p:ext uri="{BB962C8B-B14F-4D97-AF65-F5344CB8AC3E}">
+        <p14:creationId xmlns:p14="http://schemas.microsoft.com/office/powerpoint/2010/main" val="2565399935"/>
+      </p:ext>
+    </p:extLst>
+  </p:cSld>
+  <p:clrMapOvr>
+    <a:masterClrMapping/>
+  </p:clrMapOvr>
+</p:notes>
+</file>
+
+<file path=ppt/notesSlides/notesSlide4.xml><?xml version="1.0" encoding="utf-8"?>
+<p:notes xmlns:a="http://schemas.openxmlformats.org/drawingml/2006/main" xmlns:r="http://schemas.openxmlformats.org/officeDocument/2006/relationships" xmlns:p="http://schemas.openxmlformats.org/presentationml/2006/main">
+  <p:cSld>
+    <p:spTree>
+      <p:nvGrpSpPr>
         <p:cNvPr id="1" name="">
           <a:extLst>
             <a:ext uri="{FF2B5EF4-FFF2-40B4-BE49-F238E27FC236}">
@@ -778,7 +1544,7 @@
           <a:p>
             <a:fld id="{8FCACE96-7AB2-B243-B3F0-FB78F0A5C4C3}" type="slidenum">
               <a:rPr lang="en-US" smtClean="0"/>
-              <a:t>2</a:t>
+              <a:t>5</a:t>
             </a:fld>
             <a:endParaRPr lang="en-US"/>
           </a:p>
@@ -797,7 +1563,7 @@
 </p:notes>
 </file>
 
-<file path=ppt/notesSlides/notesSlide3.xml><?xml version="1.0" encoding="utf-8"?>
+<file path=ppt/notesSlides/notesSlide5.xml><?xml version="1.0" encoding="utf-8"?>
 <p:notes xmlns:a="http://schemas.openxmlformats.org/drawingml/2006/main" xmlns:r="http://schemas.openxmlformats.org/officeDocument/2006/relationships" xmlns:p="http://schemas.openxmlformats.org/presentationml/2006/main">
   <p:cSld>
     <p:spTree>
@@ -933,7 +1699,7 @@
           <a:p>
             <a:fld id="{8FCACE96-7AB2-B243-B3F0-FB78F0A5C4C3}" type="slidenum">
               <a:rPr lang="en-US" smtClean="0"/>
-              <a:t>3</a:t>
+              <a:t>6</a:t>
             </a:fld>
             <a:endParaRPr lang="en-US"/>
           </a:p>
@@ -952,7 +1718,7 @@
 </p:notes>
 </file>
 
-<file path=ppt/notesSlides/notesSlide4.xml><?xml version="1.0" encoding="utf-8"?>
+<file path=ppt/notesSlides/notesSlide6.xml><?xml version="1.0" encoding="utf-8"?>
 <p:notes xmlns:a="http://schemas.openxmlformats.org/drawingml/2006/main" xmlns:r="http://schemas.openxmlformats.org/officeDocument/2006/relationships" xmlns:p="http://schemas.openxmlformats.org/presentationml/2006/main">
   <p:cSld>
     <p:spTree>
@@ -979,12 +1745,7 @@
             <p:ph type="sldImg"/>
           </p:nvPr>
         </p:nvSpPr>
-        <p:spPr>
-          <a:xfrm>
-            <a:off x="1885950" y="1143000"/>
-            <a:ext cx="3086100" cy="3086100"/>
-          </a:xfrm>
-        </p:spPr>
+        <p:spPr/>
       </p:sp>
       <p:sp>
         <p:nvSpPr>
@@ -1001,31 +1762,7 @@
           <a:bodyPr/>
           <a:lstStyle/>
           <a:p>
-            <a:r>
-              <a:rPr lang="en-US" b="1" dirty="0"/>
-              <a:t>Figure 4. Biological Interpreter Agent performs autonomous spatial cell-cell interaction analysis.</a:t>
-            </a:r>
             <a:endParaRPr lang="en-US" dirty="0"/>
-          </a:p>
-          <a:p>
-            <a:r>
-              <a:rPr lang="en-US" b="1" dirty="0"/>
-              <a:t>(A)</a:t>
-            </a:r>
-            <a:r>
-              <a:rPr lang="en-US" dirty="0"/>
-              <a:t> Detailed architecture of the Biological Interpreter Agent. The agent utilizes multiple MCP servers to perform automated biological interpretation with human-in-the-loop validation at critical decision points.</a:t>
-            </a:r>
-          </a:p>
-          <a:p>
-            <a:r>
-              <a:rPr lang="en-US" b="1" dirty="0"/>
-              <a:t>(B)</a:t>
-            </a:r>
-            <a:r>
-              <a:rPr lang="en-US" dirty="0"/>
-              <a:t> Workflow of the ST-CCI MCP server. The analysis consists of three parts: Part 1 (Steps 1-5) performs exploratory spatial analysis. Part 2 (Steps 6-9) conducts cell-cell interaction analysis using non-negative matrix factorization (NMF) to identify ligand-receptor (LR) interaction patterns. Part 3 (Steps 10-11) provides characterization and visualization of key LR pairs with quantitative analysis. The workflow concludes with an integrated summary of findings, clinical and therapeutic implications, and methodological innovations.</a:t>
-            </a:r>
           </a:p>
         </p:txBody>
       </p:sp>
@@ -1046,7 +1783,7 @@
           <a:p>
             <a:fld id="{8FCACE96-7AB2-B243-B3F0-FB78F0A5C4C3}" type="slidenum">
               <a:rPr lang="en-US" smtClean="0"/>
-              <a:t>4</a:t>
+              <a:t>7</a:t>
             </a:fld>
             <a:endParaRPr lang="en-US"/>
           </a:p>
@@ -1055,660 +1792,7 @@
     </p:spTree>
     <p:extLst>
       <p:ext uri="{BB962C8B-B14F-4D97-AF65-F5344CB8AC3E}">
-        <p14:creationId xmlns:p14="http://schemas.microsoft.com/office/powerpoint/2010/main" val="1426929292"/>
-      </p:ext>
-    </p:extLst>
-  </p:cSld>
-  <p:clrMapOvr>
-    <a:masterClrMapping/>
-  </p:clrMapOvr>
-</p:notes>
-</file>
-
-<file path=ppt/notesSlides/notesSlide5.xml><?xml version="1.0" encoding="utf-8"?>
-<p:notes xmlns:a="http://schemas.openxmlformats.org/drawingml/2006/main" xmlns:r="http://schemas.openxmlformats.org/officeDocument/2006/relationships" xmlns:p="http://schemas.openxmlformats.org/presentationml/2006/main">
-  <p:cSld>
-    <p:spTree>
-      <p:nvGrpSpPr>
-        <p:cNvPr id="1" name=""/>
-        <p:cNvGrpSpPr/>
-        <p:nvPr/>
-      </p:nvGrpSpPr>
-      <p:grpSpPr>
-        <a:xfrm>
-          <a:off x="0" y="0"/>
-          <a:ext cx="0" cy="0"/>
-          <a:chOff x="0" y="0"/>
-          <a:chExt cx="0" cy="0"/>
-        </a:xfrm>
-      </p:grpSpPr>
-      <p:sp>
-        <p:nvSpPr>
-          <p:cNvPr id="2" name="Slide Image Placeholder 1"/>
-          <p:cNvSpPr>
-            <a:spLocks noGrp="1" noRot="1" noChangeAspect="1"/>
-          </p:cNvSpPr>
-          <p:nvPr>
-            <p:ph type="sldImg"/>
-          </p:nvPr>
-        </p:nvSpPr>
-        <p:spPr/>
-      </p:sp>
-      <p:sp>
-        <p:nvSpPr>
-          <p:cNvPr id="3" name="Notes Placeholder 2"/>
-          <p:cNvSpPr>
-            <a:spLocks noGrp="1"/>
-          </p:cNvSpPr>
-          <p:nvPr>
-            <p:ph type="body" idx="1"/>
-          </p:nvPr>
-        </p:nvSpPr>
-        <p:spPr/>
-        <p:txBody>
-          <a:bodyPr/>
-          <a:lstStyle/>
-          <a:p>
-            <a:r>
-              <a:rPr lang="ko-KR" altLang="en-US" dirty="0"/>
-              <a:t> </a:t>
-            </a:r>
-            <a:r>
-              <a:rPr lang="en-US" altLang="ko-KR" dirty="0"/>
-              <a:t>- </a:t>
-            </a:r>
-            <a:r>
-              <a:rPr lang="ko-KR" altLang="en-US" dirty="0"/>
-              <a:t>본문에 **통합 멀티패널 </a:t>
-            </a:r>
-            <a:r>
-              <a:rPr lang="en-US" altLang="ko-KR" dirty="0"/>
-              <a:t>1</a:t>
-            </a:r>
-            <a:r>
-              <a:rPr lang="ko-KR" altLang="en-US" dirty="0"/>
-              <a:t>개</a:t>
-            </a:r>
-            <a:r>
-              <a:rPr lang="en-US" altLang="ko-KR" dirty="0"/>
-              <a:t>(</a:t>
-            </a:r>
-            <a:r>
-              <a:rPr lang="en-US" dirty="0" err="1"/>
-              <a:t>Fig.Xa</a:t>
-            </a:r>
-            <a:r>
-              <a:rPr lang="en-US" dirty="0"/>
-              <a:t>/b/c)**</a:t>
-            </a:r>
-            <a:r>
-              <a:rPr lang="ko-KR" altLang="en-US" dirty="0"/>
-              <a:t>만 둡니다</a:t>
-            </a:r>
-            <a:r>
-              <a:rPr lang="en-US" altLang="ko-KR" dirty="0"/>
-              <a:t>.</a:t>
-            </a:r>
-          </a:p>
-          <a:p>
-            <a:endParaRPr lang="en-US" altLang="ko-KR" dirty="0"/>
-          </a:p>
-          <a:p>
-            <a:r>
-              <a:rPr lang="en-US" altLang="ko-KR" dirty="0"/>
-              <a:t>  1. </a:t>
-            </a:r>
-            <a:r>
-              <a:rPr lang="en-US" dirty="0"/>
-              <a:t>Panel a: </a:t>
-            </a:r>
-            <a:r>
-              <a:rPr lang="en-US" dirty="0" err="1"/>
-              <a:t>fig_composite_cov_boxplot_case_mean.png</a:t>
-            </a:r>
-            <a:endParaRPr lang="en-US" dirty="0"/>
-          </a:p>
-          <a:p>
-            <a:r>
-              <a:rPr lang="en-US" dirty="0"/>
-              <a:t>     </a:t>
-            </a:r>
-            <a:r>
-              <a:rPr lang="ko-KR" altLang="en-US" dirty="0"/>
-              <a:t>목적</a:t>
-            </a:r>
-            <a:r>
-              <a:rPr lang="en-US" altLang="ko-KR" dirty="0"/>
-              <a:t>: “</a:t>
-            </a:r>
-            <a:r>
-              <a:rPr lang="ko-KR" altLang="en-US" dirty="0"/>
-              <a:t>찾아내는 양</a:t>
-            </a:r>
-            <a:r>
-              <a:rPr lang="en-US" altLang="ko-KR" dirty="0"/>
-              <a:t>(</a:t>
-            </a:r>
-            <a:r>
-              <a:rPr lang="en-US" dirty="0"/>
-              <a:t>coverage) </a:t>
-            </a:r>
-            <a:r>
-              <a:rPr lang="ko-KR" altLang="en-US" dirty="0"/>
-              <a:t>자체가 </a:t>
-            </a:r>
-            <a:r>
-              <a:rPr lang="en-US" dirty="0"/>
-              <a:t>baseline</a:t>
-            </a:r>
-            <a:r>
-              <a:rPr lang="ko-KR" altLang="en-US" dirty="0"/>
-              <a:t>보다 충분히 높다”</a:t>
-            </a:r>
-          </a:p>
-          <a:p>
-            <a:r>
-              <a:rPr lang="ko-KR" altLang="en-US" dirty="0"/>
-              <a:t>  </a:t>
-            </a:r>
-            <a:r>
-              <a:rPr lang="en-US" altLang="ko-KR" dirty="0"/>
-              <a:t>2. </a:t>
-            </a:r>
-            <a:r>
-              <a:rPr lang="en-US" dirty="0"/>
-              <a:t>Panel b: </a:t>
-            </a:r>
-            <a:r>
-              <a:rPr lang="en-US" dirty="0" err="1"/>
-              <a:t>fig_contamination_boxplot_case_mean.png</a:t>
-            </a:r>
-            <a:endParaRPr lang="en-US" dirty="0"/>
-          </a:p>
-          <a:p>
-            <a:r>
-              <a:rPr lang="en-US" dirty="0"/>
-              <a:t>     </a:t>
-            </a:r>
-            <a:r>
-              <a:rPr lang="ko-KR" altLang="en-US" dirty="0"/>
-              <a:t>목적</a:t>
-            </a:r>
-            <a:r>
-              <a:rPr lang="en-US" altLang="ko-KR" dirty="0"/>
-              <a:t>: “</a:t>
-            </a:r>
-            <a:r>
-              <a:rPr lang="ko-KR" altLang="en-US" dirty="0"/>
-              <a:t>질병 필터가 오염</a:t>
-            </a:r>
-            <a:r>
-              <a:rPr lang="en-US" altLang="ko-KR" dirty="0"/>
-              <a:t>(</a:t>
-            </a:r>
-            <a:r>
-              <a:rPr lang="ko-KR" altLang="en-US" dirty="0" err="1"/>
-              <a:t>할루시네이션성</a:t>
-            </a:r>
-            <a:r>
-              <a:rPr lang="ko-KR" altLang="en-US" dirty="0"/>
-              <a:t> 문맥 미스매치</a:t>
-            </a:r>
-            <a:r>
-              <a:rPr lang="en-US" altLang="ko-KR" dirty="0"/>
-              <a:t>)</a:t>
-            </a:r>
-            <a:r>
-              <a:rPr lang="ko-KR" altLang="en-US" dirty="0"/>
-              <a:t>을 강하게 억제한다”</a:t>
-            </a:r>
-          </a:p>
-          <a:p>
-            <a:r>
-              <a:rPr lang="ko-KR" altLang="en-US" dirty="0"/>
-              <a:t>  </a:t>
-            </a:r>
-            <a:r>
-              <a:rPr lang="en-US" altLang="ko-KR" dirty="0"/>
-              <a:t>3. </a:t>
-            </a:r>
-            <a:r>
-              <a:rPr lang="en-US" dirty="0"/>
-              <a:t>Panel c: fig_dynamic_repro_top10_vs_tail20_case_boxplot.png</a:t>
-            </a:r>
-          </a:p>
-          <a:p>
-            <a:r>
-              <a:rPr lang="en-US" dirty="0"/>
-              <a:t>     </a:t>
-            </a:r>
-            <a:r>
-              <a:rPr lang="ko-KR" altLang="en-US" dirty="0"/>
-              <a:t>목적</a:t>
-            </a:r>
-            <a:r>
-              <a:rPr lang="en-US" altLang="ko-KR" dirty="0"/>
-              <a:t>: “</a:t>
-            </a:r>
-            <a:r>
-              <a:rPr lang="en-US" dirty="0"/>
-              <a:t>Top-10</a:t>
-            </a:r>
-            <a:r>
-              <a:rPr lang="ko-KR" altLang="en-US" dirty="0"/>
-              <a:t>은 안정적</a:t>
-            </a:r>
-            <a:r>
-              <a:rPr lang="en-US" altLang="ko-KR" dirty="0"/>
-              <a:t>(</a:t>
-            </a:r>
-            <a:r>
-              <a:rPr lang="ko-KR" altLang="en-US" dirty="0"/>
-              <a:t>재현성 높음</a:t>
-            </a:r>
-            <a:r>
-              <a:rPr lang="en-US" altLang="ko-KR" dirty="0"/>
-              <a:t>), </a:t>
-            </a:r>
-            <a:r>
-              <a:rPr lang="en-US" dirty="0"/>
-              <a:t>Tail-20</a:t>
-            </a:r>
-            <a:r>
-              <a:rPr lang="ko-KR" altLang="en-US" dirty="0"/>
-              <a:t>은 다양성 유지”</a:t>
-            </a:r>
-          </a:p>
-          <a:p>
-            <a:endParaRPr lang="ko-KR" altLang="en-US" dirty="0"/>
-          </a:p>
-          <a:p>
-            <a:r>
-              <a:rPr lang="ko-KR" altLang="en-US" dirty="0"/>
-              <a:t>  왜 이 구성이 맞나</a:t>
-            </a:r>
-          </a:p>
-          <a:p>
-            <a:endParaRPr lang="ko-KR" altLang="en-US" dirty="0"/>
-          </a:p>
-          <a:p>
-            <a:r>
-              <a:rPr lang="ko-KR" altLang="en-US" dirty="0"/>
-              <a:t>  </a:t>
-            </a:r>
-            <a:r>
-              <a:rPr lang="en-US" altLang="ko-KR" dirty="0"/>
-              <a:t>- </a:t>
-            </a:r>
-            <a:r>
-              <a:rPr lang="en-US" dirty="0" err="1"/>
-              <a:t>a+b</a:t>
-            </a:r>
-            <a:r>
-              <a:rPr lang="ko-KR" altLang="en-US" dirty="0"/>
-              <a:t>가 “정확도</a:t>
-            </a:r>
-            <a:r>
-              <a:rPr lang="en-US" altLang="ko-KR" dirty="0"/>
-              <a:t>/</a:t>
-            </a:r>
-            <a:r>
-              <a:rPr lang="ko-KR" altLang="en-US" dirty="0"/>
-              <a:t>안전성</a:t>
-            </a:r>
-            <a:r>
-              <a:rPr lang="en-US" altLang="ko-KR" dirty="0"/>
-              <a:t>(</a:t>
-            </a:r>
-            <a:r>
-              <a:rPr lang="ko-KR" altLang="en-US" dirty="0" err="1"/>
-              <a:t>무할루시네이션</a:t>
-            </a:r>
-            <a:r>
-              <a:rPr lang="en-US" altLang="ko-KR" dirty="0"/>
-              <a:t>)”</a:t>
-            </a:r>
-            <a:r>
-              <a:rPr lang="ko-KR" altLang="en-US" dirty="0"/>
-              <a:t>의 핵심 증거 사슬</a:t>
-            </a:r>
-          </a:p>
-          <a:p>
-            <a:r>
-              <a:rPr lang="ko-KR" altLang="en-US" dirty="0"/>
-              <a:t>  </a:t>
-            </a:r>
-            <a:r>
-              <a:rPr lang="en-US" altLang="ko-KR" dirty="0"/>
-              <a:t>- </a:t>
-            </a:r>
-            <a:r>
-              <a:rPr lang="en-US" dirty="0"/>
-              <a:t>c</a:t>
-            </a:r>
-            <a:r>
-              <a:rPr lang="ko-KR" altLang="en-US" dirty="0"/>
-              <a:t>가 “안전하게 찾은 결과가 반복 시 어떻게 동작하는지</a:t>
-            </a:r>
-            <a:r>
-              <a:rPr lang="en-US" altLang="ko-KR" dirty="0"/>
-              <a:t>(</a:t>
-            </a:r>
-            <a:r>
-              <a:rPr lang="ko-KR" altLang="en-US" dirty="0"/>
-              <a:t>안정성</a:t>
-            </a:r>
-            <a:r>
-              <a:rPr lang="en-US" altLang="ko-KR" dirty="0"/>
-              <a:t>+</a:t>
-            </a:r>
-            <a:r>
-              <a:rPr lang="ko-KR" altLang="en-US" dirty="0" err="1"/>
-              <a:t>탐색성</a:t>
-            </a:r>
-            <a:r>
-              <a:rPr lang="en-US" altLang="ko-KR" dirty="0"/>
-              <a:t>)”</a:t>
-            </a:r>
-            <a:r>
-              <a:rPr lang="ko-KR" altLang="en-US" dirty="0" err="1"/>
-              <a:t>를</a:t>
-            </a:r>
-            <a:r>
-              <a:rPr lang="ko-KR" altLang="en-US" dirty="0"/>
-              <a:t> 보강</a:t>
-            </a:r>
-          </a:p>
-          <a:p>
-            <a:r>
-              <a:rPr lang="ko-KR" altLang="en-US" dirty="0"/>
-              <a:t>  </a:t>
-            </a:r>
-            <a:r>
-              <a:rPr lang="en-US" altLang="ko-KR" dirty="0"/>
-              <a:t>- </a:t>
-            </a:r>
-            <a:r>
-              <a:rPr lang="ko-KR" altLang="en-US" dirty="0"/>
-              <a:t>즉</a:t>
-            </a:r>
-            <a:r>
-              <a:rPr lang="en-US" altLang="ko-KR" dirty="0"/>
-              <a:t>, “</a:t>
-            </a:r>
-            <a:r>
-              <a:rPr lang="ko-KR" altLang="en-US" dirty="0"/>
-              <a:t>많이 찾기만 한 게 아니라</a:t>
-            </a:r>
-            <a:r>
-              <a:rPr lang="en-US" altLang="ko-KR" dirty="0"/>
-              <a:t>, </a:t>
-            </a:r>
-            <a:r>
-              <a:rPr lang="ko-KR" altLang="en-US" dirty="0"/>
-              <a:t>오염을 통제하면서 핵심은 </a:t>
-            </a:r>
-            <a:r>
-              <a:rPr lang="ko-KR" altLang="en-US" dirty="0" err="1"/>
-              <a:t>안정적”이라는</a:t>
-            </a:r>
-            <a:r>
-              <a:rPr lang="ko-KR" altLang="en-US" dirty="0"/>
-              <a:t> 논리</a:t>
-            </a:r>
-          </a:p>
-          <a:p>
-            <a:r>
-              <a:rPr lang="ko-KR" altLang="en-US" dirty="0"/>
-              <a:t>    흐름이 완성됩니다</a:t>
-            </a:r>
-            <a:r>
-              <a:rPr lang="en-US" altLang="ko-KR" dirty="0"/>
-              <a:t>.</a:t>
-            </a:r>
-          </a:p>
-          <a:p>
-            <a:endParaRPr lang="en-US" altLang="ko-KR" dirty="0"/>
-          </a:p>
-          <a:p>
-            <a:r>
-              <a:rPr lang="en-US" altLang="ko-KR" dirty="0"/>
-              <a:t>  </a:t>
-            </a:r>
-            <a:r>
-              <a:rPr lang="en-US" dirty="0"/>
-              <a:t>Supplement</a:t>
-            </a:r>
-            <a:r>
-              <a:rPr lang="ko-KR" altLang="en-US" dirty="0"/>
-              <a:t>로 보내는 것</a:t>
-            </a:r>
-          </a:p>
-          <a:p>
-            <a:endParaRPr lang="ko-KR" altLang="en-US" dirty="0"/>
-          </a:p>
-          <a:p>
-            <a:r>
-              <a:rPr lang="ko-KR" altLang="en-US" dirty="0"/>
-              <a:t>  </a:t>
-            </a:r>
-            <a:r>
-              <a:rPr lang="en-US" altLang="ko-KR" dirty="0"/>
-              <a:t>- </a:t>
-            </a:r>
-            <a:r>
-              <a:rPr lang="en-US" dirty="0"/>
-              <a:t>fig_dynamic_repro_top10_vs_tail20_pair_violin_box.png</a:t>
-            </a:r>
-          </a:p>
-          <a:p>
-            <a:r>
-              <a:rPr lang="en-US" dirty="0"/>
-              <a:t>    </a:t>
-            </a:r>
-            <a:r>
-              <a:rPr lang="ko-KR" altLang="en-US" dirty="0"/>
-              <a:t>역할</a:t>
-            </a:r>
-            <a:r>
-              <a:rPr lang="en-US" altLang="ko-KR" dirty="0"/>
-              <a:t>: </a:t>
-            </a:r>
-            <a:r>
-              <a:rPr lang="en-US" dirty="0"/>
-              <a:t>case-level </a:t>
-            </a:r>
-            <a:r>
-              <a:rPr lang="ko-KR" altLang="en-US" dirty="0"/>
-              <a:t>결론을 </a:t>
-            </a:r>
-            <a:r>
-              <a:rPr lang="en-US" dirty="0"/>
-              <a:t>pairwise(5700</a:t>
-            </a:r>
-            <a:r>
-              <a:rPr lang="ko-KR" altLang="en-US" dirty="0"/>
-              <a:t>쌍</a:t>
-            </a:r>
-            <a:r>
-              <a:rPr lang="en-US" altLang="ko-KR" dirty="0"/>
-              <a:t>)</a:t>
-            </a:r>
-            <a:r>
-              <a:rPr lang="ko-KR" altLang="en-US" dirty="0"/>
-              <a:t>에서도 재확인하는 보강 증거</a:t>
-            </a:r>
-          </a:p>
-          <a:p>
-            <a:r>
-              <a:rPr lang="ko-KR" altLang="en-US" dirty="0"/>
-              <a:t>  </a:t>
-            </a:r>
-            <a:r>
-              <a:rPr lang="en-US" altLang="ko-KR" dirty="0"/>
-              <a:t>- </a:t>
-            </a:r>
-            <a:r>
-              <a:rPr lang="ko-KR" altLang="en-US" dirty="0"/>
-              <a:t>필요 시 </a:t>
-            </a:r>
-            <a:r>
-              <a:rPr lang="en-US" dirty="0" err="1"/>
-              <a:t>fig_dynamic_repro_pairwise_violin_box.png</a:t>
-            </a:r>
-            <a:r>
-              <a:rPr lang="en-US" dirty="0"/>
-              <a:t>(Jaccard vs Top-10) </a:t>
-            </a:r>
-            <a:r>
-              <a:rPr lang="ko-KR" altLang="en-US" dirty="0"/>
-              <a:t>추가</a:t>
-            </a:r>
-          </a:p>
-          <a:p>
-            <a:endParaRPr lang="ko-KR" altLang="en-US" dirty="0"/>
-          </a:p>
-          <a:p>
-            <a:r>
-              <a:rPr lang="ko-KR" altLang="en-US" dirty="0"/>
-              <a:t>  캡션 문구 핵심 프레임</a:t>
-            </a:r>
-          </a:p>
-          <a:p>
-            <a:endParaRPr lang="ko-KR" altLang="en-US" dirty="0"/>
-          </a:p>
-          <a:p>
-            <a:r>
-              <a:rPr lang="ko-KR" altLang="en-US" dirty="0"/>
-              <a:t>  </a:t>
-            </a:r>
-            <a:r>
-              <a:rPr lang="en-US" altLang="ko-KR" dirty="0"/>
-              <a:t>- “</a:t>
-            </a:r>
-            <a:r>
-              <a:rPr lang="en-US" dirty="0"/>
-              <a:t>Dynamic</a:t>
-            </a:r>
-            <a:r>
-              <a:rPr lang="ko-KR" altLang="en-US" dirty="0"/>
-              <a:t>은 </a:t>
-            </a:r>
-            <a:r>
-              <a:rPr lang="en-US" dirty="0"/>
-              <a:t>baseline </a:t>
-            </a:r>
-            <a:r>
-              <a:rPr lang="ko-KR" altLang="en-US" dirty="0"/>
-              <a:t>대비 높은 </a:t>
-            </a:r>
-            <a:r>
-              <a:rPr lang="en-US" dirty="0"/>
-              <a:t>coverage</a:t>
-            </a:r>
-            <a:r>
-              <a:rPr lang="ko-KR" altLang="en-US" dirty="0" err="1"/>
-              <a:t>를</a:t>
-            </a:r>
-            <a:r>
-              <a:rPr lang="ko-KR" altLang="en-US" dirty="0"/>
-              <a:t> 유지하면서</a:t>
-            </a:r>
-            <a:r>
-              <a:rPr lang="en-US" altLang="ko-KR" dirty="0"/>
-              <a:t>, </a:t>
-            </a:r>
-            <a:r>
-              <a:rPr lang="en-US" dirty="0"/>
-              <a:t>disease filter</a:t>
-            </a:r>
-            <a:r>
-              <a:rPr lang="ko-KR" altLang="en-US" dirty="0"/>
-              <a:t>로</a:t>
-            </a:r>
-          </a:p>
-          <a:p>
-            <a:r>
-              <a:rPr lang="ko-KR" altLang="en-US" dirty="0"/>
-              <a:t>    </a:t>
-            </a:r>
-            <a:r>
-              <a:rPr lang="en-US" dirty="0"/>
-              <a:t>contamination</a:t>
-            </a:r>
-            <a:r>
-              <a:rPr lang="ko-KR" altLang="en-US" dirty="0"/>
-              <a:t>을 억제한다</a:t>
-            </a:r>
-            <a:r>
-              <a:rPr lang="en-US" altLang="ko-KR" dirty="0"/>
-              <a:t>. </a:t>
-            </a:r>
-            <a:r>
-              <a:rPr lang="ko-KR" altLang="en-US" dirty="0"/>
-              <a:t>또한 반복 실행에서 </a:t>
-            </a:r>
-            <a:r>
-              <a:rPr lang="en-US" dirty="0"/>
-              <a:t>Top-10 </a:t>
-            </a:r>
-            <a:r>
-              <a:rPr lang="ko-KR" altLang="en-US" dirty="0"/>
-              <a:t>후보는 높은 일치도를</a:t>
-            </a:r>
-          </a:p>
-          <a:p>
-            <a:r>
-              <a:rPr lang="ko-KR" altLang="en-US" dirty="0"/>
-              <a:t>    보이고</a:t>
-            </a:r>
-            <a:r>
-              <a:rPr lang="en-US" altLang="ko-KR" dirty="0"/>
-              <a:t>, </a:t>
-            </a:r>
-            <a:r>
-              <a:rPr lang="en-US" dirty="0"/>
-              <a:t>Tail-20</a:t>
-            </a:r>
-            <a:r>
-              <a:rPr lang="ko-KR" altLang="en-US" dirty="0"/>
-              <a:t>은 상대적으로 다양한 후보를 제공한다</a:t>
-            </a:r>
-            <a:r>
-              <a:rPr lang="en-US" altLang="ko-KR" dirty="0"/>
-              <a:t>.”</a:t>
-            </a:r>
-            <a:endParaRPr lang="en-US" dirty="0"/>
-          </a:p>
-        </p:txBody>
-      </p:sp>
-      <p:sp>
-        <p:nvSpPr>
-          <p:cNvPr id="4" name="Slide Number Placeholder 3"/>
-          <p:cNvSpPr>
-            <a:spLocks noGrp="1"/>
-          </p:cNvSpPr>
-          <p:nvPr>
-            <p:ph type="sldNum" sz="quarter" idx="5"/>
-          </p:nvPr>
-        </p:nvSpPr>
-        <p:spPr/>
-        <p:txBody>
-          <a:bodyPr/>
-          <a:lstStyle/>
-          <a:p>
-            <a:fld id="{8FCACE96-7AB2-B243-B3F0-FB78F0A5C4C3}" type="slidenum">
-              <a:rPr lang="en-US" smtClean="0"/>
-              <a:t>5</a:t>
-            </a:fld>
-            <a:endParaRPr lang="en-US"/>
-          </a:p>
-        </p:txBody>
-      </p:sp>
-    </p:spTree>
-    <p:extLst>
-      <p:ext uri="{BB962C8B-B14F-4D97-AF65-F5344CB8AC3E}">
-        <p14:creationId xmlns:p14="http://schemas.microsoft.com/office/powerpoint/2010/main" val="2565399935"/>
+        <p14:creationId xmlns:p14="http://schemas.microsoft.com/office/powerpoint/2010/main" val="618709334"/>
       </p:ext>
     </p:extLst>
   </p:cSld>
@@ -1849,7 +1933,7 @@
           <a:p>
             <a:fld id="{D2647055-459B-C345-AAA3-B8FDF97E4C97}" type="datetimeFigureOut">
               <a:rPr lang="en-US" smtClean="0"/>
-              <a:t>3/11/26</a:t>
+              <a:t>3/16/26</a:t>
             </a:fld>
             <a:endParaRPr lang="en-US"/>
           </a:p>
@@ -2019,7 +2103,7 @@
           <a:p>
             <a:fld id="{D2647055-459B-C345-AAA3-B8FDF97E4C97}" type="datetimeFigureOut">
               <a:rPr lang="en-US" smtClean="0"/>
-              <a:t>3/11/26</a:t>
+              <a:t>3/16/26</a:t>
             </a:fld>
             <a:endParaRPr lang="en-US"/>
           </a:p>
@@ -2199,7 +2283,7 @@
           <a:p>
             <a:fld id="{D2647055-459B-C345-AAA3-B8FDF97E4C97}" type="datetimeFigureOut">
               <a:rPr lang="en-US" smtClean="0"/>
-              <a:t>3/11/26</a:t>
+              <a:t>3/16/26</a:t>
             </a:fld>
             <a:endParaRPr lang="en-US"/>
           </a:p>
@@ -2369,7 +2453,7 @@
           <a:p>
             <a:fld id="{D2647055-459B-C345-AAA3-B8FDF97E4C97}" type="datetimeFigureOut">
               <a:rPr lang="en-US" smtClean="0"/>
-              <a:t>3/11/26</a:t>
+              <a:t>3/16/26</a:t>
             </a:fld>
             <a:endParaRPr lang="en-US"/>
           </a:p>
@@ -2615,7 +2699,7 @@
           <a:p>
             <a:fld id="{D2647055-459B-C345-AAA3-B8FDF97E4C97}" type="datetimeFigureOut">
               <a:rPr lang="en-US" smtClean="0"/>
-              <a:t>3/11/26</a:t>
+              <a:t>3/16/26</a:t>
             </a:fld>
             <a:endParaRPr lang="en-US"/>
           </a:p>
@@ -2847,7 +2931,7 @@
           <a:p>
             <a:fld id="{D2647055-459B-C345-AAA3-B8FDF97E4C97}" type="datetimeFigureOut">
               <a:rPr lang="en-US" smtClean="0"/>
-              <a:t>3/11/26</a:t>
+              <a:t>3/16/26</a:t>
             </a:fld>
             <a:endParaRPr lang="en-US"/>
           </a:p>
@@ -3214,7 +3298,7 @@
           <a:p>
             <a:fld id="{D2647055-459B-C345-AAA3-B8FDF97E4C97}" type="datetimeFigureOut">
               <a:rPr lang="en-US" smtClean="0"/>
-              <a:t>3/11/26</a:t>
+              <a:t>3/16/26</a:t>
             </a:fld>
             <a:endParaRPr lang="en-US"/>
           </a:p>
@@ -3332,7 +3416,7 @@
           <a:p>
             <a:fld id="{D2647055-459B-C345-AAA3-B8FDF97E4C97}" type="datetimeFigureOut">
               <a:rPr lang="en-US" smtClean="0"/>
-              <a:t>3/11/26</a:t>
+              <a:t>3/16/26</a:t>
             </a:fld>
             <a:endParaRPr lang="en-US"/>
           </a:p>
@@ -3427,7 +3511,7 @@
           <a:p>
             <a:fld id="{D2647055-459B-C345-AAA3-B8FDF97E4C97}" type="datetimeFigureOut">
               <a:rPr lang="en-US" smtClean="0"/>
-              <a:t>3/11/26</a:t>
+              <a:t>3/16/26</a:t>
             </a:fld>
             <a:endParaRPr lang="en-US"/>
           </a:p>
@@ -3704,7 +3788,7 @@
           <a:p>
             <a:fld id="{D2647055-459B-C345-AAA3-B8FDF97E4C97}" type="datetimeFigureOut">
               <a:rPr lang="en-US" smtClean="0"/>
-              <a:t>3/11/26</a:t>
+              <a:t>3/16/26</a:t>
             </a:fld>
             <a:endParaRPr lang="en-US"/>
           </a:p>
@@ -3961,7 +4045,7 @@
           <a:p>
             <a:fld id="{D2647055-459B-C345-AAA3-B8FDF97E4C97}" type="datetimeFigureOut">
               <a:rPr lang="en-US" smtClean="0"/>
-              <a:t>3/11/26</a:t>
+              <a:t>3/16/26</a:t>
             </a:fld>
             <a:endParaRPr lang="en-US"/>
           </a:p>
@@ -4174,7 +4258,7 @@
           <a:p>
             <a:fld id="{D2647055-459B-C345-AAA3-B8FDF97E4C97}" type="datetimeFigureOut">
               <a:rPr lang="en-US" smtClean="0"/>
-              <a:t>3/11/26</a:t>
+              <a:t>3/16/26</a:t>
             </a:fld>
             <a:endParaRPr lang="en-US"/>
           </a:p>
@@ -4619,588 +4703,6 @@
       </p:sp>
       <p:sp>
         <p:nvSpPr>
-          <p:cNvPr id="1117" name="Rounded Rectangle 1116">
-            <a:extLst>
-              <a:ext uri="{FF2B5EF4-FFF2-40B4-BE49-F238E27FC236}">
-                <a16:creationId xmlns:a16="http://schemas.microsoft.com/office/drawing/2014/main" id="{15190C68-8739-E1C3-30B2-F781D63FA80D}"/>
-              </a:ext>
-            </a:extLst>
-          </p:cNvPr>
-          <p:cNvSpPr/>
-          <p:nvPr/>
-        </p:nvSpPr>
-        <p:spPr>
-          <a:xfrm>
-            <a:off x="1405944" y="8460756"/>
-            <a:ext cx="3865413" cy="1254157"/>
-          </a:xfrm>
-          <a:prstGeom prst="roundRect">
-            <a:avLst>
-              <a:gd name="adj" fmla="val 10314"/>
-            </a:avLst>
-          </a:prstGeom>
-          <a:solidFill>
-            <a:sysClr val="window" lastClr="FFFFFF"/>
-          </a:solidFill>
-          <a:ln w="12700" cap="flat" cmpd="sng" algn="ctr">
-            <a:solidFill>
-              <a:srgbClr val="FFC000"/>
-            </a:solidFill>
-            <a:prstDash val="solid"/>
-            <a:miter lim="800000"/>
-          </a:ln>
-          <a:effectLst/>
-        </p:spPr>
-        <p:txBody>
-          <a:bodyPr lIns="0" tIns="0" rIns="0" bIns="0" rtlCol="0" anchor="ctr"/>
-          <a:lstStyle/>
-          <a:p>
-            <a:pPr algn="ctr" defTabSz="914400">
-              <a:defRPr/>
-            </a:pPr>
-            <a:r>
-              <a:rPr lang="en-US" sz="1400" b="1" kern="0" dirty="0">
-                <a:solidFill>
-                  <a:prstClr val="black"/>
-                </a:solidFill>
-                <a:latin typeface="Arial" panose="020B0604020202020204" pitchFamily="34" charset="0"/>
-                <a:cs typeface="Arial" panose="020B0604020202020204" pitchFamily="34" charset="0"/>
-              </a:rPr>
-              <a:t>MCP Server </a:t>
-            </a:r>
-          </a:p>
-          <a:p>
-            <a:pPr algn="ctr" defTabSz="914400">
-              <a:defRPr/>
-            </a:pPr>
-            <a:endParaRPr lang="en-US" sz="1400" b="1" kern="0" dirty="0">
-              <a:solidFill>
-                <a:prstClr val="black"/>
-              </a:solidFill>
-              <a:latin typeface="Arial" panose="020B0604020202020204" pitchFamily="34" charset="0"/>
-              <a:cs typeface="Arial" panose="020B0604020202020204" pitchFamily="34" charset="0"/>
-            </a:endParaRPr>
-          </a:p>
-          <a:p>
-            <a:pPr algn="ctr" defTabSz="914400">
-              <a:defRPr/>
-            </a:pPr>
-            <a:endParaRPr lang="en-US" sz="1400" b="1" kern="0" dirty="0">
-              <a:solidFill>
-                <a:prstClr val="black"/>
-              </a:solidFill>
-              <a:latin typeface="Arial" panose="020B0604020202020204" pitchFamily="34" charset="0"/>
-              <a:cs typeface="Arial" panose="020B0604020202020204" pitchFamily="34" charset="0"/>
-            </a:endParaRPr>
-          </a:p>
-          <a:p>
-            <a:pPr algn="ctr" defTabSz="914400">
-              <a:defRPr/>
-            </a:pPr>
-            <a:endParaRPr lang="en-US" sz="1400" b="1" kern="0" dirty="0">
-              <a:solidFill>
-                <a:prstClr val="black"/>
-              </a:solidFill>
-              <a:latin typeface="Arial" panose="020B0604020202020204" pitchFamily="34" charset="0"/>
-              <a:cs typeface="Arial" panose="020B0604020202020204" pitchFamily="34" charset="0"/>
-            </a:endParaRPr>
-          </a:p>
-          <a:p>
-            <a:pPr algn="ctr" defTabSz="914400">
-              <a:defRPr/>
-            </a:pPr>
-            <a:endParaRPr lang="en-US" sz="1400" b="1" kern="0" dirty="0">
-              <a:solidFill>
-                <a:prstClr val="black"/>
-              </a:solidFill>
-              <a:latin typeface="Arial" panose="020B0604020202020204" pitchFamily="34" charset="0"/>
-              <a:cs typeface="Arial" panose="020B0604020202020204" pitchFamily="34" charset="0"/>
-            </a:endParaRPr>
-          </a:p>
-          <a:p>
-            <a:pPr algn="ctr" defTabSz="914400">
-              <a:defRPr/>
-            </a:pPr>
-            <a:endParaRPr lang="en-US" sz="1400" b="1" kern="0" dirty="0">
-              <a:solidFill>
-                <a:prstClr val="black"/>
-              </a:solidFill>
-              <a:latin typeface="Arial" panose="020B0604020202020204" pitchFamily="34" charset="0"/>
-              <a:cs typeface="Arial" panose="020B0604020202020204" pitchFamily="34" charset="0"/>
-            </a:endParaRPr>
-          </a:p>
-        </p:txBody>
-      </p:sp>
-      <p:sp>
-        <p:nvSpPr>
-          <p:cNvPr id="1140" name="Rounded Rectangle 1139">
-            <a:extLst>
-              <a:ext uri="{FF2B5EF4-FFF2-40B4-BE49-F238E27FC236}">
-                <a16:creationId xmlns:a16="http://schemas.microsoft.com/office/drawing/2014/main" id="{99B130D1-06AF-9071-4D3C-DDDAEBB7C828}"/>
-              </a:ext>
-            </a:extLst>
-          </p:cNvPr>
-          <p:cNvSpPr/>
-          <p:nvPr/>
-        </p:nvSpPr>
-        <p:spPr>
-          <a:xfrm>
-            <a:off x="2091497" y="8711069"/>
-            <a:ext cx="1203609" cy="406469"/>
-          </a:xfrm>
-          <a:prstGeom prst="roundRect">
-            <a:avLst/>
-          </a:prstGeom>
-          <a:gradFill rotWithShape="1">
-            <a:gsLst>
-              <a:gs pos="0">
-                <a:srgbClr val="FFC000">
-                  <a:lumMod val="110000"/>
-                  <a:satMod val="105000"/>
-                  <a:tint val="67000"/>
-                </a:srgbClr>
-              </a:gs>
-              <a:gs pos="50000">
-                <a:srgbClr val="FFC000">
-                  <a:lumMod val="105000"/>
-                  <a:satMod val="103000"/>
-                  <a:tint val="73000"/>
-                </a:srgbClr>
-              </a:gs>
-              <a:gs pos="100000">
-                <a:srgbClr val="FFC000">
-                  <a:lumMod val="105000"/>
-                  <a:satMod val="109000"/>
-                  <a:tint val="81000"/>
-                </a:srgbClr>
-              </a:gs>
-            </a:gsLst>
-            <a:lin ang="5400000" scaled="0"/>
-          </a:gradFill>
-          <a:ln w="6350" cap="flat" cmpd="sng" algn="ctr">
-            <a:solidFill>
-              <a:srgbClr val="FFC000"/>
-            </a:solidFill>
-            <a:prstDash val="solid"/>
-            <a:miter lim="800000"/>
-          </a:ln>
-          <a:effectLst/>
-        </p:spPr>
-        <p:txBody>
-          <a:bodyPr lIns="0" tIns="0" rIns="0" bIns="0" rtlCol="0" anchor="ctr"/>
-          <a:lstStyle/>
-          <a:p>
-            <a:pPr algn="ctr" defTabSz="914400">
-              <a:defRPr/>
-            </a:pPr>
-            <a:r>
-              <a:rPr lang="en-US" sz="1200" dirty="0">
-                <a:solidFill>
-                  <a:srgbClr val="000000"/>
-                </a:solidFill>
-                <a:latin typeface="Arial" panose="020B0604020202020204" pitchFamily="34" charset="0"/>
-                <a:cs typeface="Arial" panose="020B0604020202020204" pitchFamily="34" charset="0"/>
-              </a:rPr>
-              <a:t>MAST-RAG</a:t>
-            </a:r>
-            <a:endParaRPr lang="en-US" sz="1200" kern="0" dirty="0">
-              <a:solidFill>
-                <a:prstClr val="black"/>
-              </a:solidFill>
-              <a:latin typeface="Arial" panose="020B0604020202020204" pitchFamily="34" charset="0"/>
-              <a:cs typeface="Arial" panose="020B0604020202020204" pitchFamily="34" charset="0"/>
-            </a:endParaRPr>
-          </a:p>
-        </p:txBody>
-      </p:sp>
-      <p:sp>
-        <p:nvSpPr>
-          <p:cNvPr id="1142" name="Rounded Rectangle 1141">
-            <a:extLst>
-              <a:ext uri="{FF2B5EF4-FFF2-40B4-BE49-F238E27FC236}">
-                <a16:creationId xmlns:a16="http://schemas.microsoft.com/office/drawing/2014/main" id="{DF25C1BA-93B4-AFAD-A246-E82A271F422E}"/>
-              </a:ext>
-            </a:extLst>
-          </p:cNvPr>
-          <p:cNvSpPr/>
-          <p:nvPr/>
-        </p:nvSpPr>
-        <p:spPr>
-          <a:xfrm>
-            <a:off x="3363132" y="8721988"/>
-            <a:ext cx="1203609" cy="406469"/>
-          </a:xfrm>
-          <a:prstGeom prst="roundRect">
-            <a:avLst/>
-          </a:prstGeom>
-          <a:gradFill rotWithShape="1">
-            <a:gsLst>
-              <a:gs pos="0">
-                <a:srgbClr val="FFC000">
-                  <a:lumMod val="110000"/>
-                  <a:satMod val="105000"/>
-                  <a:tint val="67000"/>
-                </a:srgbClr>
-              </a:gs>
-              <a:gs pos="50000">
-                <a:srgbClr val="FFC000">
-                  <a:lumMod val="105000"/>
-                  <a:satMod val="103000"/>
-                  <a:tint val="73000"/>
-                </a:srgbClr>
-              </a:gs>
-              <a:gs pos="100000">
-                <a:srgbClr val="FFC000">
-                  <a:lumMod val="105000"/>
-                  <a:satMod val="109000"/>
-                  <a:tint val="81000"/>
-                </a:srgbClr>
-              </a:gs>
-            </a:gsLst>
-            <a:lin ang="5400000" scaled="0"/>
-          </a:gradFill>
-          <a:ln w="6350" cap="flat" cmpd="sng" algn="ctr">
-            <a:solidFill>
-              <a:srgbClr val="FFC000"/>
-            </a:solidFill>
-            <a:prstDash val="solid"/>
-            <a:miter lim="800000"/>
-          </a:ln>
-          <a:effectLst/>
-        </p:spPr>
-        <p:txBody>
-          <a:bodyPr lIns="0" tIns="0" rIns="0" bIns="0" rtlCol="0" anchor="ctr"/>
-          <a:lstStyle/>
-          <a:p>
-            <a:pPr algn="ctr" defTabSz="914400">
-              <a:defRPr/>
-            </a:pPr>
-            <a:r>
-              <a:rPr lang="en-US" sz="1200" dirty="0" err="1">
-                <a:solidFill>
-                  <a:srgbClr val="000000"/>
-                </a:solidFill>
-                <a:latin typeface="Arial" panose="020B0604020202020204" pitchFamily="34" charset="0"/>
-                <a:cs typeface="Arial" panose="020B0604020202020204" pitchFamily="34" charset="0"/>
-              </a:rPr>
-              <a:t>rMCPAgent</a:t>
-            </a:r>
-            <a:endParaRPr lang="en-US" sz="1200" kern="0" dirty="0">
-              <a:solidFill>
-                <a:prstClr val="black"/>
-              </a:solidFill>
-              <a:latin typeface="Arial" panose="020B0604020202020204" pitchFamily="34" charset="0"/>
-              <a:cs typeface="Arial" panose="020B0604020202020204" pitchFamily="34" charset="0"/>
-            </a:endParaRPr>
-          </a:p>
-        </p:txBody>
-      </p:sp>
-      <p:sp>
-        <p:nvSpPr>
-          <p:cNvPr id="1143" name="Rounded Rectangle 1142">
-            <a:extLst>
-              <a:ext uri="{FF2B5EF4-FFF2-40B4-BE49-F238E27FC236}">
-                <a16:creationId xmlns:a16="http://schemas.microsoft.com/office/drawing/2014/main" id="{F0022F5D-4958-476C-CC4C-E720516E3A97}"/>
-              </a:ext>
-            </a:extLst>
-          </p:cNvPr>
-          <p:cNvSpPr/>
-          <p:nvPr/>
-        </p:nvSpPr>
-        <p:spPr>
-          <a:xfrm>
-            <a:off x="2101243" y="9224877"/>
-            <a:ext cx="1203609" cy="406469"/>
-          </a:xfrm>
-          <a:prstGeom prst="roundRect">
-            <a:avLst/>
-          </a:prstGeom>
-          <a:gradFill rotWithShape="1">
-            <a:gsLst>
-              <a:gs pos="0">
-                <a:srgbClr val="FFC000">
-                  <a:lumMod val="110000"/>
-                  <a:satMod val="105000"/>
-                  <a:tint val="67000"/>
-                </a:srgbClr>
-              </a:gs>
-              <a:gs pos="50000">
-                <a:srgbClr val="FFC000">
-                  <a:lumMod val="105000"/>
-                  <a:satMod val="103000"/>
-                  <a:tint val="73000"/>
-                </a:srgbClr>
-              </a:gs>
-              <a:gs pos="100000">
-                <a:srgbClr val="FFC000">
-                  <a:lumMod val="105000"/>
-                  <a:satMod val="109000"/>
-                  <a:tint val="81000"/>
-                </a:srgbClr>
-              </a:gs>
-            </a:gsLst>
-            <a:lin ang="5400000" scaled="0"/>
-          </a:gradFill>
-          <a:ln w="6350" cap="flat" cmpd="sng" algn="ctr">
-            <a:solidFill>
-              <a:srgbClr val="FFC000"/>
-            </a:solidFill>
-            <a:prstDash val="solid"/>
-            <a:miter lim="800000"/>
-          </a:ln>
-          <a:effectLst/>
-        </p:spPr>
-        <p:txBody>
-          <a:bodyPr lIns="0" tIns="0" rIns="0" bIns="0" rtlCol="0" anchor="ctr"/>
-          <a:lstStyle/>
-          <a:p>
-            <a:pPr algn="ctr" defTabSz="615940" fontAlgn="t"/>
-            <a:r>
-              <a:rPr lang="en-US" sz="1200" dirty="0">
-                <a:solidFill>
-                  <a:srgbClr val="000000"/>
-                </a:solidFill>
-                <a:latin typeface="Arial" panose="020B0604020202020204" pitchFamily="34" charset="0"/>
-                <a:cs typeface="Arial" panose="020B0604020202020204" pitchFamily="34" charset="0"/>
-              </a:rPr>
-              <a:t>SC-reference-selector</a:t>
-            </a:r>
-          </a:p>
-        </p:txBody>
-      </p:sp>
-      <p:grpSp>
-        <p:nvGrpSpPr>
-          <p:cNvPr id="1232" name="Group 1231">
-            <a:extLst>
-              <a:ext uri="{FF2B5EF4-FFF2-40B4-BE49-F238E27FC236}">
-                <a16:creationId xmlns:a16="http://schemas.microsoft.com/office/drawing/2014/main" id="{E2F05E95-9E37-48D2-B923-3573E77C1E0B}"/>
-              </a:ext>
-            </a:extLst>
-          </p:cNvPr>
-          <p:cNvGrpSpPr/>
-          <p:nvPr/>
-        </p:nvGrpSpPr>
-        <p:grpSpPr>
-          <a:xfrm>
-            <a:off x="3011580" y="7848487"/>
-            <a:ext cx="703104" cy="556352"/>
-            <a:chOff x="12291944" y="4091246"/>
-            <a:chExt cx="703104" cy="578683"/>
-          </a:xfrm>
-        </p:grpSpPr>
-        <p:cxnSp>
-          <p:nvCxnSpPr>
-            <p:cNvPr id="1137" name="Straight Arrow Connector 1136">
-              <a:extLst>
-                <a:ext uri="{FF2B5EF4-FFF2-40B4-BE49-F238E27FC236}">
-                  <a16:creationId xmlns:a16="http://schemas.microsoft.com/office/drawing/2014/main" id="{95C1083B-9171-75C1-6A06-8A5521147A14}"/>
-                </a:ext>
-              </a:extLst>
-            </p:cNvPr>
-            <p:cNvCxnSpPr>
-              <a:cxnSpLocks/>
-            </p:cNvCxnSpPr>
-            <p:nvPr/>
-          </p:nvCxnSpPr>
-          <p:spPr>
-            <a:xfrm>
-              <a:off x="12558996" y="4091247"/>
-              <a:ext cx="0" cy="578682"/>
-            </a:xfrm>
-            <a:prstGeom prst="straightConnector1">
-              <a:avLst/>
-            </a:prstGeom>
-            <a:noFill/>
-            <a:ln w="6350" cap="flat" cmpd="sng" algn="ctr">
-              <a:solidFill>
-                <a:sysClr val="windowText" lastClr="000000"/>
-              </a:solidFill>
-              <a:prstDash val="solid"/>
-              <a:miter lim="800000"/>
-              <a:tailEnd type="triangle"/>
-            </a:ln>
-            <a:effectLst/>
-          </p:spPr>
-        </p:cxnSp>
-        <p:cxnSp>
-          <p:nvCxnSpPr>
-            <p:cNvPr id="1138" name="Straight Arrow Connector 1137">
-              <a:extLst>
-                <a:ext uri="{FF2B5EF4-FFF2-40B4-BE49-F238E27FC236}">
-                  <a16:creationId xmlns:a16="http://schemas.microsoft.com/office/drawing/2014/main" id="{ABA1F38A-32B2-A4A5-F16C-17B3EDC9272A}"/>
-                </a:ext>
-              </a:extLst>
-            </p:cNvPr>
-            <p:cNvCxnSpPr>
-              <a:cxnSpLocks/>
-            </p:cNvCxnSpPr>
-            <p:nvPr/>
-          </p:nvCxnSpPr>
-          <p:spPr>
-            <a:xfrm flipV="1">
-              <a:off x="12736795" y="4091246"/>
-              <a:ext cx="0" cy="578683"/>
-            </a:xfrm>
-            <a:prstGeom prst="straightConnector1">
-              <a:avLst/>
-            </a:prstGeom>
-            <a:noFill/>
-            <a:ln w="6350" cap="flat" cmpd="sng" algn="ctr">
-              <a:solidFill>
-                <a:sysClr val="windowText" lastClr="000000"/>
-              </a:solidFill>
-              <a:prstDash val="solid"/>
-              <a:miter lim="800000"/>
-              <a:tailEnd type="triangle"/>
-            </a:ln>
-            <a:effectLst/>
-          </p:spPr>
-        </p:cxnSp>
-        <p:sp>
-          <p:nvSpPr>
-            <p:cNvPr id="1144" name="Snip Single Corner Rectangle 1143">
-              <a:extLst>
-                <a:ext uri="{FF2B5EF4-FFF2-40B4-BE49-F238E27FC236}">
-                  <a16:creationId xmlns:a16="http://schemas.microsoft.com/office/drawing/2014/main" id="{054E208A-36F8-A390-A704-DEE897E9167F}"/>
-                </a:ext>
-              </a:extLst>
-            </p:cNvPr>
-            <p:cNvSpPr/>
-            <p:nvPr/>
-          </p:nvSpPr>
-          <p:spPr>
-            <a:xfrm>
-              <a:off x="12291944" y="4240558"/>
-              <a:ext cx="703104" cy="296038"/>
-            </a:xfrm>
-            <a:prstGeom prst="snip1Rect">
-              <a:avLst>
-                <a:gd name="adj" fmla="val 50000"/>
-              </a:avLst>
-            </a:prstGeom>
-            <a:ln>
-              <a:prstDash val="dash"/>
-            </a:ln>
-          </p:spPr>
-          <p:style>
-            <a:lnRef idx="1">
-              <a:schemeClr val="accent2"/>
-            </a:lnRef>
-            <a:fillRef idx="2">
-              <a:schemeClr val="accent2"/>
-            </a:fillRef>
-            <a:effectRef idx="1">
-              <a:schemeClr val="accent2"/>
-            </a:effectRef>
-            <a:fontRef idx="minor">
-              <a:schemeClr val="dk1"/>
-            </a:fontRef>
-          </p:style>
-          <p:txBody>
-            <a:bodyPr lIns="0" tIns="0" rIns="0" bIns="0" rtlCol="0" anchor="t"/>
-            <a:lstStyle/>
-            <a:p>
-              <a:pPr algn="ctr" defTabSz="914400">
-                <a:defRPr/>
-              </a:pPr>
-              <a:r>
-                <a:rPr lang="en-US" sz="1200" kern="0" dirty="0">
-                  <a:solidFill>
-                    <a:prstClr val="black"/>
-                  </a:solidFill>
-                  <a:latin typeface="Arial" panose="020B0604020202020204" pitchFamily="34" charset="0"/>
-                  <a:cs typeface="Arial" panose="020B0604020202020204" pitchFamily="34" charset="0"/>
-                </a:rPr>
-                <a:t>MCP </a:t>
-              </a:r>
-            </a:p>
-          </p:txBody>
-        </p:sp>
-      </p:grpSp>
-      <p:sp>
-        <p:nvSpPr>
-          <p:cNvPr id="1145" name="Rounded Rectangle 1144">
-            <a:extLst>
-              <a:ext uri="{FF2B5EF4-FFF2-40B4-BE49-F238E27FC236}">
-                <a16:creationId xmlns:a16="http://schemas.microsoft.com/office/drawing/2014/main" id="{0D8A50A8-5C41-8441-86A2-1501BE877378}"/>
-              </a:ext>
-            </a:extLst>
-          </p:cNvPr>
-          <p:cNvSpPr/>
-          <p:nvPr/>
-        </p:nvSpPr>
-        <p:spPr>
-          <a:xfrm>
-            <a:off x="3355605" y="9224877"/>
-            <a:ext cx="1203609" cy="406469"/>
-          </a:xfrm>
-          <a:prstGeom prst="roundRect">
-            <a:avLst/>
-          </a:prstGeom>
-          <a:gradFill rotWithShape="1">
-            <a:gsLst>
-              <a:gs pos="0">
-                <a:srgbClr val="FFC000">
-                  <a:lumMod val="110000"/>
-                  <a:satMod val="105000"/>
-                  <a:tint val="67000"/>
-                </a:srgbClr>
-              </a:gs>
-              <a:gs pos="50000">
-                <a:srgbClr val="FFC000">
-                  <a:lumMod val="105000"/>
-                  <a:satMod val="103000"/>
-                  <a:tint val="73000"/>
-                </a:srgbClr>
-              </a:gs>
-              <a:gs pos="100000">
-                <a:srgbClr val="FFC000">
-                  <a:lumMod val="105000"/>
-                  <a:satMod val="109000"/>
-                  <a:tint val="81000"/>
-                </a:srgbClr>
-              </a:gs>
-            </a:gsLst>
-            <a:lin ang="5400000" scaled="0"/>
-          </a:gradFill>
-          <a:ln w="6350" cap="flat" cmpd="sng" algn="ctr">
-            <a:solidFill>
-              <a:srgbClr val="FFC000"/>
-            </a:solidFill>
-            <a:prstDash val="solid"/>
-            <a:miter lim="800000"/>
-          </a:ln>
-          <a:effectLst/>
-        </p:spPr>
-        <p:txBody>
-          <a:bodyPr lIns="0" tIns="0" rIns="0" bIns="0" rtlCol="0" anchor="ctr"/>
-          <a:lstStyle/>
-          <a:p>
-            <a:pPr algn="ctr" defTabSz="914400">
-              <a:defRPr/>
-            </a:pPr>
-            <a:r>
-              <a:rPr lang="en-US" sz="1200" dirty="0">
-                <a:solidFill>
-                  <a:srgbClr val="000000"/>
-                </a:solidFill>
-                <a:latin typeface="Arial" panose="020B0604020202020204" pitchFamily="34" charset="0"/>
-                <a:cs typeface="Arial" panose="020B0604020202020204" pitchFamily="34" charset="0"/>
-              </a:rPr>
-              <a:t>ST-CCI</a:t>
-            </a:r>
-            <a:endParaRPr lang="en-US" sz="1200" kern="0" dirty="0">
-              <a:solidFill>
-                <a:prstClr val="black"/>
-              </a:solidFill>
-              <a:latin typeface="Arial" panose="020B0604020202020204" pitchFamily="34" charset="0"/>
-              <a:cs typeface="Arial" panose="020B0604020202020204" pitchFamily="34" charset="0"/>
-            </a:endParaRPr>
-          </a:p>
-        </p:txBody>
-      </p:sp>
-      <p:sp>
-        <p:nvSpPr>
           <p:cNvPr id="1147" name="TextBox 1146">
             <a:extLst>
               <a:ext uri="{FF2B5EF4-FFF2-40B4-BE49-F238E27FC236}">
@@ -5213,7 +4715,7 @@
         </p:nvSpPr>
         <p:spPr>
           <a:xfrm>
-            <a:off x="1226906" y="5950362"/>
+            <a:off x="2929034" y="499294"/>
             <a:ext cx="327334" cy="369332"/>
           </a:xfrm>
           <a:prstGeom prst="rect">
@@ -7039,780 +6541,126 @@
       </p:sp>
       <p:sp>
         <p:nvSpPr>
-          <p:cNvPr id="41" name="Rounded Rectangle 40">
+          <p:cNvPr id="50" name="TextBox 49">
             <a:extLst>
               <a:ext uri="{FF2B5EF4-FFF2-40B4-BE49-F238E27FC236}">
-                <a16:creationId xmlns:a16="http://schemas.microsoft.com/office/drawing/2014/main" id="{1CE3EE60-B498-2F2B-B684-B4DA9F1E3F0F}"/>
+                <a16:creationId xmlns:a16="http://schemas.microsoft.com/office/drawing/2014/main" id="{65386511-E3C2-A5CF-583D-032ACE0CF517}"/>
               </a:ext>
             </a:extLst>
           </p:cNvPr>
-          <p:cNvSpPr/>
+          <p:cNvSpPr txBox="1"/>
           <p:nvPr/>
         </p:nvSpPr>
         <p:spPr>
           <a:xfrm>
-            <a:off x="5627632" y="5147812"/>
-            <a:ext cx="1258432" cy="4508582"/>
+            <a:off x="9096742" y="5950362"/>
+            <a:ext cx="327334" cy="369332"/>
           </a:xfrm>
-          <a:prstGeom prst="roundRect">
-            <a:avLst>
-              <a:gd name="adj" fmla="val 10314"/>
-            </a:avLst>
+          <a:prstGeom prst="rect">
+            <a:avLst/>
           </a:prstGeom>
-          <a:ln/>
+          <a:noFill/>
         </p:spPr>
-        <p:style>
-          <a:lnRef idx="2">
-            <a:schemeClr val="accent5"/>
-          </a:lnRef>
-          <a:fillRef idx="1">
-            <a:schemeClr val="lt1"/>
-          </a:fillRef>
-          <a:effectRef idx="0">
-            <a:schemeClr val="accent5"/>
-          </a:effectRef>
-          <a:fontRef idx="minor">
-            <a:schemeClr val="dk1"/>
-          </a:fontRef>
-        </p:style>
-        <p:txBody>
-          <a:bodyPr lIns="0" tIns="0" rIns="0" bIns="0" rtlCol="0" anchor="ctr"/>
+        <p:txBody>
+          <a:bodyPr wrap="none" rtlCol="0">
+            <a:spAutoFit/>
+          </a:bodyPr>
           <a:lstStyle/>
           <a:p>
-            <a:pPr algn="ctr" defTabSz="914400">
-              <a:defRPr/>
-            </a:pPr>
-            <a:r>
-              <a:rPr lang="en-US" sz="1400" b="1" kern="0" dirty="0">
-                <a:solidFill>
-                  <a:prstClr val="black"/>
-                </a:solidFill>
-                <a:latin typeface="Arial" panose="020B0604020202020204" pitchFamily="34" charset="0"/>
-                <a:cs typeface="Arial" panose="020B0604020202020204" pitchFamily="34" charset="0"/>
-              </a:rPr>
-              <a:t>Database</a:t>
-            </a:r>
-          </a:p>
-          <a:p>
-            <a:pPr algn="ctr" defTabSz="914400">
-              <a:defRPr/>
-            </a:pPr>
-            <a:endParaRPr lang="en-US" sz="1400" b="1" kern="0" dirty="0">
-              <a:solidFill>
-                <a:prstClr val="black"/>
-              </a:solidFill>
-              <a:latin typeface="Arial" panose="020B0604020202020204" pitchFamily="34" charset="0"/>
-              <a:cs typeface="Arial" panose="020B0604020202020204" pitchFamily="34" charset="0"/>
-            </a:endParaRPr>
-          </a:p>
-          <a:p>
-            <a:pPr algn="ctr" defTabSz="914400">
-              <a:defRPr/>
-            </a:pPr>
-            <a:endParaRPr lang="en-US" sz="1400" b="1" kern="0" dirty="0">
-              <a:solidFill>
-                <a:prstClr val="black"/>
-              </a:solidFill>
-              <a:latin typeface="Arial" panose="020B0604020202020204" pitchFamily="34" charset="0"/>
-              <a:cs typeface="Arial" panose="020B0604020202020204" pitchFamily="34" charset="0"/>
-            </a:endParaRPr>
-          </a:p>
-          <a:p>
-            <a:pPr algn="ctr" defTabSz="914400">
-              <a:defRPr/>
-            </a:pPr>
-            <a:endParaRPr lang="en-US" sz="1400" b="1" kern="0" dirty="0">
-              <a:solidFill>
-                <a:prstClr val="black"/>
-              </a:solidFill>
-              <a:latin typeface="Arial" panose="020B0604020202020204" pitchFamily="34" charset="0"/>
-              <a:cs typeface="Arial" panose="020B0604020202020204" pitchFamily="34" charset="0"/>
-            </a:endParaRPr>
-          </a:p>
-          <a:p>
-            <a:pPr algn="ctr" defTabSz="914400">
-              <a:defRPr/>
-            </a:pPr>
-            <a:endParaRPr lang="en-US" sz="1400" b="1" kern="0" dirty="0">
-              <a:solidFill>
-                <a:prstClr val="black"/>
-              </a:solidFill>
-              <a:latin typeface="Arial" panose="020B0604020202020204" pitchFamily="34" charset="0"/>
-              <a:cs typeface="Arial" panose="020B0604020202020204" pitchFamily="34" charset="0"/>
-            </a:endParaRPr>
-          </a:p>
-          <a:p>
-            <a:pPr algn="ctr" defTabSz="914400">
-              <a:defRPr/>
-            </a:pPr>
-            <a:endParaRPr lang="en-US" sz="1400" b="1" kern="0" dirty="0">
-              <a:solidFill>
-                <a:prstClr val="black"/>
-              </a:solidFill>
-              <a:latin typeface="Arial" panose="020B0604020202020204" pitchFamily="34" charset="0"/>
-              <a:cs typeface="Arial" panose="020B0604020202020204" pitchFamily="34" charset="0"/>
-            </a:endParaRPr>
-          </a:p>
-          <a:p>
-            <a:pPr algn="ctr" defTabSz="914400">
-              <a:defRPr/>
-            </a:pPr>
-            <a:endParaRPr lang="en-US" sz="1400" b="1" kern="0" dirty="0">
-              <a:solidFill>
-                <a:prstClr val="black"/>
-              </a:solidFill>
-              <a:latin typeface="Arial" panose="020B0604020202020204" pitchFamily="34" charset="0"/>
-              <a:cs typeface="Arial" panose="020B0604020202020204" pitchFamily="34" charset="0"/>
-            </a:endParaRPr>
-          </a:p>
-          <a:p>
-            <a:pPr algn="ctr" defTabSz="914400">
-              <a:defRPr/>
-            </a:pPr>
-            <a:endParaRPr lang="en-US" sz="1400" b="1" kern="0" dirty="0">
-              <a:solidFill>
-                <a:prstClr val="black"/>
-              </a:solidFill>
-              <a:latin typeface="Arial" panose="020B0604020202020204" pitchFamily="34" charset="0"/>
-              <a:cs typeface="Arial" panose="020B0604020202020204" pitchFamily="34" charset="0"/>
-            </a:endParaRPr>
-          </a:p>
-          <a:p>
-            <a:pPr algn="ctr" defTabSz="914400">
-              <a:defRPr/>
-            </a:pPr>
-            <a:endParaRPr lang="en-US" sz="1400" b="1" kern="0" dirty="0">
-              <a:solidFill>
-                <a:prstClr val="black"/>
-              </a:solidFill>
-              <a:latin typeface="Arial" panose="020B0604020202020204" pitchFamily="34" charset="0"/>
-              <a:cs typeface="Arial" panose="020B0604020202020204" pitchFamily="34" charset="0"/>
-            </a:endParaRPr>
-          </a:p>
-          <a:p>
-            <a:pPr algn="ctr" defTabSz="914400">
-              <a:defRPr/>
-            </a:pPr>
-            <a:endParaRPr lang="en-US" sz="1400" b="1" kern="0" dirty="0">
-              <a:solidFill>
-                <a:prstClr val="black"/>
-              </a:solidFill>
-              <a:latin typeface="Arial" panose="020B0604020202020204" pitchFamily="34" charset="0"/>
-              <a:cs typeface="Arial" panose="020B0604020202020204" pitchFamily="34" charset="0"/>
-            </a:endParaRPr>
-          </a:p>
-          <a:p>
-            <a:pPr algn="ctr" defTabSz="914400">
-              <a:defRPr/>
-            </a:pPr>
-            <a:endParaRPr lang="en-US" sz="1400" b="1" kern="0" dirty="0">
-              <a:solidFill>
-                <a:prstClr val="black"/>
-              </a:solidFill>
-              <a:latin typeface="Arial" panose="020B0604020202020204" pitchFamily="34" charset="0"/>
-              <a:cs typeface="Arial" panose="020B0604020202020204" pitchFamily="34" charset="0"/>
-            </a:endParaRPr>
-          </a:p>
-          <a:p>
-            <a:pPr algn="ctr" defTabSz="914400">
-              <a:defRPr/>
-            </a:pPr>
-            <a:endParaRPr lang="en-US" sz="1400" b="1" kern="0" dirty="0">
-              <a:solidFill>
-                <a:prstClr val="black"/>
-              </a:solidFill>
-              <a:latin typeface="Arial" panose="020B0604020202020204" pitchFamily="34" charset="0"/>
-              <a:cs typeface="Arial" panose="020B0604020202020204" pitchFamily="34" charset="0"/>
-            </a:endParaRPr>
-          </a:p>
-          <a:p>
-            <a:pPr algn="ctr" defTabSz="914400">
-              <a:defRPr/>
-            </a:pPr>
-            <a:endParaRPr lang="en-US" sz="1400" b="1" kern="0" dirty="0">
-              <a:solidFill>
-                <a:prstClr val="black"/>
-              </a:solidFill>
-              <a:latin typeface="Arial" panose="020B0604020202020204" pitchFamily="34" charset="0"/>
-              <a:cs typeface="Arial" panose="020B0604020202020204" pitchFamily="34" charset="0"/>
-            </a:endParaRPr>
-          </a:p>
-          <a:p>
-            <a:pPr algn="ctr" defTabSz="914400">
-              <a:defRPr/>
-            </a:pPr>
-            <a:endParaRPr lang="en-US" sz="1400" b="1" kern="0" dirty="0">
-              <a:solidFill>
-                <a:prstClr val="black"/>
-              </a:solidFill>
-              <a:latin typeface="Arial" panose="020B0604020202020204" pitchFamily="34" charset="0"/>
-              <a:cs typeface="Arial" panose="020B0604020202020204" pitchFamily="34" charset="0"/>
-            </a:endParaRPr>
-          </a:p>
-          <a:p>
-            <a:pPr algn="ctr" defTabSz="914400">
-              <a:defRPr/>
-            </a:pPr>
-            <a:endParaRPr lang="en-US" sz="1400" b="1" kern="0" dirty="0">
-              <a:solidFill>
-                <a:prstClr val="black"/>
-              </a:solidFill>
-              <a:latin typeface="Arial" panose="020B0604020202020204" pitchFamily="34" charset="0"/>
-              <a:cs typeface="Arial" panose="020B0604020202020204" pitchFamily="34" charset="0"/>
-            </a:endParaRPr>
-          </a:p>
-          <a:p>
-            <a:pPr algn="ctr" defTabSz="914400">
-              <a:defRPr/>
-            </a:pPr>
-            <a:endParaRPr lang="en-US" sz="1400" b="1" kern="0" dirty="0">
-              <a:solidFill>
-                <a:prstClr val="black"/>
-              </a:solidFill>
-              <a:latin typeface="Arial" panose="020B0604020202020204" pitchFamily="34" charset="0"/>
-              <a:cs typeface="Arial" panose="020B0604020202020204" pitchFamily="34" charset="0"/>
-            </a:endParaRPr>
-          </a:p>
-          <a:p>
-            <a:pPr algn="ctr" defTabSz="914400">
-              <a:defRPr/>
-            </a:pPr>
-            <a:endParaRPr lang="en-US" sz="1400" b="1" kern="0" dirty="0">
-              <a:solidFill>
-                <a:prstClr val="black"/>
-              </a:solidFill>
-              <a:latin typeface="Arial" panose="020B0604020202020204" pitchFamily="34" charset="0"/>
-              <a:cs typeface="Arial" panose="020B0604020202020204" pitchFamily="34" charset="0"/>
-            </a:endParaRPr>
-          </a:p>
-          <a:p>
-            <a:pPr algn="ctr" defTabSz="914400">
-              <a:defRPr/>
-            </a:pPr>
-            <a:endParaRPr lang="en-US" sz="1400" b="1" kern="0" dirty="0">
-              <a:solidFill>
-                <a:prstClr val="black"/>
-              </a:solidFill>
-              <a:latin typeface="Arial" panose="020B0604020202020204" pitchFamily="34" charset="0"/>
-              <a:cs typeface="Arial" panose="020B0604020202020204" pitchFamily="34" charset="0"/>
-            </a:endParaRPr>
-          </a:p>
-          <a:p>
-            <a:pPr algn="ctr" defTabSz="914400">
-              <a:defRPr/>
-            </a:pPr>
-            <a:endParaRPr lang="en-US" sz="1400" b="1" kern="0" dirty="0">
-              <a:solidFill>
-                <a:prstClr val="black"/>
-              </a:solidFill>
-              <a:latin typeface="Arial" panose="020B0604020202020204" pitchFamily="34" charset="0"/>
-              <a:cs typeface="Arial" panose="020B0604020202020204" pitchFamily="34" charset="0"/>
-            </a:endParaRPr>
-          </a:p>
-          <a:p>
-            <a:pPr algn="ctr" defTabSz="914400">
-              <a:defRPr/>
-            </a:pPr>
-            <a:endParaRPr lang="en-US" sz="1400" b="1" kern="0" dirty="0">
-              <a:solidFill>
-                <a:prstClr val="black"/>
-              </a:solidFill>
-              <a:latin typeface="Arial" panose="020B0604020202020204" pitchFamily="34" charset="0"/>
-              <a:cs typeface="Arial" panose="020B0604020202020204" pitchFamily="34" charset="0"/>
-            </a:endParaRPr>
-          </a:p>
-        </p:txBody>
-      </p:sp>
-      <p:sp>
-        <p:nvSpPr>
-          <p:cNvPr id="42" name="Rounded Rectangle 41">
+            <a:r>
+              <a:rPr lang="en-US" b="1" dirty="0"/>
+              <a:t>B</a:t>
+            </a:r>
+          </a:p>
+        </p:txBody>
+      </p:sp>
+      <p:sp>
+        <p:nvSpPr>
+          <p:cNvPr id="51" name="TextBox 50">
             <a:extLst>
               <a:ext uri="{FF2B5EF4-FFF2-40B4-BE49-F238E27FC236}">
-                <a16:creationId xmlns:a16="http://schemas.microsoft.com/office/drawing/2014/main" id="{1ABCFB46-A806-EC5C-2993-2E985D93A971}"/>
+                <a16:creationId xmlns:a16="http://schemas.microsoft.com/office/drawing/2014/main" id="{B8849897-E7EC-7B11-9910-EA2305B52EBA}"/>
               </a:ext>
             </a:extLst>
           </p:cNvPr>
-          <p:cNvSpPr/>
+          <p:cNvSpPr txBox="1"/>
           <p:nvPr/>
         </p:nvSpPr>
         <p:spPr>
           <a:xfrm>
-            <a:off x="5655044" y="5548841"/>
-            <a:ext cx="1203609" cy="406469"/>
+            <a:off x="12857227" y="10373028"/>
+            <a:ext cx="694421" cy="369332"/>
           </a:xfrm>
-          <a:prstGeom prst="roundRect">
+          <a:prstGeom prst="rect">
             <a:avLst/>
           </a:prstGeom>
-          <a:ln/>
+          <a:noFill/>
         </p:spPr>
-        <p:style>
-          <a:lnRef idx="1">
-            <a:schemeClr val="accent5"/>
-          </a:lnRef>
-          <a:fillRef idx="2">
-            <a:schemeClr val="accent5"/>
-          </a:fillRef>
-          <a:effectRef idx="1">
-            <a:schemeClr val="accent5"/>
-          </a:effectRef>
-          <a:fontRef idx="minor">
-            <a:schemeClr val="dk1"/>
-          </a:fontRef>
-        </p:style>
-        <p:txBody>
-          <a:bodyPr lIns="0" tIns="0" rIns="0" bIns="0" rtlCol="0" anchor="ctr"/>
+        <p:txBody>
+          <a:bodyPr wrap="none" rtlCol="0">
+            <a:spAutoFit/>
+          </a:bodyPr>
           <a:lstStyle/>
           <a:p>
-            <a:pPr algn="ctr" defTabSz="914400">
-              <a:defRPr/>
-            </a:pPr>
-            <a:r>
-              <a:rPr lang="en-US" sz="1200" dirty="0" err="1">
-                <a:solidFill>
-                  <a:srgbClr val="000000"/>
-                </a:solidFill>
-                <a:latin typeface="Arial" panose="020B0604020202020204" pitchFamily="34" charset="0"/>
-                <a:cs typeface="Arial" panose="020B0604020202020204" pitchFamily="34" charset="0"/>
-              </a:rPr>
-              <a:t>CellxGene</a:t>
-            </a:r>
-            <a:r>
-              <a:rPr lang="en-US" sz="1200" dirty="0">
-                <a:solidFill>
-                  <a:srgbClr val="000000"/>
-                </a:solidFill>
-                <a:latin typeface="Arial" panose="020B0604020202020204" pitchFamily="34" charset="0"/>
-                <a:cs typeface="Arial" panose="020B0604020202020204" pitchFamily="34" charset="0"/>
-              </a:rPr>
-              <a:t> Census </a:t>
-            </a:r>
-            <a:endParaRPr lang="en-US" sz="1200" kern="0" dirty="0">
-              <a:solidFill>
-                <a:prstClr val="black"/>
-              </a:solidFill>
-              <a:latin typeface="Arial" panose="020B0604020202020204" pitchFamily="34" charset="0"/>
-              <a:cs typeface="Arial" panose="020B0604020202020204" pitchFamily="34" charset="0"/>
-            </a:endParaRPr>
-          </a:p>
-        </p:txBody>
-      </p:sp>
-      <p:sp>
-        <p:nvSpPr>
-          <p:cNvPr id="43" name="Rounded Rectangle 42">
+            <a:r>
+              <a:rPr lang="en-US" dirty="0"/>
+              <a:t>skills</a:t>
+            </a:r>
+          </a:p>
+        </p:txBody>
+      </p:sp>
+      <p:sp>
+        <p:nvSpPr>
+          <p:cNvPr id="52" name="TextBox 51">
             <a:extLst>
               <a:ext uri="{FF2B5EF4-FFF2-40B4-BE49-F238E27FC236}">
-                <a16:creationId xmlns:a16="http://schemas.microsoft.com/office/drawing/2014/main" id="{75CBBC25-E4AC-CB96-6681-25BF0F54D906}"/>
+                <a16:creationId xmlns:a16="http://schemas.microsoft.com/office/drawing/2014/main" id="{67DE89A2-AD66-1A46-0653-6C3FF2F7365F}"/>
               </a:ext>
             </a:extLst>
           </p:cNvPr>
-          <p:cNvSpPr/>
+          <p:cNvSpPr txBox="1"/>
           <p:nvPr/>
         </p:nvSpPr>
         <p:spPr>
           <a:xfrm>
-            <a:off x="5655044" y="6053214"/>
-            <a:ext cx="1203609" cy="406469"/>
+            <a:off x="12857227" y="11047585"/>
+            <a:ext cx="2786340" cy="646331"/>
           </a:xfrm>
-          <a:prstGeom prst="roundRect">
+          <a:prstGeom prst="rect">
             <a:avLst/>
           </a:prstGeom>
-          <a:ln/>
+          <a:noFill/>
         </p:spPr>
-        <p:style>
-          <a:lnRef idx="1">
-            <a:schemeClr val="accent5"/>
-          </a:lnRef>
-          <a:fillRef idx="2">
-            <a:schemeClr val="accent5"/>
-          </a:fillRef>
-          <a:effectRef idx="1">
-            <a:schemeClr val="accent5"/>
-          </a:effectRef>
-          <a:fontRef idx="minor">
-            <a:schemeClr val="dk1"/>
-          </a:fontRef>
-        </p:style>
-        <p:txBody>
-          <a:bodyPr lIns="0" tIns="0" rIns="0" bIns="0" rtlCol="0" anchor="ctr"/>
+        <p:txBody>
+          <a:bodyPr wrap="none" rtlCol="0">
+            <a:spAutoFit/>
+          </a:bodyPr>
           <a:lstStyle/>
           <a:p>
-            <a:pPr algn="ctr" defTabSz="914400">
-              <a:defRPr/>
-            </a:pPr>
-            <a:r>
-              <a:rPr lang="en-US" sz="1200" dirty="0">
-                <a:solidFill>
-                  <a:srgbClr val="000000"/>
-                </a:solidFill>
-                <a:latin typeface="Arial" panose="020B0604020202020204" pitchFamily="34" charset="0"/>
-                <a:cs typeface="Arial" panose="020B0604020202020204" pitchFamily="34" charset="0"/>
-              </a:rPr>
-              <a:t>KEGG</a:t>
-            </a:r>
-            <a:r>
-              <a:rPr lang="en-US" altLang="ko-KR" sz="1200" dirty="0">
-                <a:solidFill>
-                  <a:srgbClr val="000000"/>
-                </a:solidFill>
-                <a:latin typeface="Arial" panose="020B0604020202020204" pitchFamily="34" charset="0"/>
-                <a:cs typeface="Arial" panose="020B0604020202020204" pitchFamily="34" charset="0"/>
-              </a:rPr>
-              <a:t>/</a:t>
-            </a:r>
-          </a:p>
-          <a:p>
-            <a:pPr algn="ctr" defTabSz="914400">
-              <a:defRPr/>
-            </a:pPr>
-            <a:r>
-              <a:rPr lang="en-US" altLang="ko-KR" sz="1200" dirty="0" err="1">
-                <a:solidFill>
-                  <a:srgbClr val="000000"/>
-                </a:solidFill>
-                <a:latin typeface="Arial" panose="020B0604020202020204" pitchFamily="34" charset="0"/>
-                <a:cs typeface="Arial" panose="020B0604020202020204" pitchFamily="34" charset="0"/>
-              </a:rPr>
-              <a:t>Reactome</a:t>
-            </a:r>
-            <a:endParaRPr lang="en-US" sz="1200" kern="0" dirty="0">
-              <a:solidFill>
-                <a:prstClr val="black"/>
-              </a:solidFill>
-              <a:latin typeface="Arial" panose="020B0604020202020204" pitchFamily="34" charset="0"/>
-              <a:cs typeface="Arial" panose="020B0604020202020204" pitchFamily="34" charset="0"/>
-            </a:endParaRPr>
-          </a:p>
-        </p:txBody>
-      </p:sp>
-      <p:sp>
-        <p:nvSpPr>
-          <p:cNvPr id="44" name="Rounded Rectangle 43">
+            <a:r>
+              <a:rPr lang="en-US" dirty="0"/>
+              <a:t>Progressive disclosure</a:t>
+            </a:r>
+          </a:p>
+          <a:p>
+            <a:r>
+              <a:rPr lang="en-US" dirty="0"/>
+              <a:t>Think – search- </a:t>
+            </a:r>
+            <a:r>
+              <a:rPr lang="en-US" dirty="0" err="1"/>
+              <a:t>refelection</a:t>
+            </a:r>
+            <a:endParaRPr lang="en-US" dirty="0"/>
+          </a:p>
+        </p:txBody>
+      </p:sp>
+      <p:pic>
+        <p:nvPicPr>
+          <p:cNvPr id="54" name="Picture 53">
             <a:extLst>
               <a:ext uri="{FF2B5EF4-FFF2-40B4-BE49-F238E27FC236}">
-                <a16:creationId xmlns:a16="http://schemas.microsoft.com/office/drawing/2014/main" id="{FCAA8B4E-2986-B4A4-A2E9-59E8106B2A27}"/>
-              </a:ext>
-            </a:extLst>
-          </p:cNvPr>
-          <p:cNvSpPr/>
-          <p:nvPr/>
-        </p:nvSpPr>
-        <p:spPr>
-          <a:xfrm>
-            <a:off x="5655044" y="6557587"/>
-            <a:ext cx="1203609" cy="406469"/>
-          </a:xfrm>
-          <a:prstGeom prst="roundRect">
-            <a:avLst/>
-          </a:prstGeom>
-          <a:ln/>
-        </p:spPr>
-        <p:style>
-          <a:lnRef idx="1">
-            <a:schemeClr val="accent5"/>
-          </a:lnRef>
-          <a:fillRef idx="2">
-            <a:schemeClr val="accent5"/>
-          </a:fillRef>
-          <a:effectRef idx="1">
-            <a:schemeClr val="accent5"/>
-          </a:effectRef>
-          <a:fontRef idx="minor">
-            <a:schemeClr val="dk1"/>
-          </a:fontRef>
-        </p:style>
-        <p:txBody>
-          <a:bodyPr lIns="0" tIns="0" rIns="0" bIns="0" rtlCol="0" anchor="ctr"/>
-          <a:lstStyle/>
-          <a:p>
-            <a:pPr algn="ctr" defTabSz="914400">
-              <a:defRPr/>
-            </a:pPr>
-            <a:r>
-              <a:rPr lang="en-US" sz="1200" dirty="0">
-                <a:solidFill>
-                  <a:srgbClr val="000000"/>
-                </a:solidFill>
-                <a:latin typeface="Arial" panose="020B0604020202020204" pitchFamily="34" charset="0"/>
-                <a:cs typeface="Arial" panose="020B0604020202020204" pitchFamily="34" charset="0"/>
-              </a:rPr>
-              <a:t>STRING</a:t>
-            </a:r>
-            <a:endParaRPr lang="en-US" sz="1200" kern="0" dirty="0">
-              <a:solidFill>
-                <a:prstClr val="black"/>
-              </a:solidFill>
-              <a:latin typeface="Arial" panose="020B0604020202020204" pitchFamily="34" charset="0"/>
-              <a:cs typeface="Arial" panose="020B0604020202020204" pitchFamily="34" charset="0"/>
-            </a:endParaRPr>
-          </a:p>
-        </p:txBody>
-      </p:sp>
-      <p:sp>
-        <p:nvSpPr>
-          <p:cNvPr id="45" name="Rounded Rectangle 44">
-            <a:extLst>
-              <a:ext uri="{FF2B5EF4-FFF2-40B4-BE49-F238E27FC236}">
-                <a16:creationId xmlns:a16="http://schemas.microsoft.com/office/drawing/2014/main" id="{8DA6AA46-4788-072C-F7E9-0578295C45BC}"/>
-              </a:ext>
-            </a:extLst>
-          </p:cNvPr>
-          <p:cNvSpPr/>
-          <p:nvPr/>
-        </p:nvSpPr>
-        <p:spPr>
-          <a:xfrm>
-            <a:off x="5655044" y="7061960"/>
-            <a:ext cx="1203609" cy="406469"/>
-          </a:xfrm>
-          <a:prstGeom prst="roundRect">
-            <a:avLst/>
-          </a:prstGeom>
-          <a:ln/>
-        </p:spPr>
-        <p:style>
-          <a:lnRef idx="1">
-            <a:schemeClr val="accent5"/>
-          </a:lnRef>
-          <a:fillRef idx="2">
-            <a:schemeClr val="accent5"/>
-          </a:fillRef>
-          <a:effectRef idx="1">
-            <a:schemeClr val="accent5"/>
-          </a:effectRef>
-          <a:fontRef idx="minor">
-            <a:schemeClr val="dk1"/>
-          </a:fontRef>
-        </p:style>
-        <p:txBody>
-          <a:bodyPr lIns="0" tIns="0" rIns="0" bIns="0" rtlCol="0" anchor="ctr"/>
-          <a:lstStyle/>
-          <a:p>
-            <a:pPr algn="ctr" defTabSz="615940" fontAlgn="t"/>
-            <a:r>
-              <a:rPr lang="en-US" sz="1200" dirty="0" err="1">
-                <a:solidFill>
-                  <a:srgbClr val="000000"/>
-                </a:solidFill>
-                <a:latin typeface="Arial" panose="020B0604020202020204" pitchFamily="34" charset="0"/>
-                <a:cs typeface="Arial" panose="020B0604020202020204" pitchFamily="34" charset="0"/>
-              </a:rPr>
-              <a:t>OpenTargets</a:t>
-            </a:r>
-            <a:endParaRPr lang="en-US" sz="1200" dirty="0">
-              <a:solidFill>
-                <a:srgbClr val="000000"/>
-              </a:solidFill>
-              <a:latin typeface="Arial" panose="020B0604020202020204" pitchFamily="34" charset="0"/>
-              <a:cs typeface="Arial" panose="020B0604020202020204" pitchFamily="34" charset="0"/>
-            </a:endParaRPr>
-          </a:p>
-        </p:txBody>
-      </p:sp>
-      <p:sp>
-        <p:nvSpPr>
-          <p:cNvPr id="46" name="Rounded Rectangle 45">
-            <a:extLst>
-              <a:ext uri="{FF2B5EF4-FFF2-40B4-BE49-F238E27FC236}">
-                <a16:creationId xmlns:a16="http://schemas.microsoft.com/office/drawing/2014/main" id="{B62A3AD4-36D1-D949-0450-E17976FB45E5}"/>
-              </a:ext>
-            </a:extLst>
-          </p:cNvPr>
-          <p:cNvSpPr/>
-          <p:nvPr/>
-        </p:nvSpPr>
-        <p:spPr>
-          <a:xfrm>
-            <a:off x="5655044" y="7566333"/>
-            <a:ext cx="1203609" cy="406469"/>
-          </a:xfrm>
-          <a:prstGeom prst="roundRect">
-            <a:avLst/>
-          </a:prstGeom>
-          <a:ln/>
-        </p:spPr>
-        <p:style>
-          <a:lnRef idx="1">
-            <a:schemeClr val="accent5"/>
-          </a:lnRef>
-          <a:fillRef idx="2">
-            <a:schemeClr val="accent5"/>
-          </a:fillRef>
-          <a:effectRef idx="1">
-            <a:schemeClr val="accent5"/>
-          </a:effectRef>
-          <a:fontRef idx="minor">
-            <a:schemeClr val="dk1"/>
-          </a:fontRef>
-        </p:style>
-        <p:txBody>
-          <a:bodyPr lIns="0" tIns="0" rIns="0" bIns="0" rtlCol="0" anchor="ctr"/>
-          <a:lstStyle/>
-          <a:p>
-            <a:pPr algn="ctr" defTabSz="914400">
-              <a:defRPr/>
-            </a:pPr>
-            <a:r>
-              <a:rPr lang="en-US" sz="1200" dirty="0">
-                <a:solidFill>
-                  <a:srgbClr val="000000"/>
-                </a:solidFill>
-                <a:latin typeface="Arial" panose="020B0604020202020204" pitchFamily="34" charset="0"/>
-                <a:cs typeface="Arial" panose="020B0604020202020204" pitchFamily="34" charset="0"/>
-              </a:rPr>
-              <a:t>GWAS Catalog</a:t>
-            </a:r>
-            <a:endParaRPr lang="en-US" sz="1200" kern="0" dirty="0">
-              <a:solidFill>
-                <a:prstClr val="black"/>
-              </a:solidFill>
-              <a:latin typeface="Arial" panose="020B0604020202020204" pitchFamily="34" charset="0"/>
-              <a:cs typeface="Arial" panose="020B0604020202020204" pitchFamily="34" charset="0"/>
-            </a:endParaRPr>
-          </a:p>
-        </p:txBody>
-      </p:sp>
-      <p:sp>
-        <p:nvSpPr>
-          <p:cNvPr id="47" name="Rounded Rectangle 46">
-            <a:extLst>
-              <a:ext uri="{FF2B5EF4-FFF2-40B4-BE49-F238E27FC236}">
-                <a16:creationId xmlns:a16="http://schemas.microsoft.com/office/drawing/2014/main" id="{3F3CF728-F9DC-48CC-E70B-7D67703D688A}"/>
-              </a:ext>
-            </a:extLst>
-          </p:cNvPr>
-          <p:cNvSpPr/>
-          <p:nvPr/>
-        </p:nvSpPr>
-        <p:spPr>
-          <a:xfrm>
-            <a:off x="5655044" y="8070706"/>
-            <a:ext cx="1203609" cy="406469"/>
-          </a:xfrm>
-          <a:prstGeom prst="roundRect">
-            <a:avLst/>
-          </a:prstGeom>
-          <a:ln/>
-        </p:spPr>
-        <p:style>
-          <a:lnRef idx="1">
-            <a:schemeClr val="accent5"/>
-          </a:lnRef>
-          <a:fillRef idx="2">
-            <a:schemeClr val="accent5"/>
-          </a:fillRef>
-          <a:effectRef idx="1">
-            <a:schemeClr val="accent5"/>
-          </a:effectRef>
-          <a:fontRef idx="minor">
-            <a:schemeClr val="dk1"/>
-          </a:fontRef>
-        </p:style>
-        <p:txBody>
-          <a:bodyPr lIns="0" tIns="0" rIns="0" bIns="0" rtlCol="0" anchor="ctr"/>
-          <a:lstStyle/>
-          <a:p>
-            <a:pPr algn="ctr" defTabSz="914400">
-              <a:defRPr/>
-            </a:pPr>
-            <a:r>
-              <a:rPr lang="en-US" sz="1200" dirty="0" err="1">
-                <a:solidFill>
-                  <a:srgbClr val="000000"/>
-                </a:solidFill>
-                <a:latin typeface="Arial" panose="020B0604020202020204" pitchFamily="34" charset="0"/>
-                <a:cs typeface="Arial" panose="020B0604020202020204" pitchFamily="34" charset="0"/>
-              </a:rPr>
-              <a:t>ChEMBL</a:t>
-            </a:r>
-            <a:endParaRPr lang="en-US" sz="1200" kern="0" dirty="0">
-              <a:solidFill>
-                <a:prstClr val="black"/>
-              </a:solidFill>
-              <a:latin typeface="Arial" panose="020B0604020202020204" pitchFamily="34" charset="0"/>
-              <a:cs typeface="Arial" panose="020B0604020202020204" pitchFamily="34" charset="0"/>
-            </a:endParaRPr>
-          </a:p>
-        </p:txBody>
-      </p:sp>
-      <p:sp>
-        <p:nvSpPr>
-          <p:cNvPr id="48" name="Rounded Rectangle 47">
-            <a:extLst>
-              <a:ext uri="{FF2B5EF4-FFF2-40B4-BE49-F238E27FC236}">
-                <a16:creationId xmlns:a16="http://schemas.microsoft.com/office/drawing/2014/main" id="{981A92C7-F36C-562A-3581-BC00125EF2AB}"/>
-              </a:ext>
-            </a:extLst>
-          </p:cNvPr>
-          <p:cNvSpPr/>
-          <p:nvPr/>
-        </p:nvSpPr>
-        <p:spPr>
-          <a:xfrm>
-            <a:off x="5655044" y="8575080"/>
-            <a:ext cx="1203609" cy="406469"/>
-          </a:xfrm>
-          <a:prstGeom prst="roundRect">
-            <a:avLst/>
-          </a:prstGeom>
-          <a:ln/>
-        </p:spPr>
-        <p:style>
-          <a:lnRef idx="1">
-            <a:schemeClr val="accent5"/>
-          </a:lnRef>
-          <a:fillRef idx="2">
-            <a:schemeClr val="accent5"/>
-          </a:fillRef>
-          <a:effectRef idx="1">
-            <a:schemeClr val="accent5"/>
-          </a:effectRef>
-          <a:fontRef idx="minor">
-            <a:schemeClr val="dk1"/>
-          </a:fontRef>
-        </p:style>
-        <p:txBody>
-          <a:bodyPr lIns="0" tIns="0" rIns="0" bIns="0" rtlCol="0" anchor="ctr"/>
-          <a:lstStyle/>
-          <a:p>
-            <a:pPr algn="ctr" defTabSz="914400">
-              <a:defRPr/>
-            </a:pPr>
-            <a:r>
-              <a:rPr lang="en-US" sz="1200" dirty="0" err="1">
-                <a:solidFill>
-                  <a:srgbClr val="000000"/>
-                </a:solidFill>
-                <a:latin typeface="Arial" panose="020B0604020202020204" pitchFamily="34" charset="0"/>
-                <a:cs typeface="Arial" panose="020B0604020202020204" pitchFamily="34" charset="0"/>
-              </a:rPr>
-              <a:t>Ensembl</a:t>
-            </a:r>
-            <a:r>
-              <a:rPr lang="en-US" sz="1200" dirty="0">
-                <a:solidFill>
-                  <a:srgbClr val="000000"/>
-                </a:solidFill>
-                <a:latin typeface="Arial" panose="020B0604020202020204" pitchFamily="34" charset="0"/>
-                <a:cs typeface="Arial" panose="020B0604020202020204" pitchFamily="34" charset="0"/>
-              </a:rPr>
-              <a:t> VEP </a:t>
-            </a:r>
-            <a:endParaRPr lang="en-US" sz="1200" kern="0" dirty="0">
-              <a:solidFill>
-                <a:prstClr val="black"/>
-              </a:solidFill>
-              <a:latin typeface="Arial" panose="020B0604020202020204" pitchFamily="34" charset="0"/>
-              <a:cs typeface="Arial" panose="020B0604020202020204" pitchFamily="34" charset="0"/>
-            </a:endParaRPr>
-          </a:p>
-        </p:txBody>
-      </p:sp>
-      <p:pic>
-        <p:nvPicPr>
-          <p:cNvPr id="49" name="Picture 48">
-            <a:extLst>
-              <a:ext uri="{FF2B5EF4-FFF2-40B4-BE49-F238E27FC236}">
-                <a16:creationId xmlns:a16="http://schemas.microsoft.com/office/drawing/2014/main" id="{0F1F19DB-9407-B166-7007-397189CBF274}"/>
+                <a16:creationId xmlns:a16="http://schemas.microsoft.com/office/drawing/2014/main" id="{4BFF205E-B417-C60E-B61E-AE55FA2A689E}"/>
               </a:ext>
             </a:extLst>
           </p:cNvPr>
@@ -7829,136 +6677,20 @@
         </p:blipFill>
         <p:spPr>
           <a:xfrm>
-            <a:off x="15835348" y="6007592"/>
-            <a:ext cx="1371090" cy="2906711"/>
+            <a:off x="9038173" y="757124"/>
+            <a:ext cx="8821130" cy="7478179"/>
           </a:xfrm>
           <a:prstGeom prst="rect">
             <a:avLst/>
           </a:prstGeom>
         </p:spPr>
       </p:pic>
-      <p:sp>
-        <p:nvSpPr>
-          <p:cNvPr id="50" name="TextBox 49">
+      <p:pic>
+        <p:nvPicPr>
+          <p:cNvPr id="1106" name="Picture 1105">
             <a:extLst>
               <a:ext uri="{FF2B5EF4-FFF2-40B4-BE49-F238E27FC236}">
-                <a16:creationId xmlns:a16="http://schemas.microsoft.com/office/drawing/2014/main" id="{65386511-E3C2-A5CF-583D-032ACE0CF517}"/>
-              </a:ext>
-            </a:extLst>
-          </p:cNvPr>
-          <p:cNvSpPr txBox="1"/>
-          <p:nvPr/>
-        </p:nvSpPr>
-        <p:spPr>
-          <a:xfrm>
-            <a:off x="9096742" y="5950362"/>
-            <a:ext cx="327334" cy="369332"/>
-          </a:xfrm>
-          <a:prstGeom prst="rect">
-            <a:avLst/>
-          </a:prstGeom>
-          <a:noFill/>
-        </p:spPr>
-        <p:txBody>
-          <a:bodyPr wrap="none" rtlCol="0">
-            <a:spAutoFit/>
-          </a:bodyPr>
-          <a:lstStyle/>
-          <a:p>
-            <a:r>
-              <a:rPr lang="en-US" b="1" dirty="0"/>
-              <a:t>B</a:t>
-            </a:r>
-          </a:p>
-        </p:txBody>
-      </p:sp>
-      <p:sp>
-        <p:nvSpPr>
-          <p:cNvPr id="51" name="TextBox 50">
-            <a:extLst>
-              <a:ext uri="{FF2B5EF4-FFF2-40B4-BE49-F238E27FC236}">
-                <a16:creationId xmlns:a16="http://schemas.microsoft.com/office/drawing/2014/main" id="{B8849897-E7EC-7B11-9910-EA2305B52EBA}"/>
-              </a:ext>
-            </a:extLst>
-          </p:cNvPr>
-          <p:cNvSpPr txBox="1"/>
-          <p:nvPr/>
-        </p:nvSpPr>
-        <p:spPr>
-          <a:xfrm>
-            <a:off x="12857227" y="10373028"/>
-            <a:ext cx="694421" cy="369332"/>
-          </a:xfrm>
-          <a:prstGeom prst="rect">
-            <a:avLst/>
-          </a:prstGeom>
-          <a:noFill/>
-        </p:spPr>
-        <p:txBody>
-          <a:bodyPr wrap="none" rtlCol="0">
-            <a:spAutoFit/>
-          </a:bodyPr>
-          <a:lstStyle/>
-          <a:p>
-            <a:r>
-              <a:rPr lang="en-US" dirty="0"/>
-              <a:t>skills</a:t>
-            </a:r>
-          </a:p>
-        </p:txBody>
-      </p:sp>
-      <p:sp>
-        <p:nvSpPr>
-          <p:cNvPr id="52" name="TextBox 51">
-            <a:extLst>
-              <a:ext uri="{FF2B5EF4-FFF2-40B4-BE49-F238E27FC236}">
-                <a16:creationId xmlns:a16="http://schemas.microsoft.com/office/drawing/2014/main" id="{67DE89A2-AD66-1A46-0653-6C3FF2F7365F}"/>
-              </a:ext>
-            </a:extLst>
-          </p:cNvPr>
-          <p:cNvSpPr txBox="1"/>
-          <p:nvPr/>
-        </p:nvSpPr>
-        <p:spPr>
-          <a:xfrm>
-            <a:off x="12857227" y="11047585"/>
-            <a:ext cx="2786340" cy="646331"/>
-          </a:xfrm>
-          <a:prstGeom prst="rect">
-            <a:avLst/>
-          </a:prstGeom>
-          <a:noFill/>
-        </p:spPr>
-        <p:txBody>
-          <a:bodyPr wrap="none" rtlCol="0">
-            <a:spAutoFit/>
-          </a:bodyPr>
-          <a:lstStyle/>
-          <a:p>
-            <a:r>
-              <a:rPr lang="en-US" dirty="0"/>
-              <a:t>Progressive disclosure</a:t>
-            </a:r>
-          </a:p>
-          <a:p>
-            <a:r>
-              <a:rPr lang="en-US" dirty="0"/>
-              <a:t>Think – search- </a:t>
-            </a:r>
-            <a:r>
-              <a:rPr lang="en-US" dirty="0" err="1"/>
-              <a:t>refelection</a:t>
-            </a:r>
-            <a:endParaRPr lang="en-US" dirty="0"/>
-          </a:p>
-        </p:txBody>
-      </p:sp>
-      <p:pic>
-        <p:nvPicPr>
-          <p:cNvPr id="54" name="Picture 53">
-            <a:extLst>
-              <a:ext uri="{FF2B5EF4-FFF2-40B4-BE49-F238E27FC236}">
-                <a16:creationId xmlns:a16="http://schemas.microsoft.com/office/drawing/2014/main" id="{4BFF205E-B417-C60E-B61E-AE55FA2A689E}"/>
+                <a16:creationId xmlns:a16="http://schemas.microsoft.com/office/drawing/2014/main" id="{FDD74EC9-A93C-7DEF-6152-CCAD08E50956}"/>
               </a:ext>
             </a:extLst>
           </p:cNvPr>
@@ -7975,633 +6707,14 @@
         </p:blipFill>
         <p:spPr>
           <a:xfrm>
-            <a:off x="7620356" y="2438485"/>
-            <a:ext cx="8325019" cy="7057598"/>
+            <a:off x="4195065" y="623521"/>
+            <a:ext cx="4266561" cy="9259845"/>
           </a:xfrm>
           <a:prstGeom prst="rect">
             <a:avLst/>
           </a:prstGeom>
         </p:spPr>
       </p:pic>
-      <p:sp>
-        <p:nvSpPr>
-          <p:cNvPr id="1088" name="Rounded Rectangle 1087">
-            <a:extLst>
-              <a:ext uri="{FF2B5EF4-FFF2-40B4-BE49-F238E27FC236}">
-                <a16:creationId xmlns:a16="http://schemas.microsoft.com/office/drawing/2014/main" id="{5F7FA6C2-70CE-D869-4718-7EB26C403E67}"/>
-              </a:ext>
-            </a:extLst>
-          </p:cNvPr>
-          <p:cNvSpPr/>
-          <p:nvPr/>
-        </p:nvSpPr>
-        <p:spPr>
-          <a:xfrm>
-            <a:off x="2693302" y="6139497"/>
-            <a:ext cx="1170660" cy="469659"/>
-          </a:xfrm>
-          <a:prstGeom prst="roundRect">
-            <a:avLst/>
-          </a:prstGeom>
-          <a:ln/>
-        </p:spPr>
-        <p:style>
-          <a:lnRef idx="1">
-            <a:schemeClr val="accent6"/>
-          </a:lnRef>
-          <a:fillRef idx="2">
-            <a:schemeClr val="accent6"/>
-          </a:fillRef>
-          <a:effectRef idx="1">
-            <a:schemeClr val="accent6"/>
-          </a:effectRef>
-          <a:fontRef idx="minor">
-            <a:schemeClr val="dk1"/>
-          </a:fontRef>
-        </p:style>
-        <p:txBody>
-          <a:bodyPr lIns="0" tIns="0" rIns="0" bIns="0" rtlCol="0" anchor="ctr"/>
-          <a:lstStyle/>
-          <a:p>
-            <a:pPr algn="ctr" defTabSz="914400">
-              <a:defRPr/>
-            </a:pPr>
-            <a:r>
-              <a:rPr lang="en-US" sz="1200" kern="0" dirty="0">
-                <a:solidFill>
-                  <a:prstClr val="black"/>
-                </a:solidFill>
-                <a:latin typeface="Arial" panose="020B0604020202020204" pitchFamily="34" charset="0"/>
-                <a:cs typeface="Arial" panose="020B0604020202020204" pitchFamily="34" charset="0"/>
-              </a:rPr>
-              <a:t>Supervisor </a:t>
-            </a:r>
-          </a:p>
-          <a:p>
-            <a:pPr algn="ctr" defTabSz="914400">
-              <a:defRPr/>
-            </a:pPr>
-            <a:r>
-              <a:rPr lang="en-US" sz="1200" kern="0" dirty="0">
-                <a:solidFill>
-                  <a:prstClr val="black"/>
-                </a:solidFill>
-                <a:latin typeface="Arial" panose="020B0604020202020204" pitchFamily="34" charset="0"/>
-                <a:cs typeface="Arial" panose="020B0604020202020204" pitchFamily="34" charset="0"/>
-              </a:rPr>
-              <a:t>Agent</a:t>
-            </a:r>
-          </a:p>
-        </p:txBody>
-      </p:sp>
-      <p:cxnSp>
-        <p:nvCxnSpPr>
-          <p:cNvPr id="1089" name="Straight Arrow Connector 1088">
-            <a:extLst>
-              <a:ext uri="{FF2B5EF4-FFF2-40B4-BE49-F238E27FC236}">
-                <a16:creationId xmlns:a16="http://schemas.microsoft.com/office/drawing/2014/main" id="{933B09CA-A3AA-B8E3-0529-8AA41447F620}"/>
-              </a:ext>
-            </a:extLst>
-          </p:cNvPr>
-          <p:cNvCxnSpPr>
-            <a:cxnSpLocks/>
-          </p:cNvCxnSpPr>
-          <p:nvPr/>
-        </p:nvCxnSpPr>
-        <p:spPr>
-          <a:xfrm flipV="1">
-            <a:off x="2230899" y="6684500"/>
-            <a:ext cx="392028" cy="328871"/>
-          </a:xfrm>
-          <a:prstGeom prst="straightConnector1">
-            <a:avLst/>
-          </a:prstGeom>
-          <a:noFill/>
-          <a:ln w="6350" cap="flat" cmpd="sng" algn="ctr">
-            <a:solidFill>
-              <a:sysClr val="windowText" lastClr="000000"/>
-            </a:solidFill>
-            <a:prstDash val="solid"/>
-            <a:miter lim="800000"/>
-            <a:headEnd type="triangle"/>
-            <a:tailEnd type="triangle"/>
-          </a:ln>
-          <a:effectLst/>
-        </p:spPr>
-      </p:cxnSp>
-      <p:sp>
-        <p:nvSpPr>
-          <p:cNvPr id="1090" name="Rounded Rectangle 1089">
-            <a:extLst>
-              <a:ext uri="{FF2B5EF4-FFF2-40B4-BE49-F238E27FC236}">
-                <a16:creationId xmlns:a16="http://schemas.microsoft.com/office/drawing/2014/main" id="{4055A9DC-ECE8-5680-968F-A97D030D3E89}"/>
-              </a:ext>
-            </a:extLst>
-          </p:cNvPr>
-          <p:cNvSpPr/>
-          <p:nvPr/>
-        </p:nvSpPr>
-        <p:spPr>
-          <a:xfrm>
-            <a:off x="1554241" y="7167273"/>
-            <a:ext cx="1092459" cy="469659"/>
-          </a:xfrm>
-          <a:prstGeom prst="roundRect">
-            <a:avLst/>
-          </a:prstGeom>
-          <a:gradFill rotWithShape="1">
-            <a:gsLst>
-              <a:gs pos="0">
-                <a:srgbClr val="4472C4">
-                  <a:lumMod val="110000"/>
-                  <a:satMod val="105000"/>
-                  <a:tint val="67000"/>
-                </a:srgbClr>
-              </a:gs>
-              <a:gs pos="50000">
-                <a:srgbClr val="4472C4">
-                  <a:lumMod val="105000"/>
-                  <a:satMod val="103000"/>
-                  <a:tint val="73000"/>
-                </a:srgbClr>
-              </a:gs>
-              <a:gs pos="100000">
-                <a:srgbClr val="4472C4">
-                  <a:lumMod val="105000"/>
-                  <a:satMod val="109000"/>
-                  <a:tint val="81000"/>
-                </a:srgbClr>
-              </a:gs>
-            </a:gsLst>
-            <a:lin ang="5400000" scaled="0"/>
-          </a:gradFill>
-          <a:ln w="6350" cap="flat" cmpd="sng" algn="ctr">
-            <a:solidFill>
-              <a:srgbClr val="4472C4"/>
-            </a:solidFill>
-            <a:prstDash val="solid"/>
-            <a:miter lim="800000"/>
-          </a:ln>
-          <a:effectLst/>
-        </p:spPr>
-        <p:txBody>
-          <a:bodyPr lIns="0" tIns="0" rIns="0" bIns="0" rtlCol="0" anchor="ctr"/>
-          <a:lstStyle/>
-          <a:p>
-            <a:pPr algn="ctr" defTabSz="914400">
-              <a:defRPr/>
-            </a:pPr>
-            <a:r>
-              <a:rPr lang="en-US" sz="1200" kern="0" dirty="0">
-                <a:solidFill>
-                  <a:prstClr val="black"/>
-                </a:solidFill>
-                <a:latin typeface="Arial" panose="020B0604020202020204" pitchFamily="34" charset="0"/>
-                <a:cs typeface="Arial" panose="020B0604020202020204" pitchFamily="34" charset="0"/>
-              </a:rPr>
-              <a:t>1. Pipeline</a:t>
-            </a:r>
-          </a:p>
-          <a:p>
-            <a:pPr algn="ctr" defTabSz="914400">
-              <a:defRPr/>
-            </a:pPr>
-            <a:r>
-              <a:rPr lang="en-US" sz="1200" kern="0" dirty="0">
-                <a:solidFill>
-                  <a:prstClr val="black"/>
-                </a:solidFill>
-                <a:latin typeface="Arial" panose="020B0604020202020204" pitchFamily="34" charset="0"/>
-                <a:cs typeface="Arial" panose="020B0604020202020204" pitchFamily="34" charset="0"/>
-              </a:rPr>
-              <a:t>builder</a:t>
-            </a:r>
-          </a:p>
-        </p:txBody>
-      </p:sp>
-      <p:sp>
-        <p:nvSpPr>
-          <p:cNvPr id="1091" name="Rounded Rectangle 1090">
-            <a:extLst>
-              <a:ext uri="{FF2B5EF4-FFF2-40B4-BE49-F238E27FC236}">
-                <a16:creationId xmlns:a16="http://schemas.microsoft.com/office/drawing/2014/main" id="{38DBB5F0-473F-C692-335E-3CD1C2E333A2}"/>
-              </a:ext>
-            </a:extLst>
-          </p:cNvPr>
-          <p:cNvSpPr/>
-          <p:nvPr/>
-        </p:nvSpPr>
-        <p:spPr>
-          <a:xfrm>
-            <a:off x="2795329" y="7167273"/>
-            <a:ext cx="1092459" cy="469659"/>
-          </a:xfrm>
-          <a:prstGeom prst="roundRect">
-            <a:avLst/>
-          </a:prstGeom>
-          <a:gradFill rotWithShape="1">
-            <a:gsLst>
-              <a:gs pos="0">
-                <a:srgbClr val="4472C4">
-                  <a:lumMod val="110000"/>
-                  <a:satMod val="105000"/>
-                  <a:tint val="67000"/>
-                </a:srgbClr>
-              </a:gs>
-              <a:gs pos="50000">
-                <a:srgbClr val="4472C4">
-                  <a:lumMod val="105000"/>
-                  <a:satMod val="103000"/>
-                  <a:tint val="73000"/>
-                </a:srgbClr>
-              </a:gs>
-              <a:gs pos="100000">
-                <a:srgbClr val="4472C4">
-                  <a:lumMod val="105000"/>
-                  <a:satMod val="109000"/>
-                  <a:tint val="81000"/>
-                </a:srgbClr>
-              </a:gs>
-            </a:gsLst>
-            <a:lin ang="5400000" scaled="0"/>
-          </a:gradFill>
-          <a:ln w="6350" cap="flat" cmpd="sng" algn="ctr">
-            <a:solidFill>
-              <a:srgbClr val="4472C4"/>
-            </a:solidFill>
-            <a:prstDash val="solid"/>
-            <a:miter lim="800000"/>
-          </a:ln>
-          <a:effectLst/>
-        </p:spPr>
-        <p:txBody>
-          <a:bodyPr lIns="0" tIns="0" rIns="0" bIns="0" rtlCol="0" anchor="ctr"/>
-          <a:lstStyle/>
-          <a:p>
-            <a:pPr algn="ctr" defTabSz="914400">
-              <a:defRPr/>
-            </a:pPr>
-            <a:r>
-              <a:rPr lang="en-US" sz="1200" kern="0" dirty="0">
-                <a:solidFill>
-                  <a:prstClr val="black"/>
-                </a:solidFill>
-                <a:latin typeface="Arial" panose="020B0604020202020204" pitchFamily="34" charset="0"/>
-                <a:cs typeface="Arial" panose="020B0604020202020204" pitchFamily="34" charset="0"/>
-              </a:rPr>
-              <a:t>2. Pipeline</a:t>
-            </a:r>
-          </a:p>
-          <a:p>
-            <a:pPr algn="ctr" defTabSz="914400">
-              <a:defRPr/>
-            </a:pPr>
-            <a:r>
-              <a:rPr lang="en-US" sz="1200" kern="0" dirty="0">
-                <a:solidFill>
-                  <a:prstClr val="black"/>
-                </a:solidFill>
-                <a:latin typeface="Arial" panose="020B0604020202020204" pitchFamily="34" charset="0"/>
-                <a:cs typeface="Arial" panose="020B0604020202020204" pitchFamily="34" charset="0"/>
-              </a:rPr>
-              <a:t>Executor</a:t>
-            </a:r>
-          </a:p>
-        </p:txBody>
-      </p:sp>
-      <p:sp>
-        <p:nvSpPr>
-          <p:cNvPr id="1092" name="Rounded Rectangle 1091">
-            <a:extLst>
-              <a:ext uri="{FF2B5EF4-FFF2-40B4-BE49-F238E27FC236}">
-                <a16:creationId xmlns:a16="http://schemas.microsoft.com/office/drawing/2014/main" id="{602D9BA5-7A16-0E68-7FF2-3EFF58A57FBC}"/>
-              </a:ext>
-            </a:extLst>
-          </p:cNvPr>
-          <p:cNvSpPr/>
-          <p:nvPr/>
-        </p:nvSpPr>
-        <p:spPr>
-          <a:xfrm>
-            <a:off x="4036417" y="7167273"/>
-            <a:ext cx="1092459" cy="469659"/>
-          </a:xfrm>
-          <a:prstGeom prst="roundRect">
-            <a:avLst/>
-          </a:prstGeom>
-          <a:gradFill rotWithShape="1">
-            <a:gsLst>
-              <a:gs pos="0">
-                <a:srgbClr val="4472C4">
-                  <a:lumMod val="110000"/>
-                  <a:satMod val="105000"/>
-                  <a:tint val="67000"/>
-                </a:srgbClr>
-              </a:gs>
-              <a:gs pos="50000">
-                <a:srgbClr val="4472C4">
-                  <a:lumMod val="105000"/>
-                  <a:satMod val="103000"/>
-                  <a:tint val="73000"/>
-                </a:srgbClr>
-              </a:gs>
-              <a:gs pos="100000">
-                <a:srgbClr val="4472C4">
-                  <a:lumMod val="105000"/>
-                  <a:satMod val="109000"/>
-                  <a:tint val="81000"/>
-                </a:srgbClr>
-              </a:gs>
-            </a:gsLst>
-            <a:lin ang="5400000" scaled="0"/>
-          </a:gradFill>
-          <a:ln w="6350" cap="flat" cmpd="sng" algn="ctr">
-            <a:solidFill>
-              <a:srgbClr val="4472C4"/>
-            </a:solidFill>
-            <a:prstDash val="solid"/>
-            <a:miter lim="800000"/>
-          </a:ln>
-          <a:effectLst/>
-        </p:spPr>
-        <p:txBody>
-          <a:bodyPr lIns="0" tIns="0" rIns="0" bIns="0" rtlCol="0" anchor="ctr"/>
-          <a:lstStyle/>
-          <a:p>
-            <a:pPr algn="ctr" defTabSz="914400">
-              <a:defRPr/>
-            </a:pPr>
-            <a:r>
-              <a:rPr lang="en-US" sz="1200" kern="0" dirty="0">
-                <a:solidFill>
-                  <a:prstClr val="black"/>
-                </a:solidFill>
-                <a:latin typeface="Arial" panose="020B0604020202020204" pitchFamily="34" charset="0"/>
-                <a:cs typeface="Arial" panose="020B0604020202020204" pitchFamily="34" charset="0"/>
-              </a:rPr>
-              <a:t>3. Biological interpreter</a:t>
-            </a:r>
-          </a:p>
-        </p:txBody>
-      </p:sp>
-      <p:cxnSp>
-        <p:nvCxnSpPr>
-          <p:cNvPr id="1096" name="Straight Arrow Connector 1095">
-            <a:extLst>
-              <a:ext uri="{FF2B5EF4-FFF2-40B4-BE49-F238E27FC236}">
-                <a16:creationId xmlns:a16="http://schemas.microsoft.com/office/drawing/2014/main" id="{23BAB571-238F-EB50-5D61-712171E68CD1}"/>
-              </a:ext>
-            </a:extLst>
-          </p:cNvPr>
-          <p:cNvCxnSpPr>
-            <a:cxnSpLocks/>
-          </p:cNvCxnSpPr>
-          <p:nvPr/>
-        </p:nvCxnSpPr>
-        <p:spPr>
-          <a:xfrm>
-            <a:off x="3816117" y="6792921"/>
-            <a:ext cx="394202" cy="330694"/>
-          </a:xfrm>
-          <a:prstGeom prst="straightConnector1">
-            <a:avLst/>
-          </a:prstGeom>
-          <a:noFill/>
-          <a:ln w="6350" cap="flat" cmpd="sng" algn="ctr">
-            <a:solidFill>
-              <a:sysClr val="windowText" lastClr="000000"/>
-            </a:solidFill>
-            <a:prstDash val="solid"/>
-            <a:miter lim="800000"/>
-            <a:headEnd type="triangle"/>
-            <a:tailEnd type="triangle"/>
-          </a:ln>
-          <a:effectLst/>
-        </p:spPr>
-      </p:cxnSp>
-      <p:cxnSp>
-        <p:nvCxnSpPr>
-          <p:cNvPr id="1098" name="Straight Arrow Connector 1097">
-            <a:extLst>
-              <a:ext uri="{FF2B5EF4-FFF2-40B4-BE49-F238E27FC236}">
-                <a16:creationId xmlns:a16="http://schemas.microsoft.com/office/drawing/2014/main" id="{372B4DBF-8EE1-79FA-871A-DB8E15EFB82B}"/>
-              </a:ext>
-            </a:extLst>
-          </p:cNvPr>
-          <p:cNvCxnSpPr>
-            <a:cxnSpLocks/>
-          </p:cNvCxnSpPr>
-          <p:nvPr/>
-        </p:nvCxnSpPr>
-        <p:spPr>
-          <a:xfrm>
-            <a:off x="3258126" y="6720393"/>
-            <a:ext cx="0" cy="328631"/>
-          </a:xfrm>
-          <a:prstGeom prst="straightConnector1">
-            <a:avLst/>
-          </a:prstGeom>
-          <a:noFill/>
-          <a:ln w="6350" cap="flat" cmpd="sng" algn="ctr">
-            <a:solidFill>
-              <a:sysClr val="windowText" lastClr="000000"/>
-            </a:solidFill>
-            <a:prstDash val="solid"/>
-            <a:miter lim="800000"/>
-            <a:headEnd type="triangle"/>
-            <a:tailEnd type="triangle"/>
-          </a:ln>
-          <a:effectLst/>
-        </p:spPr>
-      </p:cxnSp>
-      <p:cxnSp>
-        <p:nvCxnSpPr>
-          <p:cNvPr id="1099" name="Straight Arrow Connector 1098">
-            <a:extLst>
-              <a:ext uri="{FF2B5EF4-FFF2-40B4-BE49-F238E27FC236}">
-                <a16:creationId xmlns:a16="http://schemas.microsoft.com/office/drawing/2014/main" id="{ABA65DF9-9D13-E829-DFA6-5DD9772F144F}"/>
-              </a:ext>
-            </a:extLst>
-          </p:cNvPr>
-          <p:cNvCxnSpPr>
-            <a:cxnSpLocks/>
-            <a:endCxn id="1092" idx="3"/>
-          </p:cNvCxnSpPr>
-          <p:nvPr/>
-        </p:nvCxnSpPr>
-        <p:spPr>
-          <a:xfrm flipH="1">
-            <a:off x="5128876" y="7402103"/>
-            <a:ext cx="498756" cy="0"/>
-          </a:xfrm>
-          <a:prstGeom prst="straightConnector1">
-            <a:avLst/>
-          </a:prstGeom>
-          <a:noFill/>
-          <a:ln w="6350" cap="flat" cmpd="sng" algn="ctr">
-            <a:solidFill>
-              <a:sysClr val="windowText" lastClr="000000"/>
-            </a:solidFill>
-            <a:prstDash val="solid"/>
-            <a:miter lim="800000"/>
-            <a:tailEnd type="triangle"/>
-          </a:ln>
-          <a:effectLst/>
-        </p:spPr>
-      </p:cxnSp>
-      <p:sp>
-        <p:nvSpPr>
-          <p:cNvPr id="1105" name="Rounded Rectangle 1104">
-            <a:extLst>
-              <a:ext uri="{FF2B5EF4-FFF2-40B4-BE49-F238E27FC236}">
-                <a16:creationId xmlns:a16="http://schemas.microsoft.com/office/drawing/2014/main" id="{5B02544B-1762-F269-DCC2-AA67237C1D55}"/>
-              </a:ext>
-            </a:extLst>
-          </p:cNvPr>
-          <p:cNvSpPr/>
-          <p:nvPr/>
-        </p:nvSpPr>
-        <p:spPr>
-          <a:xfrm>
-            <a:off x="5655044" y="9086068"/>
-            <a:ext cx="1203609" cy="406469"/>
-          </a:xfrm>
-          <a:prstGeom prst="roundRect">
-            <a:avLst/>
-          </a:prstGeom>
-          <a:ln/>
-        </p:spPr>
-        <p:style>
-          <a:lnRef idx="1">
-            <a:schemeClr val="accent5"/>
-          </a:lnRef>
-          <a:fillRef idx="2">
-            <a:schemeClr val="accent5"/>
-          </a:fillRef>
-          <a:effectRef idx="1">
-            <a:schemeClr val="accent5"/>
-          </a:effectRef>
-          <a:fontRef idx="minor">
-            <a:schemeClr val="dk1"/>
-          </a:fontRef>
-        </p:style>
-        <p:txBody>
-          <a:bodyPr lIns="0" tIns="0" rIns="0" bIns="0" rtlCol="0" anchor="ctr"/>
-          <a:lstStyle/>
-          <a:p>
-            <a:pPr algn="ctr" defTabSz="914400">
-              <a:defRPr/>
-            </a:pPr>
-            <a:r>
-              <a:rPr lang="en-US" sz="1200" dirty="0">
-                <a:solidFill>
-                  <a:srgbClr val="000000"/>
-                </a:solidFill>
-                <a:latin typeface="Arial" panose="020B0604020202020204" pitchFamily="34" charset="0"/>
-                <a:cs typeface="Arial" panose="020B0604020202020204" pitchFamily="34" charset="0"/>
-              </a:rPr>
-              <a:t>PubMed</a:t>
-            </a:r>
-            <a:endParaRPr lang="en-US" sz="1200" kern="0" dirty="0">
-              <a:solidFill>
-                <a:prstClr val="black"/>
-              </a:solidFill>
-              <a:latin typeface="Arial" panose="020B0604020202020204" pitchFamily="34" charset="0"/>
-              <a:cs typeface="Arial" panose="020B0604020202020204" pitchFamily="34" charset="0"/>
-            </a:endParaRPr>
-          </a:p>
-        </p:txBody>
-      </p:sp>
-      <p:sp>
-        <p:nvSpPr>
-          <p:cNvPr id="1107" name="Snip Single Corner Rectangle 1106">
-            <a:extLst>
-              <a:ext uri="{FF2B5EF4-FFF2-40B4-BE49-F238E27FC236}">
-                <a16:creationId xmlns:a16="http://schemas.microsoft.com/office/drawing/2014/main" id="{72852B32-5BAD-101F-7550-5CBB29BD4760}"/>
-              </a:ext>
-            </a:extLst>
-          </p:cNvPr>
-          <p:cNvSpPr/>
-          <p:nvPr/>
-        </p:nvSpPr>
-        <p:spPr>
-          <a:xfrm>
-            <a:off x="3898706" y="6139496"/>
-            <a:ext cx="1258431" cy="545001"/>
-          </a:xfrm>
-          <a:prstGeom prst="snip1Rect">
-            <a:avLst>
-              <a:gd name="adj" fmla="val 50000"/>
-            </a:avLst>
-          </a:prstGeom>
-          <a:ln>
-            <a:prstDash val="dash"/>
-          </a:ln>
-        </p:spPr>
-        <p:style>
-          <a:lnRef idx="1">
-            <a:schemeClr val="accent2"/>
-          </a:lnRef>
-          <a:fillRef idx="2">
-            <a:schemeClr val="accent2"/>
-          </a:fillRef>
-          <a:effectRef idx="1">
-            <a:schemeClr val="accent2"/>
-          </a:effectRef>
-          <a:fontRef idx="minor">
-            <a:schemeClr val="dk1"/>
-          </a:fontRef>
-        </p:style>
-        <p:txBody>
-          <a:bodyPr lIns="0" tIns="0" rIns="0" bIns="0" rtlCol="0" anchor="t"/>
-          <a:lstStyle/>
-          <a:p>
-            <a:pPr algn="ctr" defTabSz="914400">
-              <a:defRPr/>
-            </a:pPr>
-            <a:r>
-              <a:rPr lang="en-US" sz="1200" kern="0" dirty="0" err="1">
-                <a:solidFill>
-                  <a:prstClr val="black"/>
-                </a:solidFill>
-                <a:latin typeface="Arial" panose="020B0604020202020204" pitchFamily="34" charset="0"/>
-                <a:cs typeface="Arial" panose="020B0604020202020204" pitchFamily="34" charset="0"/>
-              </a:rPr>
-              <a:t>Progreesive</a:t>
-            </a:r>
-            <a:r>
-              <a:rPr lang="en-US" sz="1200" kern="0" dirty="0">
-                <a:solidFill>
-                  <a:prstClr val="black"/>
-                </a:solidFill>
-                <a:latin typeface="Arial" panose="020B0604020202020204" pitchFamily="34" charset="0"/>
-                <a:cs typeface="Arial" panose="020B0604020202020204" pitchFamily="34" charset="0"/>
-              </a:rPr>
-              <a:t> </a:t>
-            </a:r>
-            <a:r>
-              <a:rPr lang="en-US" sz="1200" kern="0" dirty="0" err="1">
-                <a:solidFill>
-                  <a:prstClr val="black"/>
-                </a:solidFill>
-                <a:latin typeface="Arial" panose="020B0604020202020204" pitchFamily="34" charset="0"/>
-                <a:cs typeface="Arial" panose="020B0604020202020204" pitchFamily="34" charset="0"/>
-              </a:rPr>
-              <a:t>disclousure</a:t>
-            </a:r>
-            <a:r>
-              <a:rPr lang="en-US" sz="1200" kern="0" dirty="0">
-                <a:solidFill>
-                  <a:prstClr val="black"/>
-                </a:solidFill>
-                <a:latin typeface="Arial" panose="020B0604020202020204" pitchFamily="34" charset="0"/>
-                <a:cs typeface="Arial" panose="020B0604020202020204" pitchFamily="34" charset="0"/>
-              </a:rPr>
-              <a:t> </a:t>
-            </a:r>
-          </a:p>
-        </p:txBody>
-      </p:sp>
     </p:spTree>
     <p:extLst>
       <p:ext uri="{BB962C8B-B14F-4D97-AF65-F5344CB8AC3E}">
@@ -8616,2632 +6729,6 @@
 </file>
 
 <file path=ppt/slides/slide2.xml><?xml version="1.0" encoding="utf-8"?>
-<p:sld xmlns:a="http://schemas.openxmlformats.org/drawingml/2006/main" xmlns:r="http://schemas.openxmlformats.org/officeDocument/2006/relationships" xmlns:p="http://schemas.openxmlformats.org/presentationml/2006/main">
-  <p:cSld>
-    <p:spTree>
-      <p:nvGrpSpPr>
-        <p:cNvPr id="1" name="">
-          <a:extLst>
-            <a:ext uri="{FF2B5EF4-FFF2-40B4-BE49-F238E27FC236}">
-              <a16:creationId xmlns:a16="http://schemas.microsoft.com/office/drawing/2014/main" id="{E70BC8BD-104B-DCEA-A224-CF7A599BB705}"/>
-            </a:ext>
-          </a:extLst>
-        </p:cNvPr>
-        <p:cNvGrpSpPr/>
-        <p:nvPr/>
-      </p:nvGrpSpPr>
-      <p:grpSpPr>
-        <a:xfrm>
-          <a:off x="0" y="0"/>
-          <a:ext cx="0" cy="0"/>
-          <a:chOff x="0" y="0"/>
-          <a:chExt cx="0" cy="0"/>
-        </a:xfrm>
-      </p:grpSpPr>
-      <p:sp>
-        <p:nvSpPr>
-          <p:cNvPr id="4" name="TextBox 3">
-            <a:extLst>
-              <a:ext uri="{FF2B5EF4-FFF2-40B4-BE49-F238E27FC236}">
-                <a16:creationId xmlns:a16="http://schemas.microsoft.com/office/drawing/2014/main" id="{6B3802E9-8AEE-1F6B-4327-46DB8AB577B4}"/>
-              </a:ext>
-            </a:extLst>
-          </p:cNvPr>
-          <p:cNvSpPr txBox="1"/>
-          <p:nvPr/>
-        </p:nvSpPr>
-        <p:spPr>
-          <a:xfrm>
-            <a:off x="16566777" y="12711953"/>
-            <a:ext cx="761747" cy="369332"/>
-          </a:xfrm>
-          <a:prstGeom prst="rect">
-            <a:avLst/>
-          </a:prstGeom>
-          <a:noFill/>
-        </p:spPr>
-        <p:txBody>
-          <a:bodyPr wrap="none" rtlCol="0">
-            <a:spAutoFit/>
-          </a:bodyPr>
-          <a:lstStyle/>
-          <a:p>
-            <a:r>
-              <a:rPr lang="en-US" dirty="0">
-                <a:latin typeface="Arial" panose="020B0604020202020204" pitchFamily="34" charset="0"/>
-                <a:cs typeface="Arial" panose="020B0604020202020204" pitchFamily="34" charset="0"/>
-              </a:rPr>
-              <a:t>Fig. 2</a:t>
-            </a:r>
-          </a:p>
-        </p:txBody>
-      </p:sp>
-      <p:sp>
-        <p:nvSpPr>
-          <p:cNvPr id="9" name="TextBox 8">
-            <a:extLst>
-              <a:ext uri="{FF2B5EF4-FFF2-40B4-BE49-F238E27FC236}">
-                <a16:creationId xmlns:a16="http://schemas.microsoft.com/office/drawing/2014/main" id="{CEF05C65-0A7E-8D02-F33E-3898A76B7CD4}"/>
-              </a:ext>
-            </a:extLst>
-          </p:cNvPr>
-          <p:cNvSpPr txBox="1"/>
-          <p:nvPr/>
-        </p:nvSpPr>
-        <p:spPr>
-          <a:xfrm>
-            <a:off x="9989633" y="5833889"/>
-            <a:ext cx="5054424" cy="6601807"/>
-          </a:xfrm>
-          <a:prstGeom prst="rect">
-            <a:avLst/>
-          </a:prstGeom>
-          <a:ln w="12700"/>
-        </p:spPr>
-        <p:style>
-          <a:lnRef idx="2">
-            <a:schemeClr val="dk1"/>
-          </a:lnRef>
-          <a:fillRef idx="1">
-            <a:schemeClr val="lt1"/>
-          </a:fillRef>
-          <a:effectRef idx="0">
-            <a:schemeClr val="dk1"/>
-          </a:effectRef>
-          <a:fontRef idx="minor">
-            <a:schemeClr val="dk1"/>
-          </a:fontRef>
-        </p:style>
-        <p:txBody>
-          <a:bodyPr wrap="square" rtlCol="0" anchor="ctr">
-            <a:spAutoFit/>
-          </a:bodyPr>
-          <a:lstStyle/>
-          <a:p>
-            <a:pPr>
-              <a:spcBef>
-                <a:spcPts val="100"/>
-              </a:spcBef>
-              <a:spcAft>
-                <a:spcPts val="500"/>
-              </a:spcAft>
-            </a:pPr>
-            <a:r>
-              <a:rPr lang="en-US" sz="1000" b="1" dirty="0">
-                <a:latin typeface="ui-sans-serif"/>
-              </a:rPr>
-              <a:t>🧬 Spatial Transcriptomics Analysis Pipeline</a:t>
-            </a:r>
-          </a:p>
-          <a:p>
-            <a:pPr>
-              <a:spcBef>
-                <a:spcPts val="100"/>
-              </a:spcBef>
-              <a:spcAft>
-                <a:spcPts val="500"/>
-              </a:spcAft>
-            </a:pPr>
-            <a:endParaRPr lang="en-US" sz="1000" b="1" dirty="0">
-              <a:latin typeface="ui-sans-serif"/>
-            </a:endParaRPr>
-          </a:p>
-          <a:p>
-            <a:pPr>
-              <a:spcBef>
-                <a:spcPts val="100"/>
-              </a:spcBef>
-              <a:spcAft>
-                <a:spcPts val="500"/>
-              </a:spcAft>
-            </a:pPr>
-            <a:r>
-              <a:rPr lang="en-US" sz="1000" b="1" dirty="0">
-                <a:latin typeface="ui-sans-serif"/>
-              </a:rPr>
-              <a:t>📋 Pipeline Summary</a:t>
-            </a:r>
-          </a:p>
-          <a:p>
-            <a:pPr>
-              <a:spcBef>
-                <a:spcPts val="100"/>
-              </a:spcBef>
-              <a:spcAft>
-                <a:spcPts val="500"/>
-              </a:spcAft>
-            </a:pPr>
-            <a:r>
-              <a:rPr lang="en-US" sz="900" dirty="0">
-                <a:latin typeface="ui-sans-serif"/>
-              </a:rPr>
-              <a:t>log normalization → CARD (Deconvolution) → </a:t>
-            </a:r>
-            <a:r>
-              <a:rPr lang="en-US" sz="900" dirty="0" err="1">
-                <a:latin typeface="ui-sans-serif"/>
-              </a:rPr>
-              <a:t>BayesSpace</a:t>
-            </a:r>
-            <a:r>
-              <a:rPr lang="en-US" sz="900" dirty="0">
-                <a:latin typeface="ui-sans-serif"/>
-              </a:rPr>
-              <a:t> (Spatial clustering)</a:t>
-            </a:r>
-          </a:p>
-          <a:p>
-            <a:pPr>
-              <a:spcBef>
-                <a:spcPts val="100"/>
-              </a:spcBef>
-              <a:spcAft>
-                <a:spcPts val="500"/>
-              </a:spcAft>
-            </a:pPr>
-            <a:endParaRPr lang="en-US" sz="900" dirty="0"/>
-          </a:p>
-          <a:p>
-            <a:pPr>
-              <a:spcBef>
-                <a:spcPts val="100"/>
-              </a:spcBef>
-              <a:spcAft>
-                <a:spcPts val="500"/>
-              </a:spcAft>
-            </a:pPr>
-            <a:r>
-              <a:rPr lang="en-US" sz="900" b="1" dirty="0">
-                <a:latin typeface="ui-sans-serif"/>
-              </a:rPr>
-              <a:t>🔧 Step 1: Data Normalization</a:t>
-            </a:r>
-          </a:p>
-          <a:p>
-            <a:pPr marL="230188" indent="-115888">
-              <a:buFont typeface="Arial" panose="020B0604020202020204" pitchFamily="34" charset="0"/>
-              <a:buChar char="•"/>
-            </a:pPr>
-            <a:r>
-              <a:rPr lang="en-US" sz="800" b="1" dirty="0">
-                <a:latin typeface="ui-sans-serif"/>
-              </a:rPr>
-              <a:t>Tool</a:t>
-            </a:r>
-            <a:r>
-              <a:rPr lang="en-US" sz="800" dirty="0">
-                <a:latin typeface="ui-sans-serif"/>
-              </a:rPr>
-              <a:t>: log normalization (e.g., Seurat::</a:t>
-            </a:r>
-            <a:r>
-              <a:rPr lang="en-US" sz="800" dirty="0" err="1">
-                <a:latin typeface="ui-sans-serif"/>
-              </a:rPr>
-              <a:t>NormalizeData</a:t>
-            </a:r>
-            <a:r>
-              <a:rPr lang="en-US" sz="800" dirty="0">
-                <a:latin typeface="ui-sans-serif"/>
-              </a:rPr>
-              <a:t> or base R log1p)</a:t>
-            </a:r>
-          </a:p>
-          <a:p>
-            <a:pPr marL="230188" indent="-115888">
-              <a:buFont typeface="Arial" panose="020B0604020202020204" pitchFamily="34" charset="0"/>
-              <a:buChar char="•"/>
-            </a:pPr>
-            <a:r>
-              <a:rPr lang="en-US" sz="800" b="1" dirty="0">
-                <a:latin typeface="ui-sans-serif"/>
-              </a:rPr>
-              <a:t>Purpose</a:t>
-            </a:r>
-            <a:r>
-              <a:rPr lang="en-US" sz="800" dirty="0">
-                <a:latin typeface="ui-sans-serif"/>
-              </a:rPr>
-              <a:t>: Normalization</a:t>
-            </a:r>
-          </a:p>
-          <a:p>
-            <a:pPr marL="230188" indent="-115888">
-              <a:buFont typeface="Arial" panose="020B0604020202020204" pitchFamily="34" charset="0"/>
-              <a:buChar char="•"/>
-            </a:pPr>
-            <a:r>
-              <a:rPr lang="en-US" sz="800" b="1" dirty="0">
-                <a:latin typeface="ui-sans-serif"/>
-              </a:rPr>
-              <a:t>Language</a:t>
-            </a:r>
-            <a:r>
-              <a:rPr lang="en-US" sz="800" dirty="0">
-                <a:latin typeface="ui-sans-serif"/>
-              </a:rPr>
-              <a:t>: R</a:t>
-            </a:r>
-          </a:p>
-          <a:p>
-            <a:pPr marL="230188" indent="-115888">
-              <a:buFont typeface="Arial" panose="020B0604020202020204" pitchFamily="34" charset="0"/>
-              <a:buChar char="•"/>
-            </a:pPr>
-            <a:r>
-              <a:rPr lang="en-US" sz="800" b="1" dirty="0">
-                <a:latin typeface="ui-sans-serif"/>
-              </a:rPr>
-              <a:t>Computational Requirements</a:t>
-            </a:r>
-            <a:r>
-              <a:rPr lang="en-US" sz="800" dirty="0">
-                <a:latin typeface="ui-sans-serif"/>
-              </a:rPr>
-              <a:t>: CPU, minimal memory for a single </a:t>
-            </a:r>
-            <a:r>
-              <a:rPr lang="en-US" sz="800" dirty="0" err="1">
-                <a:latin typeface="ui-sans-serif"/>
-              </a:rPr>
-              <a:t>Visium</a:t>
-            </a:r>
-            <a:r>
-              <a:rPr lang="en-US" sz="800" dirty="0">
-                <a:latin typeface="ui-sans-serif"/>
-              </a:rPr>
-              <a:t> sample</a:t>
-            </a:r>
-          </a:p>
-          <a:p>
-            <a:pPr marL="230188" indent="-115888">
-              <a:buFont typeface="Arial" panose="020B0604020202020204" pitchFamily="34" charset="0"/>
-              <a:buChar char="•"/>
-            </a:pPr>
-            <a:r>
-              <a:rPr lang="en-US" sz="800" b="1" dirty="0">
-                <a:latin typeface="ui-sans-serif"/>
-              </a:rPr>
-              <a:t>why this tool</a:t>
-            </a:r>
-            <a:r>
-              <a:rPr lang="en-US" sz="800" dirty="0">
-                <a:latin typeface="ui-sans-serif"/>
-              </a:rPr>
-              <a:t>: Log normalization is the standard preprocessing for </a:t>
-            </a:r>
-            <a:r>
-              <a:rPr lang="en-US" sz="800" dirty="0" err="1">
-                <a:latin typeface="ui-sans-serif"/>
-              </a:rPr>
-              <a:t>Visium</a:t>
-            </a:r>
-            <a:r>
-              <a:rPr lang="en-US" sz="800" dirty="0">
-                <a:latin typeface="ui-sans-serif"/>
-              </a:rPr>
-              <a:t> data and is compatible with all downstream R-based tools.</a:t>
-            </a:r>
-          </a:p>
-          <a:p>
-            <a:pPr algn="l">
-              <a:buFont typeface="Arial" panose="020B0604020202020204" pitchFamily="34" charset="0"/>
-              <a:buChar char="•"/>
-            </a:pPr>
-            <a:endParaRPr lang="en-US" sz="800" dirty="0"/>
-          </a:p>
-          <a:p>
-            <a:pPr>
-              <a:spcBef>
-                <a:spcPts val="100"/>
-              </a:spcBef>
-              <a:spcAft>
-                <a:spcPts val="500"/>
-              </a:spcAft>
-            </a:pPr>
-            <a:r>
-              <a:rPr lang="en-US" sz="900" b="1" dirty="0">
-                <a:latin typeface="ui-sans-serif"/>
-              </a:rPr>
-              <a:t>🔬 Step 2: Cell Type Analysis</a:t>
-            </a:r>
-          </a:p>
-          <a:p>
-            <a:pPr marL="230188" indent="-115888">
-              <a:buFont typeface="Arial" panose="020B0604020202020204" pitchFamily="34" charset="0"/>
-              <a:buChar char="•"/>
-            </a:pPr>
-            <a:r>
-              <a:rPr lang="en-US" sz="800" b="1" dirty="0">
-                <a:latin typeface="ui-sans-serif"/>
-              </a:rPr>
-              <a:t>Tool</a:t>
-            </a:r>
-            <a:r>
-              <a:rPr lang="en-US" sz="800" dirty="0">
-                <a:latin typeface="ui-sans-serif"/>
-              </a:rPr>
-              <a:t>: CARD</a:t>
-            </a:r>
-          </a:p>
-          <a:p>
-            <a:pPr marL="230188" indent="-115888">
-              <a:buFont typeface="Arial" panose="020B0604020202020204" pitchFamily="34" charset="0"/>
-              <a:buChar char="•"/>
-            </a:pPr>
-            <a:r>
-              <a:rPr lang="en-US" sz="800" b="1" dirty="0">
-                <a:latin typeface="ui-sans-serif"/>
-              </a:rPr>
-              <a:t>Purpose</a:t>
-            </a:r>
-            <a:r>
-              <a:rPr lang="en-US" sz="800" dirty="0">
-                <a:latin typeface="ui-sans-serif"/>
-              </a:rPr>
-              <a:t>: Deconvolution for spot-based data</a:t>
-            </a:r>
-          </a:p>
-          <a:p>
-            <a:pPr marL="230188" indent="-115888">
-              <a:buFont typeface="Arial" panose="020B0604020202020204" pitchFamily="34" charset="0"/>
-              <a:buChar char="•"/>
-            </a:pPr>
-            <a:r>
-              <a:rPr lang="en-US" sz="800" b="1" dirty="0">
-                <a:latin typeface="ui-sans-serif"/>
-              </a:rPr>
-              <a:t>Language</a:t>
-            </a:r>
-            <a:r>
-              <a:rPr lang="en-US" sz="800" dirty="0">
-                <a:latin typeface="ui-sans-serif"/>
-              </a:rPr>
-              <a:t>: R</a:t>
-            </a:r>
-          </a:p>
-          <a:p>
-            <a:pPr marL="230188" indent="-115888">
-              <a:buFont typeface="Arial" panose="020B0604020202020204" pitchFamily="34" charset="0"/>
-              <a:buChar char="•"/>
-            </a:pPr>
-            <a:r>
-              <a:rPr lang="en-US" sz="800" b="1" dirty="0">
-                <a:latin typeface="ui-sans-serif"/>
-              </a:rPr>
-              <a:t>Computational Requirements</a:t>
-            </a:r>
-            <a:r>
-              <a:rPr lang="en-US" sz="800" dirty="0">
-                <a:latin typeface="ui-sans-serif"/>
-              </a:rPr>
-              <a:t>: CPU, very low memory usage (CARD is 0.2–10% of the memory of alternatives)</a:t>
-            </a:r>
-          </a:p>
-          <a:p>
-            <a:pPr marL="230188" indent="-115888">
-              <a:buFont typeface="Arial" panose="020B0604020202020204" pitchFamily="34" charset="0"/>
-              <a:buChar char="•"/>
-            </a:pPr>
-            <a:r>
-              <a:rPr lang="en-US" sz="800" b="1" dirty="0">
-                <a:latin typeface="ui-sans-serif"/>
-              </a:rPr>
-              <a:t>why this tool</a:t>
-            </a:r>
-            <a:r>
-              <a:rPr lang="en-US" sz="800" dirty="0">
-                <a:latin typeface="ui-sans-serif"/>
-              </a:rPr>
-              <a:t>: CARD is highly efficient, accurate, and specifically designed for spot-based (</a:t>
-            </a:r>
-            <a:r>
-              <a:rPr lang="en-US" sz="800" dirty="0" err="1">
-                <a:latin typeface="ui-sans-serif"/>
-              </a:rPr>
-              <a:t>Visium</a:t>
-            </a:r>
-            <a:r>
-              <a:rPr lang="en-US" sz="800" dirty="0">
-                <a:latin typeface="ui-sans-serif"/>
-              </a:rPr>
-              <a:t>) data. It is widely benchmarked, easy to use on Mac/CPU, and has been applied to human cancer datasets.</a:t>
-            </a:r>
-          </a:p>
-          <a:p>
-            <a:pPr>
-              <a:buNone/>
-            </a:pPr>
-            <a:endParaRPr lang="en-US" sz="800" dirty="0"/>
-          </a:p>
-          <a:p>
-            <a:pPr>
-              <a:spcBef>
-                <a:spcPts val="100"/>
-              </a:spcBef>
-              <a:spcAft>
-                <a:spcPts val="500"/>
-              </a:spcAft>
-            </a:pPr>
-            <a:r>
-              <a:rPr lang="en-US" sz="900" b="1" dirty="0">
-                <a:latin typeface="ui-sans-serif"/>
-              </a:rPr>
-              <a:t>🔬 Step 3: Spatial Clustering</a:t>
-            </a:r>
-          </a:p>
-          <a:p>
-            <a:pPr marL="230188" indent="-115888">
-              <a:buFont typeface="Arial" panose="020B0604020202020204" pitchFamily="34" charset="0"/>
-              <a:buChar char="•"/>
-            </a:pPr>
-            <a:r>
-              <a:rPr lang="en-US" sz="800" b="1" dirty="0">
-                <a:latin typeface="ui-sans-serif"/>
-              </a:rPr>
-              <a:t>Tool</a:t>
-            </a:r>
-            <a:r>
-              <a:rPr lang="en-US" sz="800" dirty="0">
-                <a:latin typeface="ui-sans-serif"/>
-              </a:rPr>
-              <a:t>: </a:t>
-            </a:r>
-            <a:r>
-              <a:rPr lang="en-US" sz="800" dirty="0" err="1">
-                <a:latin typeface="ui-sans-serif"/>
-              </a:rPr>
-              <a:t>BayesSpace</a:t>
-            </a:r>
-            <a:endParaRPr lang="en-US" sz="800" dirty="0">
-              <a:latin typeface="ui-sans-serif"/>
-            </a:endParaRPr>
-          </a:p>
-          <a:p>
-            <a:pPr marL="230188" indent="-115888">
-              <a:buFont typeface="Arial" panose="020B0604020202020204" pitchFamily="34" charset="0"/>
-              <a:buChar char="•"/>
-            </a:pPr>
-            <a:r>
-              <a:rPr lang="en-US" sz="800" b="1" dirty="0">
-                <a:latin typeface="ui-sans-serif"/>
-              </a:rPr>
-              <a:t>Purpose</a:t>
-            </a:r>
-            <a:r>
-              <a:rPr lang="en-US" sz="800" dirty="0">
-                <a:latin typeface="ui-sans-serif"/>
-              </a:rPr>
-              <a:t>: Spatial clustering</a:t>
-            </a:r>
-          </a:p>
-          <a:p>
-            <a:pPr marL="230188" indent="-115888">
-              <a:buFont typeface="Arial" panose="020B0604020202020204" pitchFamily="34" charset="0"/>
-              <a:buChar char="•"/>
-            </a:pPr>
-            <a:r>
-              <a:rPr lang="en-US" sz="800" b="1" dirty="0">
-                <a:latin typeface="ui-sans-serif"/>
-              </a:rPr>
-              <a:t>Language</a:t>
-            </a:r>
-            <a:r>
-              <a:rPr lang="en-US" sz="800" dirty="0">
-                <a:latin typeface="ui-sans-serif"/>
-              </a:rPr>
-              <a:t>: R</a:t>
-            </a:r>
-          </a:p>
-          <a:p>
-            <a:pPr marL="230188" indent="-115888">
-              <a:buFont typeface="Arial" panose="020B0604020202020204" pitchFamily="34" charset="0"/>
-              <a:buChar char="•"/>
-            </a:pPr>
-            <a:r>
-              <a:rPr lang="en-US" sz="800" b="1" dirty="0">
-                <a:latin typeface="ui-sans-serif"/>
-              </a:rPr>
-              <a:t>Computational Requirements</a:t>
-            </a:r>
-            <a:r>
-              <a:rPr lang="en-US" sz="800" dirty="0">
-                <a:latin typeface="ui-sans-serif"/>
-              </a:rPr>
-              <a:t>: CPU, moderate memory for a single sample</a:t>
-            </a:r>
-          </a:p>
-          <a:p>
-            <a:pPr marL="230188" indent="-115888">
-              <a:buFont typeface="Arial" panose="020B0604020202020204" pitchFamily="34" charset="0"/>
-              <a:buChar char="•"/>
-            </a:pPr>
-            <a:r>
-              <a:rPr lang="en-US" sz="800" b="1" dirty="0">
-                <a:latin typeface="ui-sans-serif"/>
-              </a:rPr>
-              <a:t>why this tool</a:t>
-            </a:r>
-            <a:r>
-              <a:rPr lang="en-US" sz="800" dirty="0">
-                <a:latin typeface="ui-sans-serif"/>
-              </a:rPr>
-              <a:t>: </a:t>
-            </a:r>
-            <a:r>
-              <a:rPr lang="en-US" sz="800" dirty="0" err="1">
-                <a:latin typeface="ui-sans-serif"/>
-              </a:rPr>
-              <a:t>BayesSpace</a:t>
-            </a:r>
-            <a:r>
-              <a:rPr lang="en-US" sz="800" dirty="0">
-                <a:latin typeface="ui-sans-serif"/>
-              </a:rPr>
-              <a:t> is the gold standard for spatial clustering in </a:t>
-            </a:r>
-            <a:r>
-              <a:rPr lang="en-US" sz="800" dirty="0" err="1">
-                <a:latin typeface="ui-sans-serif"/>
-              </a:rPr>
-              <a:t>Visium</a:t>
-            </a:r>
-            <a:r>
-              <a:rPr lang="en-US" sz="800" dirty="0">
-                <a:latin typeface="ui-sans-serif"/>
-              </a:rPr>
-              <a:t> data, integrates seamlessly with R workflows, and is efficient on Mac/CPU. It is widely used in human cancer spatial transcriptomics.</a:t>
-            </a:r>
-          </a:p>
-          <a:p>
-            <a:pPr>
-              <a:buNone/>
-            </a:pPr>
-            <a:endParaRPr lang="en-US" sz="800" dirty="0"/>
-          </a:p>
-          <a:p>
-            <a:pPr>
-              <a:spcBef>
-                <a:spcPts val="100"/>
-              </a:spcBef>
-              <a:spcAft>
-                <a:spcPts val="500"/>
-              </a:spcAft>
-            </a:pPr>
-            <a:r>
-              <a:rPr lang="en-US" sz="900" b="1" dirty="0">
-                <a:latin typeface="ui-sans-serif"/>
-              </a:rPr>
-              <a:t>📊 Computational Overview</a:t>
-            </a:r>
-          </a:p>
-          <a:p>
-            <a:pPr marL="230188" indent="-115888">
-              <a:buFont typeface="Arial" panose="020B0604020202020204" pitchFamily="34" charset="0"/>
-              <a:buChar char="•"/>
-            </a:pPr>
-            <a:r>
-              <a:rPr lang="en-US" sz="800" b="1" dirty="0">
-                <a:latin typeface="ui-sans-serif"/>
-              </a:rPr>
-              <a:t>Total RAM Required</a:t>
-            </a:r>
-            <a:r>
-              <a:rPr lang="en-US" sz="800" dirty="0">
-                <a:latin typeface="ui-sans-serif"/>
-              </a:rPr>
-              <a:t>: Low to moderate (CARD is highly efficient; </a:t>
-            </a:r>
-            <a:r>
-              <a:rPr lang="en-US" sz="800" dirty="0" err="1">
-                <a:latin typeface="ui-sans-serif"/>
-              </a:rPr>
-              <a:t>BayesSpace</a:t>
-            </a:r>
-            <a:r>
-              <a:rPr lang="en-US" sz="800" dirty="0">
-                <a:latin typeface="ui-sans-serif"/>
-              </a:rPr>
-              <a:t> is moderate for a single sample)</a:t>
-            </a:r>
-          </a:p>
-          <a:p>
-            <a:pPr marL="230188" indent="-115888">
-              <a:buFont typeface="Arial" panose="020B0604020202020204" pitchFamily="34" charset="0"/>
-              <a:buChar char="•"/>
-            </a:pPr>
-            <a:r>
-              <a:rPr lang="en-US" sz="800" b="1" dirty="0">
-                <a:latin typeface="ui-sans-serif"/>
-              </a:rPr>
-              <a:t>GPU Required</a:t>
-            </a:r>
-            <a:r>
-              <a:rPr lang="en-US" sz="800" dirty="0">
-                <a:latin typeface="ui-sans-serif"/>
-              </a:rPr>
-              <a:t>: No</a:t>
-            </a:r>
-          </a:p>
-          <a:p>
-            <a:pPr marL="230188" indent="-115888">
-              <a:buFont typeface="Arial" panose="020B0604020202020204" pitchFamily="34" charset="0"/>
-              <a:buChar char="•"/>
-            </a:pPr>
-            <a:r>
-              <a:rPr lang="en-US" sz="800" b="1" dirty="0">
-                <a:latin typeface="ui-sans-serif"/>
-              </a:rPr>
-              <a:t>Estimated Runtime</a:t>
-            </a:r>
-            <a:r>
-              <a:rPr lang="en-US" sz="800" dirty="0">
-                <a:latin typeface="ui-sans-serif"/>
-              </a:rPr>
-              <a:t>: Under 1 hour for a single </a:t>
-            </a:r>
-            <a:r>
-              <a:rPr lang="en-US" sz="800" dirty="0" err="1">
-                <a:latin typeface="ui-sans-serif"/>
-              </a:rPr>
-              <a:t>Visium</a:t>
-            </a:r>
-            <a:r>
-              <a:rPr lang="en-US" sz="800" dirty="0">
-                <a:latin typeface="ui-sans-serif"/>
-              </a:rPr>
-              <a:t> sample on a modern Mac CPU</a:t>
-            </a:r>
-          </a:p>
-          <a:p>
-            <a:pPr marL="230188" indent="-115888">
-              <a:buFont typeface="Arial" panose="020B0604020202020204" pitchFamily="34" charset="0"/>
-              <a:buChar char="•"/>
-            </a:pPr>
-            <a:endParaRPr lang="en-US" sz="800" dirty="0"/>
-          </a:p>
-          <a:p>
-            <a:pPr>
-              <a:spcBef>
-                <a:spcPts val="100"/>
-              </a:spcBef>
-              <a:spcAft>
-                <a:spcPts val="500"/>
-              </a:spcAft>
-            </a:pPr>
-            <a:r>
-              <a:rPr lang="en-US" sz="900" b="1" dirty="0">
-                <a:latin typeface="ui-sans-serif"/>
-              </a:rPr>
-              <a:t>📚 Sources</a:t>
-            </a:r>
-          </a:p>
-          <a:p>
-            <a:pPr marL="230188" indent="-115888">
-              <a:buFont typeface="Arial" panose="020B0604020202020204" pitchFamily="34" charset="0"/>
-              <a:buChar char="•"/>
-            </a:pPr>
-            <a:r>
-              <a:rPr lang="en-US" sz="800" dirty="0">
-                <a:latin typeface="ui-sans-serif"/>
-              </a:rPr>
-              <a:t>CARD: "</a:t>
-            </a:r>
-            <a:r>
-              <a:rPr lang="en-US" sz="800" dirty="0" err="1">
-                <a:latin typeface="ui-sans-serif"/>
-              </a:rPr>
-              <a:t>CARD.pdf</a:t>
-            </a:r>
-            <a:r>
-              <a:rPr lang="en-US" sz="800" dirty="0">
-                <a:latin typeface="ui-sans-serif"/>
-              </a:rPr>
-              <a:t>" (see Supplementary Table 5, 6 for efficiency and memory benchmarks)</a:t>
-            </a:r>
-          </a:p>
-          <a:p>
-            <a:pPr marL="230188" indent="-115888">
-              <a:buFont typeface="Arial" panose="020B0604020202020204" pitchFamily="34" charset="0"/>
-              <a:buChar char="•"/>
-            </a:pPr>
-            <a:r>
-              <a:rPr lang="en-US" sz="800" dirty="0" err="1">
-                <a:latin typeface="ui-sans-serif"/>
-              </a:rPr>
-              <a:t>BayesSpace</a:t>
-            </a:r>
-            <a:r>
-              <a:rPr lang="en-US" sz="800" dirty="0">
-                <a:latin typeface="ui-sans-serif"/>
-              </a:rPr>
-              <a:t>: "</a:t>
-            </a:r>
-            <a:r>
-              <a:rPr lang="en-US" sz="800" dirty="0" err="1">
-                <a:latin typeface="ui-sans-serif"/>
-              </a:rPr>
-              <a:t>BayesSpace.pdf</a:t>
-            </a:r>
-            <a:r>
-              <a:rPr lang="en-US" sz="800" dirty="0">
-                <a:latin typeface="ui-sans-serif"/>
-              </a:rPr>
-              <a:t>" (see Discussion and Methods for </a:t>
-            </a:r>
-            <a:r>
-              <a:rPr lang="en-US" sz="800" dirty="0" err="1">
-                <a:latin typeface="ui-sans-serif"/>
-              </a:rPr>
-              <a:t>Visium</a:t>
-            </a:r>
-            <a:r>
-              <a:rPr lang="en-US" sz="800" dirty="0">
-                <a:latin typeface="ui-sans-serif"/>
-              </a:rPr>
-              <a:t>/CPU compatibility)</a:t>
-            </a:r>
-          </a:p>
-          <a:p>
-            <a:pPr marL="230188" indent="-115888">
-              <a:buFont typeface="Arial" panose="020B0604020202020204" pitchFamily="34" charset="0"/>
-              <a:buChar char="•"/>
-            </a:pPr>
-            <a:r>
-              <a:rPr lang="en-US" sz="800" dirty="0">
-                <a:latin typeface="ui-sans-serif"/>
-              </a:rPr>
-              <a:t>IRIS: "</a:t>
-            </a:r>
-            <a:r>
-              <a:rPr lang="en-US" sz="800" dirty="0" err="1">
-                <a:latin typeface="ui-sans-serif"/>
-              </a:rPr>
-              <a:t>IRIS.pdf</a:t>
-            </a:r>
-            <a:r>
-              <a:rPr lang="en-US" sz="800" dirty="0">
-                <a:latin typeface="ui-sans-serif"/>
-              </a:rPr>
-              <a:t>" (alternative, but CARD/</a:t>
-            </a:r>
-            <a:r>
-              <a:rPr lang="en-US" sz="800" dirty="0" err="1">
-                <a:latin typeface="ui-sans-serif"/>
-              </a:rPr>
-              <a:t>BayesSpace</a:t>
-            </a:r>
-            <a:r>
-              <a:rPr lang="en-US" sz="800" dirty="0">
-                <a:latin typeface="ui-sans-serif"/>
-              </a:rPr>
-              <a:t> are more widely benchmarked)</a:t>
-            </a:r>
-          </a:p>
-          <a:p>
-            <a:pPr marL="230188" indent="-115888">
-              <a:buFont typeface="Arial" panose="020B0604020202020204" pitchFamily="34" charset="0"/>
-              <a:buChar char="•"/>
-            </a:pPr>
-            <a:r>
-              <a:rPr lang="en-US" sz="800" dirty="0" err="1">
-                <a:latin typeface="ui-sans-serif"/>
-              </a:rPr>
-              <a:t>SPOTlight</a:t>
-            </a:r>
-            <a:r>
-              <a:rPr lang="en-US" sz="800" dirty="0">
-                <a:latin typeface="ui-sans-serif"/>
-              </a:rPr>
-              <a:t>: "</a:t>
-            </a:r>
-            <a:r>
-              <a:rPr lang="en-US" sz="800" dirty="0" err="1">
-                <a:latin typeface="ui-sans-serif"/>
-              </a:rPr>
-              <a:t>SPOTlight.pdf</a:t>
-            </a:r>
-            <a:r>
-              <a:rPr lang="en-US" sz="800" dirty="0">
-                <a:latin typeface="ui-sans-serif"/>
-              </a:rPr>
-              <a:t>" (alternative deconvolution)</a:t>
-            </a:r>
-          </a:p>
-          <a:p>
-            <a:pPr marL="230188" indent="-115888">
-              <a:buFont typeface="Arial" panose="020B0604020202020204" pitchFamily="34" charset="0"/>
-              <a:buChar char="•"/>
-            </a:pPr>
-            <a:r>
-              <a:rPr lang="en-US" sz="800" dirty="0">
-                <a:latin typeface="ui-sans-serif"/>
-              </a:rPr>
-              <a:t>Cell2Location: "Cell2Location.pdf" (alternative deconvolution)</a:t>
-            </a:r>
-          </a:p>
-          <a:p>
-            <a:pPr marL="230188" indent="-115888">
-              <a:buFont typeface="Arial" panose="020B0604020202020204" pitchFamily="34" charset="0"/>
-              <a:buChar char="•"/>
-            </a:pPr>
-            <a:r>
-              <a:rPr lang="en-US" sz="800" dirty="0" err="1">
-                <a:latin typeface="ui-sans-serif"/>
-              </a:rPr>
-              <a:t>CellCharter</a:t>
-            </a:r>
-            <a:r>
-              <a:rPr lang="en-US" sz="800" dirty="0">
-                <a:latin typeface="ui-sans-serif"/>
-              </a:rPr>
-              <a:t>: "</a:t>
-            </a:r>
-            <a:r>
-              <a:rPr lang="en-US" sz="800" dirty="0" err="1">
-                <a:latin typeface="ui-sans-serif"/>
-              </a:rPr>
-              <a:t>CellCharter.pdf</a:t>
-            </a:r>
-            <a:r>
-              <a:rPr lang="en-US" sz="800" dirty="0">
-                <a:latin typeface="ui-sans-serif"/>
-              </a:rPr>
-              <a:t>" (alternative clustering)</a:t>
-            </a:r>
-          </a:p>
-          <a:p>
-            <a:pPr marL="230188" indent="-115888">
-              <a:buFont typeface="Arial" panose="020B0604020202020204" pitchFamily="34" charset="0"/>
-              <a:buChar char="•"/>
-            </a:pPr>
-            <a:r>
-              <a:rPr lang="en-US" sz="800" dirty="0" err="1">
-                <a:latin typeface="ui-sans-serif"/>
-              </a:rPr>
-              <a:t>GraphST</a:t>
-            </a:r>
-            <a:r>
-              <a:rPr lang="en-US" sz="800" dirty="0">
-                <a:latin typeface="ui-sans-serif"/>
-              </a:rPr>
-              <a:t>: "</a:t>
-            </a:r>
-            <a:r>
-              <a:rPr lang="en-US" sz="800" dirty="0" err="1">
-                <a:latin typeface="ui-sans-serif"/>
-              </a:rPr>
-              <a:t>GraphST.pdf</a:t>
-            </a:r>
-            <a:r>
-              <a:rPr lang="en-US" sz="800" dirty="0">
-                <a:latin typeface="ui-sans-serif"/>
-              </a:rPr>
-              <a:t>" (alternative clustering)</a:t>
-            </a:r>
-          </a:p>
-          <a:p>
-            <a:pPr>
-              <a:buNone/>
-            </a:pPr>
-            <a:br>
-              <a:rPr lang="en-US" sz="800" dirty="0"/>
-            </a:br>
-            <a:endParaRPr lang="en-US" sz="800" dirty="0"/>
-          </a:p>
-          <a:p>
-            <a:pPr>
-              <a:spcBef>
-                <a:spcPts val="100"/>
-              </a:spcBef>
-              <a:spcAft>
-                <a:spcPts val="500"/>
-              </a:spcAft>
-            </a:pPr>
-            <a:r>
-              <a:rPr lang="en-US" sz="800" b="1" dirty="0">
-                <a:latin typeface="ui-sans-serif"/>
-              </a:rPr>
-              <a:t>This pipeline is optimal for your scenario: efficient, reproducible, and widely used in the field.</a:t>
-            </a:r>
-            <a:endParaRPr lang="en-US" sz="800" dirty="0">
-              <a:latin typeface="ui-sans-serif"/>
-            </a:endParaRPr>
-          </a:p>
-        </p:txBody>
-      </p:sp>
-      <p:sp>
-        <p:nvSpPr>
-          <p:cNvPr id="12" name="TextBox 11">
-            <a:extLst>
-              <a:ext uri="{FF2B5EF4-FFF2-40B4-BE49-F238E27FC236}">
-                <a16:creationId xmlns:a16="http://schemas.microsoft.com/office/drawing/2014/main" id="{B5BE9738-100F-96C5-B6F7-5FBB0237AF9F}"/>
-              </a:ext>
-            </a:extLst>
-          </p:cNvPr>
-          <p:cNvSpPr txBox="1"/>
-          <p:nvPr/>
-        </p:nvSpPr>
-        <p:spPr>
-          <a:xfrm>
-            <a:off x="6817679" y="8015369"/>
-            <a:ext cx="2430208" cy="2026196"/>
-          </a:xfrm>
-          <a:prstGeom prst="rect">
-            <a:avLst/>
-          </a:prstGeom>
-          <a:ln w="12700"/>
-        </p:spPr>
-        <p:style>
-          <a:lnRef idx="2">
-            <a:schemeClr val="dk1"/>
-          </a:lnRef>
-          <a:fillRef idx="1">
-            <a:schemeClr val="lt1"/>
-          </a:fillRef>
-          <a:effectRef idx="0">
-            <a:schemeClr val="dk1"/>
-          </a:effectRef>
-          <a:fontRef idx="minor">
-            <a:schemeClr val="dk1"/>
-          </a:fontRef>
-        </p:style>
-        <p:txBody>
-          <a:bodyPr wrap="square" lIns="0" tIns="45720" rIns="0" bIns="45720" rtlCol="0" anchor="ctr">
-            <a:spAutoFit/>
-          </a:bodyPr>
-          <a:lstStyle/>
-          <a:p>
-            <a:pPr marL="61913" defTabSz="914400" eaLnBrk="0" fontAlgn="base" hangingPunct="0">
-              <a:spcBef>
-                <a:spcPts val="100"/>
-              </a:spcBef>
-              <a:spcAft>
-                <a:spcPts val="500"/>
-              </a:spcAft>
-            </a:pPr>
-            <a:r>
-              <a:rPr lang="en-US" altLang="en-US" sz="700" b="1" dirty="0">
-                <a:solidFill>
-                  <a:schemeClr val="tx1"/>
-                </a:solidFill>
-                <a:latin typeface="ui-sans-serif"/>
-              </a:rPr>
-              <a:t>Human Input Required</a:t>
-            </a:r>
-          </a:p>
-          <a:p>
-            <a:pPr marL="61913" defTabSz="914400" eaLnBrk="0" fontAlgn="base" hangingPunct="0">
-              <a:spcBef>
-                <a:spcPts val="100"/>
-              </a:spcBef>
-              <a:spcAft>
-                <a:spcPts val="500"/>
-              </a:spcAft>
-            </a:pPr>
-            <a:r>
-              <a:rPr lang="en-US" altLang="en-US" sz="700" b="1" dirty="0">
-                <a:solidFill>
-                  <a:schemeClr val="tx1"/>
-                </a:solidFill>
-                <a:latin typeface="ui-sans-serif"/>
-              </a:rPr>
-              <a:t>Please choose one of the following options: </a:t>
-            </a:r>
-          </a:p>
-          <a:p>
-            <a:pPr marL="61913" defTabSz="914400" eaLnBrk="0" fontAlgn="base" hangingPunct="0">
-              <a:spcBef>
-                <a:spcPts val="100"/>
-              </a:spcBef>
-              <a:spcAft>
-                <a:spcPts val="100"/>
-              </a:spcAft>
-            </a:pPr>
-            <a:r>
-              <a:rPr lang="en-US" altLang="en-US" sz="700" b="1" dirty="0">
-                <a:solidFill>
-                  <a:schemeClr val="tx1"/>
-                </a:solidFill>
-                <a:latin typeface="ui-sans-serif"/>
-              </a:rPr>
-              <a:t>1️⃣ Default Pipeline - Proceed with the suggested pipeline</a:t>
-            </a:r>
-          </a:p>
-          <a:p>
-            <a:pPr marL="61913" defTabSz="914400" eaLnBrk="0" fontAlgn="base" hangingPunct="0">
-              <a:spcBef>
-                <a:spcPts val="100"/>
-              </a:spcBef>
-              <a:spcAft>
-                <a:spcPts val="500"/>
-              </a:spcAft>
-            </a:pPr>
-            <a:r>
-              <a:rPr lang="en-US" altLang="en-US" sz="700" b="1" dirty="0">
-                <a:solidFill>
-                  <a:schemeClr val="tx1"/>
-                </a:solidFill>
-                <a:latin typeface="ui-sans-serif"/>
-              </a:rPr>
-              <a:t> </a:t>
-            </a:r>
-            <a:r>
-              <a:rPr lang="ko-KR" altLang="en-US" sz="700" b="1" dirty="0">
-                <a:solidFill>
-                  <a:schemeClr val="tx1"/>
-                </a:solidFill>
-                <a:latin typeface="ui-sans-serif"/>
-              </a:rPr>
-              <a:t>  </a:t>
-            </a:r>
-            <a:r>
-              <a:rPr lang="en-US" altLang="en-US" sz="700" b="1" dirty="0">
-                <a:solidFill>
-                  <a:schemeClr val="tx1"/>
-                </a:solidFill>
-                <a:latin typeface="ui-sans-serif"/>
-              </a:rPr>
-              <a:t>↳ Type: "1", "default" or "proceed" </a:t>
-            </a:r>
-          </a:p>
-          <a:p>
-            <a:pPr marL="61913" defTabSz="914400" eaLnBrk="0" fontAlgn="base" hangingPunct="0">
-              <a:spcBef>
-                <a:spcPts val="100"/>
-              </a:spcBef>
-              <a:spcAft>
-                <a:spcPts val="100"/>
-              </a:spcAft>
-            </a:pPr>
-            <a:r>
-              <a:rPr lang="en-US" altLang="en-US" sz="700" b="1" dirty="0">
-                <a:solidFill>
-                  <a:schemeClr val="tx1"/>
-                </a:solidFill>
-                <a:latin typeface="ui-sans-serif"/>
-              </a:rPr>
-              <a:t>2️⃣ Customize Pipeline - Modify specific components </a:t>
-            </a:r>
-          </a:p>
-          <a:p>
-            <a:pPr marL="61913" defTabSz="914400" eaLnBrk="0" fontAlgn="base" hangingPunct="0">
-              <a:spcBef>
-                <a:spcPts val="100"/>
-              </a:spcBef>
-              <a:spcAft>
-                <a:spcPts val="500"/>
-              </a:spcAft>
-            </a:pPr>
-            <a:r>
-              <a:rPr lang="ko-KR" altLang="en-US" sz="700" b="1" dirty="0">
-                <a:solidFill>
-                  <a:schemeClr val="tx1"/>
-                </a:solidFill>
-                <a:latin typeface="ui-sans-serif"/>
-              </a:rPr>
-              <a:t>  </a:t>
-            </a:r>
-            <a:r>
-              <a:rPr lang="en-US" altLang="en-US" sz="700" b="1" dirty="0">
-                <a:solidFill>
-                  <a:schemeClr val="tx1"/>
-                </a:solidFill>
-                <a:latin typeface="ui-sans-serif"/>
-              </a:rPr>
-              <a:t>↳ Type: "2", "custom" or "update" </a:t>
-            </a:r>
-          </a:p>
-          <a:p>
-            <a:pPr marL="61913" defTabSz="914400" eaLnBrk="0" fontAlgn="base" hangingPunct="0">
-              <a:spcBef>
-                <a:spcPts val="100"/>
-              </a:spcBef>
-              <a:spcAft>
-                <a:spcPts val="100"/>
-              </a:spcAft>
-            </a:pPr>
-            <a:r>
-              <a:rPr lang="en-US" altLang="en-US" sz="700" b="1" dirty="0">
-                <a:solidFill>
-                  <a:schemeClr val="tx1"/>
-                </a:solidFill>
-                <a:latin typeface="ui-sans-serif"/>
-              </a:rPr>
-              <a:t>3️⃣ Reference-based Pipeline - Use </a:t>
-            </a:r>
-            <a:r>
-              <a:rPr lang="en-US" altLang="en-US" sz="700" b="1" dirty="0" err="1">
-                <a:solidFill>
-                  <a:schemeClr val="tx1"/>
-                </a:solidFill>
-                <a:latin typeface="ui-sans-serif"/>
-              </a:rPr>
-              <a:t>DeepMAST</a:t>
-            </a:r>
-            <a:r>
-              <a:rPr lang="en-US" altLang="en-US" sz="700" b="1" dirty="0">
-                <a:solidFill>
-                  <a:schemeClr val="tx1"/>
-                </a:solidFill>
-                <a:latin typeface="ui-sans-serif"/>
-              </a:rPr>
-              <a:t>-RAG to find  </a:t>
-            </a:r>
-          </a:p>
-          <a:p>
-            <a:pPr marL="61913" defTabSz="914400" eaLnBrk="0" fontAlgn="base" hangingPunct="0">
-              <a:spcBef>
-                <a:spcPts val="100"/>
-              </a:spcBef>
-              <a:spcAft>
-                <a:spcPts val="100"/>
-              </a:spcAft>
-            </a:pPr>
-            <a:r>
-              <a:rPr lang="en-US" altLang="en-US" sz="700" b="1" dirty="0">
-                <a:solidFill>
-                  <a:schemeClr val="tx1"/>
-                </a:solidFill>
-                <a:latin typeface="ui-sans-serif"/>
-              </a:rPr>
-              <a:t>      methods from literature </a:t>
-            </a:r>
-          </a:p>
-          <a:p>
-            <a:pPr marL="61913" defTabSz="914400" eaLnBrk="0" fontAlgn="base" hangingPunct="0">
-              <a:spcBef>
-                <a:spcPts val="100"/>
-              </a:spcBef>
-              <a:spcAft>
-                <a:spcPts val="500"/>
-              </a:spcAft>
-            </a:pPr>
-            <a:r>
-              <a:rPr lang="ko-KR" altLang="en-US" sz="700" b="1" dirty="0">
-                <a:solidFill>
-                  <a:schemeClr val="tx1"/>
-                </a:solidFill>
-                <a:latin typeface="ui-sans-serif"/>
-              </a:rPr>
-              <a:t>  </a:t>
-            </a:r>
-            <a:r>
-              <a:rPr lang="en-US" altLang="en-US" sz="700" b="1" dirty="0">
-                <a:solidFill>
-                  <a:schemeClr val="tx1"/>
-                </a:solidFill>
-                <a:latin typeface="ui-sans-serif"/>
-              </a:rPr>
-              <a:t>↳ Type: "3", "reference" or "select" </a:t>
-            </a:r>
-          </a:p>
-          <a:p>
-            <a:pPr marL="61913" defTabSz="914400" eaLnBrk="0" fontAlgn="base" hangingPunct="0">
-              <a:spcBef>
-                <a:spcPts val="100"/>
-              </a:spcBef>
-              <a:spcAft>
-                <a:spcPts val="500"/>
-              </a:spcAft>
-            </a:pPr>
-            <a:r>
-              <a:rPr lang="en-US" altLang="en-US" sz="700" b="1" dirty="0">
-                <a:solidFill>
-                  <a:schemeClr val="tx1"/>
-                </a:solidFill>
-                <a:latin typeface="ui-sans-serif"/>
-              </a:rPr>
-              <a:t>What would you like to do?</a:t>
-            </a:r>
-          </a:p>
-          <a:p>
-            <a:pPr marL="61913" defTabSz="914400" eaLnBrk="0" fontAlgn="base" hangingPunct="0">
-              <a:spcBef>
-                <a:spcPts val="100"/>
-              </a:spcBef>
-              <a:spcAft>
-                <a:spcPts val="500"/>
-              </a:spcAft>
-            </a:pPr>
-            <a:r>
-              <a:rPr lang="en-US" altLang="en-US" sz="700" b="1" dirty="0">
-                <a:solidFill>
-                  <a:schemeClr val="tx1"/>
-                </a:solidFill>
-                <a:latin typeface="ui-sans-serif"/>
-              </a:rPr>
-              <a:t>Please provide your response:</a:t>
-            </a:r>
-          </a:p>
-          <a:p>
-            <a:pPr marL="61913" defTabSz="914400" eaLnBrk="0" fontAlgn="base" hangingPunct="0">
-              <a:spcBef>
-                <a:spcPts val="100"/>
-              </a:spcBef>
-              <a:spcAft>
-                <a:spcPts val="500"/>
-              </a:spcAft>
-            </a:pPr>
-            <a:r>
-              <a:rPr lang="en-US" altLang="en-US" sz="700" b="1" dirty="0">
-                <a:solidFill>
-                  <a:schemeClr val="bg1">
-                    <a:lumMod val="85000"/>
-                  </a:schemeClr>
-                </a:solidFill>
-                <a:latin typeface="ui-sans-serif"/>
-              </a:rPr>
-              <a:t>   Enter your response…</a:t>
-            </a:r>
-          </a:p>
-        </p:txBody>
-      </p:sp>
-      <p:sp>
-        <p:nvSpPr>
-          <p:cNvPr id="18" name="Oval Callout 17">
-            <a:extLst>
-              <a:ext uri="{FF2B5EF4-FFF2-40B4-BE49-F238E27FC236}">
-                <a16:creationId xmlns:a16="http://schemas.microsoft.com/office/drawing/2014/main" id="{199E7EC7-B16C-BDBB-E31D-B258C4124060}"/>
-              </a:ext>
-            </a:extLst>
-          </p:cNvPr>
-          <p:cNvSpPr/>
-          <p:nvPr/>
-        </p:nvSpPr>
-        <p:spPr>
-          <a:xfrm>
-            <a:off x="7144463" y="5442858"/>
-            <a:ext cx="2122366" cy="668004"/>
-          </a:xfrm>
-          <a:prstGeom prst="wedgeEllipseCallout">
-            <a:avLst>
-              <a:gd name="adj1" fmla="val -59197"/>
-              <a:gd name="adj2" fmla="val 5638"/>
-            </a:avLst>
-          </a:prstGeom>
-          <a:ln w="12700"/>
-        </p:spPr>
-        <p:style>
-          <a:lnRef idx="2">
-            <a:schemeClr val="dk1"/>
-          </a:lnRef>
-          <a:fillRef idx="1">
-            <a:schemeClr val="lt1"/>
-          </a:fillRef>
-          <a:effectRef idx="0">
-            <a:schemeClr val="dk1"/>
-          </a:effectRef>
-          <a:fontRef idx="minor">
-            <a:schemeClr val="dk1"/>
-          </a:fontRef>
-        </p:style>
-        <p:txBody>
-          <a:bodyPr lIns="45720" tIns="0" rIns="45720" bIns="0" rtlCol="0" anchor="ctr"/>
-          <a:lstStyle/>
-          <a:p>
-            <a:pPr defTabSz="914400" eaLnBrk="0" fontAlgn="base" hangingPunct="0">
-              <a:spcBef>
-                <a:spcPct val="0"/>
-              </a:spcBef>
-              <a:spcAft>
-                <a:spcPct val="0"/>
-              </a:spcAft>
-            </a:pPr>
-            <a:r>
-              <a:rPr lang="en-US" altLang="en-US" sz="800" b="1" dirty="0">
-                <a:solidFill>
-                  <a:schemeClr val="tx1"/>
-                </a:solidFill>
-                <a:latin typeface="ui-sans-serif"/>
-              </a:rPr>
-              <a:t>I need a pipeline for analyzing one breast cancer </a:t>
-            </a:r>
-            <a:r>
-              <a:rPr lang="en-US" altLang="en-US" sz="800" b="1" dirty="0" err="1">
-                <a:solidFill>
-                  <a:schemeClr val="tx1"/>
-                </a:solidFill>
-                <a:latin typeface="ui-sans-serif"/>
-              </a:rPr>
-              <a:t>Visium</a:t>
-            </a:r>
-            <a:r>
-              <a:rPr lang="en-US" altLang="en-US" sz="800" b="1" dirty="0">
-                <a:solidFill>
-                  <a:schemeClr val="tx1"/>
-                </a:solidFill>
-                <a:latin typeface="ui-sans-serif"/>
-              </a:rPr>
-              <a:t> sample on a Mac (CPU only), with spatial clustering or cell type analysis.</a:t>
-            </a:r>
-          </a:p>
-        </p:txBody>
-      </p:sp>
-      <p:sp>
-        <p:nvSpPr>
-          <p:cNvPr id="24" name="TextBox 23">
-            <a:extLst>
-              <a:ext uri="{FF2B5EF4-FFF2-40B4-BE49-F238E27FC236}">
-                <a16:creationId xmlns:a16="http://schemas.microsoft.com/office/drawing/2014/main" id="{E39211CA-E2AC-CBE3-16BF-1E6501F75F35}"/>
-              </a:ext>
-            </a:extLst>
-          </p:cNvPr>
-          <p:cNvSpPr txBox="1"/>
-          <p:nvPr/>
-        </p:nvSpPr>
-        <p:spPr>
-          <a:xfrm>
-            <a:off x="6828635" y="6193585"/>
-            <a:ext cx="2408296" cy="1717393"/>
-          </a:xfrm>
-          <a:prstGeom prst="rect">
-            <a:avLst/>
-          </a:prstGeom>
-          <a:ln w="12700"/>
-        </p:spPr>
-        <p:style>
-          <a:lnRef idx="2">
-            <a:schemeClr val="dk1"/>
-          </a:lnRef>
-          <a:fillRef idx="1">
-            <a:schemeClr val="lt1"/>
-          </a:fillRef>
-          <a:effectRef idx="0">
-            <a:schemeClr val="dk1"/>
-          </a:effectRef>
-          <a:fontRef idx="minor">
-            <a:schemeClr val="dk1"/>
-          </a:fontRef>
-        </p:style>
-        <p:txBody>
-          <a:bodyPr wrap="square" lIns="0" tIns="45720" rIns="0" bIns="45720" rtlCol="0" anchor="ctr">
-            <a:spAutoFit/>
-          </a:bodyPr>
-          <a:lstStyle/>
-          <a:p>
-            <a:pPr marL="61913"/>
-            <a:r>
-              <a:rPr lang="en-US" sz="700" b="1" dirty="0">
-                <a:solidFill>
-                  <a:schemeClr val="tx1"/>
-                </a:solidFill>
-                <a:latin typeface="ui-sans-serif"/>
-              </a:rPr>
-              <a:t>✅ Information Collection Complete!</a:t>
-            </a:r>
-          </a:p>
-          <a:p>
-            <a:pPr marL="61913"/>
-            <a:r>
-              <a:rPr lang="en-US" sz="700" b="1" dirty="0">
-                <a:solidFill>
-                  <a:schemeClr val="tx1"/>
-                </a:solidFill>
-                <a:latin typeface="ui-sans-serif"/>
-              </a:rPr>
-              <a:t>Based on your inputs:</a:t>
-            </a:r>
-          </a:p>
-          <a:p>
-            <a:pPr marL="233363" indent="-114300">
-              <a:buFont typeface="Arial" panose="020B0604020202020204" pitchFamily="34" charset="0"/>
-              <a:buChar char="•"/>
-            </a:pPr>
-            <a:r>
-              <a:rPr lang="en-US" sz="700" b="1" dirty="0">
-                <a:solidFill>
-                  <a:schemeClr val="tx1"/>
-                </a:solidFill>
-                <a:latin typeface="ui-sans-serif"/>
-              </a:rPr>
-              <a:t>ST Technology: </a:t>
-            </a:r>
-            <a:r>
-              <a:rPr lang="en-US" sz="700" b="1" dirty="0" err="1">
-                <a:solidFill>
-                  <a:schemeClr val="tx1"/>
-                </a:solidFill>
-                <a:latin typeface="ui-sans-serif"/>
-              </a:rPr>
-              <a:t>Visium</a:t>
-            </a:r>
-            <a:r>
-              <a:rPr lang="en-US" sz="700" b="1" dirty="0">
-                <a:solidFill>
-                  <a:schemeClr val="tx1"/>
-                </a:solidFill>
-                <a:latin typeface="ui-sans-serif"/>
-              </a:rPr>
-              <a:t> (spot-based)</a:t>
-            </a:r>
-          </a:p>
-          <a:p>
-            <a:pPr marL="233363" indent="-114300">
-              <a:buFont typeface="Arial" panose="020B0604020202020204" pitchFamily="34" charset="0"/>
-              <a:buChar char="•"/>
-            </a:pPr>
-            <a:r>
-              <a:rPr lang="en-US" sz="700" b="1" dirty="0">
-                <a:solidFill>
-                  <a:schemeClr val="tx1"/>
-                </a:solidFill>
-                <a:latin typeface="ui-sans-serif"/>
-              </a:rPr>
-              <a:t>Disease: breast cancer</a:t>
-            </a:r>
-          </a:p>
-          <a:p>
-            <a:pPr marL="233363" indent="-114300">
-              <a:buFont typeface="Arial" panose="020B0604020202020204" pitchFamily="34" charset="0"/>
-              <a:buChar char="•"/>
-            </a:pPr>
-            <a:r>
-              <a:rPr lang="en-US" sz="700" b="1" dirty="0">
-                <a:solidFill>
-                  <a:schemeClr val="tx1"/>
-                </a:solidFill>
-                <a:latin typeface="ui-sans-serif"/>
-              </a:rPr>
-              <a:t>Species: human</a:t>
-            </a:r>
-          </a:p>
-          <a:p>
-            <a:pPr marL="233363" indent="-114300">
-              <a:buFont typeface="Arial" panose="020B0604020202020204" pitchFamily="34" charset="0"/>
-              <a:buChar char="•"/>
-            </a:pPr>
-            <a:r>
-              <a:rPr lang="en-US" sz="700" b="1" dirty="0">
-                <a:solidFill>
-                  <a:schemeClr val="tx1"/>
-                </a:solidFill>
-                <a:latin typeface="ui-sans-serif"/>
-              </a:rPr>
-              <a:t>Sample Count: 1</a:t>
-            </a:r>
-          </a:p>
-          <a:p>
-            <a:pPr marL="233363" indent="-114300">
-              <a:buFont typeface="Arial" panose="020B0604020202020204" pitchFamily="34" charset="0"/>
-              <a:buChar char="•"/>
-            </a:pPr>
-            <a:r>
-              <a:rPr lang="en-US" sz="700" b="1" dirty="0">
-                <a:solidFill>
-                  <a:schemeClr val="tx1"/>
-                </a:solidFill>
-                <a:latin typeface="ui-sans-serif"/>
-              </a:rPr>
-              <a:t>OS: Mac</a:t>
-            </a:r>
-          </a:p>
-          <a:p>
-            <a:pPr marL="233363" indent="-114300">
-              <a:buFont typeface="Arial" panose="020B0604020202020204" pitchFamily="34" charset="0"/>
-              <a:buChar char="•"/>
-            </a:pPr>
-            <a:r>
-              <a:rPr lang="en-US" sz="700" b="1" dirty="0">
-                <a:solidFill>
-                  <a:schemeClr val="tx1"/>
-                </a:solidFill>
-                <a:latin typeface="ui-sans-serif"/>
-              </a:rPr>
-              <a:t>Computing: CPU</a:t>
-            </a:r>
-          </a:p>
-          <a:p>
-            <a:pPr marL="233363" indent="-114300">
-              <a:buFont typeface="Arial" panose="020B0604020202020204" pitchFamily="34" charset="0"/>
-              <a:buChar char="•"/>
-            </a:pPr>
-            <a:endParaRPr lang="en-US" sz="700" b="1" dirty="0">
-              <a:solidFill>
-                <a:schemeClr val="tx1"/>
-              </a:solidFill>
-              <a:latin typeface="ui-sans-serif"/>
-            </a:endParaRPr>
-          </a:p>
-          <a:p>
-            <a:pPr marL="61913"/>
-            <a:r>
-              <a:rPr lang="en-US" sz="700" b="1" dirty="0">
-                <a:solidFill>
-                  <a:schemeClr val="tx1"/>
-                </a:solidFill>
-                <a:latin typeface="ui-sans-serif"/>
-              </a:rPr>
-              <a:t>I've generated the following default analysis pipeline:</a:t>
-            </a:r>
-          </a:p>
-          <a:p>
-            <a:pPr marL="61913"/>
-            <a:endParaRPr lang="en-US" sz="700" b="1" dirty="0">
-              <a:solidFill>
-                <a:schemeClr val="tx1"/>
-              </a:solidFill>
-              <a:latin typeface="ui-sans-serif"/>
-            </a:endParaRPr>
-          </a:p>
-          <a:p>
-            <a:pPr marL="61913"/>
-            <a:r>
-              <a:rPr lang="en-US" sz="700" b="1" dirty="0">
-                <a:solidFill>
-                  <a:schemeClr val="tx1"/>
-                </a:solidFill>
-                <a:latin typeface="ui-sans-serif"/>
-              </a:rPr>
-              <a:t>📊 Pipeline Configuration:</a:t>
-            </a:r>
-          </a:p>
-          <a:p>
-            <a:pPr marL="233363" indent="-114300">
-              <a:buFont typeface="Arial" panose="020B0604020202020204" pitchFamily="34" charset="0"/>
-              <a:buChar char="•"/>
-            </a:pPr>
-            <a:r>
-              <a:rPr lang="en-US" sz="700" b="1" dirty="0">
-                <a:solidFill>
-                  <a:schemeClr val="tx1"/>
-                </a:solidFill>
-                <a:latin typeface="ui-sans-serif"/>
-              </a:rPr>
-              <a:t>Normalization: log</a:t>
-            </a:r>
-          </a:p>
-          <a:p>
-            <a:pPr marL="233363" indent="-114300">
-              <a:buFont typeface="Arial" panose="020B0604020202020204" pitchFamily="34" charset="0"/>
-              <a:buChar char="•"/>
-            </a:pPr>
-            <a:r>
-              <a:rPr lang="en-US" sz="700" b="1" dirty="0">
-                <a:solidFill>
-                  <a:schemeClr val="tx1"/>
-                </a:solidFill>
-                <a:latin typeface="ui-sans-serif"/>
-              </a:rPr>
-              <a:t>Cell Type Analysis: IRIS (deconvolution)</a:t>
-            </a:r>
-          </a:p>
-          <a:p>
-            <a:pPr marL="233363" indent="-114300">
-              <a:buFont typeface="Arial" panose="020B0604020202020204" pitchFamily="34" charset="0"/>
-              <a:buChar char="•"/>
-            </a:pPr>
-            <a:r>
-              <a:rPr lang="en-US" sz="700" b="1" dirty="0">
-                <a:solidFill>
-                  <a:schemeClr val="tx1"/>
-                </a:solidFill>
-                <a:latin typeface="ui-sans-serif"/>
-              </a:rPr>
-              <a:t>Spatial Clustering: IRIS</a:t>
-            </a:r>
-          </a:p>
-        </p:txBody>
-      </p:sp>
-      <p:sp>
-        <p:nvSpPr>
-          <p:cNvPr id="25" name="TextBox 24">
-            <a:extLst>
-              <a:ext uri="{FF2B5EF4-FFF2-40B4-BE49-F238E27FC236}">
-                <a16:creationId xmlns:a16="http://schemas.microsoft.com/office/drawing/2014/main" id="{022BD922-CA22-C988-861D-98A09C483E22}"/>
-              </a:ext>
-            </a:extLst>
-          </p:cNvPr>
-          <p:cNvSpPr txBox="1"/>
-          <p:nvPr/>
-        </p:nvSpPr>
-        <p:spPr>
-          <a:xfrm>
-            <a:off x="6826062" y="10667603"/>
-            <a:ext cx="2413445" cy="479618"/>
-          </a:xfrm>
-          <a:prstGeom prst="rect">
-            <a:avLst/>
-          </a:prstGeom>
-          <a:ln w="12700"/>
-        </p:spPr>
-        <p:style>
-          <a:lnRef idx="2">
-            <a:schemeClr val="dk1"/>
-          </a:lnRef>
-          <a:fillRef idx="1">
-            <a:schemeClr val="lt1"/>
-          </a:fillRef>
-          <a:effectRef idx="0">
-            <a:schemeClr val="dk1"/>
-          </a:effectRef>
-          <a:fontRef idx="minor">
-            <a:schemeClr val="dk1"/>
-          </a:fontRef>
-        </p:style>
-        <p:txBody>
-          <a:bodyPr wrap="square" lIns="0" tIns="45720" rIns="0" bIns="45720" rtlCol="0" anchor="ctr">
-            <a:spAutoFit/>
-          </a:bodyPr>
-          <a:lstStyle/>
-          <a:p>
-            <a:pPr marL="57150">
-              <a:spcAft>
-                <a:spcPts val="500"/>
-              </a:spcAft>
-            </a:pPr>
-            <a:r>
-              <a:rPr lang="en-US" sz="700" b="1" dirty="0">
-                <a:solidFill>
-                  <a:schemeClr val="tx1"/>
-                </a:solidFill>
-                <a:latin typeface="ui-sans-serif"/>
-              </a:rPr>
-              <a:t>Generate Query</a:t>
-            </a:r>
-          </a:p>
-          <a:p>
-            <a:pPr marL="114300"/>
-            <a:r>
-              <a:rPr lang="en-US" sz="700" b="1" dirty="0">
-                <a:solidFill>
-                  <a:schemeClr val="tx1"/>
-                </a:solidFill>
-                <a:latin typeface="ui-sans-serif"/>
-              </a:rPr>
-              <a:t>What are the best deconvolution tools for </a:t>
-            </a:r>
-            <a:r>
-              <a:rPr lang="en-US" sz="700" b="1" dirty="0" err="1">
-                <a:solidFill>
-                  <a:schemeClr val="tx1"/>
-                </a:solidFill>
-                <a:latin typeface="ui-sans-serif"/>
-              </a:rPr>
-              <a:t>Visium</a:t>
-            </a:r>
-            <a:r>
-              <a:rPr lang="en-US" sz="700" b="1" dirty="0">
-                <a:solidFill>
-                  <a:schemeClr val="tx1"/>
-                </a:solidFill>
-                <a:latin typeface="ui-sans-serif"/>
-              </a:rPr>
-              <a:t> spot-based spatial transcriptomics data analysis?</a:t>
-            </a:r>
-          </a:p>
-        </p:txBody>
-      </p:sp>
-      <p:sp>
-        <p:nvSpPr>
-          <p:cNvPr id="27" name="TextBox 26">
-            <a:extLst>
-              <a:ext uri="{FF2B5EF4-FFF2-40B4-BE49-F238E27FC236}">
-                <a16:creationId xmlns:a16="http://schemas.microsoft.com/office/drawing/2014/main" id="{A19DA3B3-3946-63A7-506C-47989F26E65B}"/>
-              </a:ext>
-            </a:extLst>
-          </p:cNvPr>
-          <p:cNvSpPr txBox="1"/>
-          <p:nvPr/>
-        </p:nvSpPr>
-        <p:spPr>
-          <a:xfrm>
-            <a:off x="6826062" y="11192361"/>
-            <a:ext cx="2413445" cy="1256754"/>
-          </a:xfrm>
-          <a:prstGeom prst="rect">
-            <a:avLst/>
-          </a:prstGeom>
-          <a:ln w="12700"/>
-        </p:spPr>
-        <p:style>
-          <a:lnRef idx="2">
-            <a:schemeClr val="dk1"/>
-          </a:lnRef>
-          <a:fillRef idx="1">
-            <a:schemeClr val="lt1"/>
-          </a:fillRef>
-          <a:effectRef idx="0">
-            <a:schemeClr val="dk1"/>
-          </a:effectRef>
-          <a:fontRef idx="minor">
-            <a:schemeClr val="dk1"/>
-          </a:fontRef>
-        </p:style>
-        <p:txBody>
-          <a:bodyPr wrap="square" lIns="0" tIns="45720" rIns="0" bIns="45720" rtlCol="0" anchor="ctr">
-            <a:spAutoFit/>
-          </a:bodyPr>
-          <a:lstStyle/>
-          <a:p>
-            <a:pPr marL="57150">
-              <a:spcAft>
-                <a:spcPts val="500"/>
-              </a:spcAft>
-            </a:pPr>
-            <a:r>
-              <a:rPr lang="en-US" altLang="ko-KR" sz="650" b="1" dirty="0">
-                <a:solidFill>
-                  <a:schemeClr val="tx1"/>
-                </a:solidFill>
-                <a:latin typeface="ui-sans-serif"/>
-              </a:rPr>
-              <a:t>Generate Multiple Queries</a:t>
-            </a:r>
-            <a:endParaRPr lang="en-US" sz="650" b="1" dirty="0">
-              <a:solidFill>
-                <a:schemeClr val="tx1"/>
-              </a:solidFill>
-              <a:latin typeface="ui-sans-serif"/>
-            </a:endParaRPr>
-          </a:p>
-          <a:p>
-            <a:pPr marL="228600" indent="-114300">
-              <a:buFont typeface="+mj-lt"/>
-              <a:buAutoNum type="arabicPeriod"/>
-            </a:pPr>
-            <a:r>
-              <a:rPr lang="en-US" sz="650" b="1" dirty="0">
-                <a:solidFill>
-                  <a:schemeClr val="tx1"/>
-                </a:solidFill>
-                <a:latin typeface="ui-sans-serif"/>
-              </a:rPr>
-              <a:t>Which deconvolution methods are most effective for analyzing </a:t>
-            </a:r>
-            <a:r>
-              <a:rPr lang="en-US" sz="650" b="1" dirty="0" err="1">
-                <a:solidFill>
-                  <a:schemeClr val="tx1"/>
-                </a:solidFill>
-                <a:latin typeface="ui-sans-serif"/>
-              </a:rPr>
-              <a:t>Visium</a:t>
-            </a:r>
-            <a:r>
-              <a:rPr lang="en-US" sz="650" b="1" dirty="0">
-                <a:solidFill>
-                  <a:schemeClr val="tx1"/>
-                </a:solidFill>
-                <a:latin typeface="ui-sans-serif"/>
-              </a:rPr>
-              <a:t> spot-based spatial transcriptomics data?</a:t>
-            </a:r>
-          </a:p>
-          <a:p>
-            <a:pPr marL="228600" indent="-114300">
-              <a:buFont typeface="+mj-lt"/>
-              <a:buAutoNum type="arabicPeriod"/>
-            </a:pPr>
-            <a:r>
-              <a:rPr lang="en-US" sz="650" b="1" dirty="0">
-                <a:solidFill>
-                  <a:schemeClr val="tx1"/>
-                </a:solidFill>
-                <a:latin typeface="ui-sans-serif"/>
-              </a:rPr>
-              <a:t>Can you recommend top deconvolution tools suitable for                          </a:t>
-            </a:r>
-            <a:r>
-              <a:rPr lang="en-US" sz="650" b="1" dirty="0" err="1">
-                <a:solidFill>
-                  <a:schemeClr val="tx1"/>
-                </a:solidFill>
-                <a:latin typeface="ui-sans-serif"/>
-              </a:rPr>
-              <a:t>Visium</a:t>
-            </a:r>
-            <a:r>
-              <a:rPr lang="en-US" sz="650" b="1" dirty="0">
-                <a:solidFill>
-                  <a:schemeClr val="tx1"/>
-                </a:solidFill>
-                <a:latin typeface="ui-sans-serif"/>
-              </a:rPr>
-              <a:t> spatial transcriptomics spot data?</a:t>
-            </a:r>
-          </a:p>
-          <a:p>
-            <a:pPr marL="228600" indent="-114300">
-              <a:buFont typeface="+mj-lt"/>
-              <a:buAutoNum type="arabicPeriod"/>
-            </a:pPr>
-            <a:r>
-              <a:rPr lang="en-US" sz="650" b="1" dirty="0">
-                <a:solidFill>
-                  <a:schemeClr val="tx1"/>
-                </a:solidFill>
-                <a:latin typeface="ui-sans-serif"/>
-              </a:rPr>
-              <a:t>What are the leading software options for deconvolution in                      </a:t>
-            </a:r>
-            <a:r>
-              <a:rPr lang="en-US" sz="650" b="1" dirty="0" err="1">
-                <a:solidFill>
-                  <a:schemeClr val="tx1"/>
-                </a:solidFill>
-                <a:latin typeface="ui-sans-serif"/>
-              </a:rPr>
-              <a:t>Visium</a:t>
-            </a:r>
-            <a:r>
-              <a:rPr lang="en-US" sz="650" b="1" dirty="0">
-                <a:solidFill>
-                  <a:schemeClr val="tx1"/>
-                </a:solidFill>
-                <a:latin typeface="ui-sans-serif"/>
-              </a:rPr>
-              <a:t> spot-based spatial transcriptomics?</a:t>
-            </a:r>
-          </a:p>
-          <a:p>
-            <a:pPr marL="228600" indent="-114300">
-              <a:buFont typeface="+mj-lt"/>
-              <a:buAutoNum type="arabicPeriod"/>
-            </a:pPr>
-            <a:r>
-              <a:rPr lang="en-US" sz="650" b="1" dirty="0">
-                <a:solidFill>
-                  <a:schemeClr val="tx1"/>
-                </a:solidFill>
-                <a:latin typeface="ui-sans-serif"/>
-              </a:rPr>
-              <a:t>Which algorithms perform best for deconvolution of                                  </a:t>
-            </a:r>
-            <a:r>
-              <a:rPr lang="en-US" sz="650" b="1" dirty="0" err="1">
-                <a:solidFill>
-                  <a:schemeClr val="tx1"/>
-                </a:solidFill>
-                <a:latin typeface="ui-sans-serif"/>
-              </a:rPr>
-              <a:t>Visium</a:t>
-            </a:r>
-            <a:r>
-              <a:rPr lang="en-US" sz="650" b="1" dirty="0">
-                <a:solidFill>
-                  <a:schemeClr val="tx1"/>
-                </a:solidFill>
-                <a:latin typeface="ui-sans-serif"/>
-              </a:rPr>
-              <a:t> spatial transcriptomics spot data?</a:t>
-            </a:r>
-          </a:p>
-          <a:p>
-            <a:pPr marL="228600" indent="-114300">
-              <a:buFont typeface="+mj-lt"/>
-              <a:buAutoNum type="arabicPeriod"/>
-            </a:pPr>
-            <a:r>
-              <a:rPr lang="en-US" sz="650" b="1" dirty="0">
-                <a:solidFill>
-                  <a:schemeClr val="tx1"/>
-                </a:solidFill>
-                <a:latin typeface="ui-sans-serif"/>
-              </a:rPr>
-              <a:t>What tools are commonly used for deconvolution in the analysis of </a:t>
-            </a:r>
-            <a:r>
-              <a:rPr lang="en-US" sz="650" b="1" dirty="0" err="1">
-                <a:solidFill>
-                  <a:schemeClr val="tx1"/>
-                </a:solidFill>
-                <a:latin typeface="ui-sans-serif"/>
-              </a:rPr>
-              <a:t>Visium</a:t>
-            </a:r>
-            <a:r>
-              <a:rPr lang="en-US" sz="650" b="1" dirty="0">
-                <a:solidFill>
-                  <a:schemeClr val="tx1"/>
-                </a:solidFill>
-                <a:latin typeface="ui-sans-serif"/>
-              </a:rPr>
-              <a:t> spot-based spatial transcriptomics datasets?</a:t>
-            </a:r>
-          </a:p>
-        </p:txBody>
-      </p:sp>
-      <p:sp>
-        <p:nvSpPr>
-          <p:cNvPr id="3" name="Oval Callout 2">
-            <a:extLst>
-              <a:ext uri="{FF2B5EF4-FFF2-40B4-BE49-F238E27FC236}">
-                <a16:creationId xmlns:a16="http://schemas.microsoft.com/office/drawing/2014/main" id="{7C06BC2D-75FB-AB3E-E137-D5F51AC580F8}"/>
-              </a:ext>
-            </a:extLst>
-          </p:cNvPr>
-          <p:cNvSpPr/>
-          <p:nvPr/>
-        </p:nvSpPr>
-        <p:spPr>
-          <a:xfrm>
-            <a:off x="7144463" y="10183369"/>
-            <a:ext cx="1246445" cy="307777"/>
-          </a:xfrm>
-          <a:prstGeom prst="wedgeEllipseCallout">
-            <a:avLst>
-              <a:gd name="adj1" fmla="val -57054"/>
-              <a:gd name="adj2" fmla="val 27550"/>
-            </a:avLst>
-          </a:prstGeom>
-          <a:ln w="12700"/>
-        </p:spPr>
-        <p:style>
-          <a:lnRef idx="2">
-            <a:schemeClr val="dk1"/>
-          </a:lnRef>
-          <a:fillRef idx="1">
-            <a:schemeClr val="lt1"/>
-          </a:fillRef>
-          <a:effectRef idx="0">
-            <a:schemeClr val="dk1"/>
-          </a:effectRef>
-          <a:fontRef idx="minor">
-            <a:schemeClr val="dk1"/>
-          </a:fontRef>
-        </p:style>
-        <p:txBody>
-          <a:bodyPr rtlCol="0" anchor="ctr"/>
-          <a:lstStyle/>
-          <a:p>
-            <a:pPr defTabSz="914400" eaLnBrk="0" fontAlgn="base" hangingPunct="0">
-              <a:spcBef>
-                <a:spcPct val="0"/>
-              </a:spcBef>
-              <a:spcAft>
-                <a:spcPct val="0"/>
-              </a:spcAft>
-            </a:pPr>
-            <a:r>
-              <a:rPr lang="en-US" altLang="en-US" sz="800" b="1" dirty="0">
-                <a:solidFill>
-                  <a:schemeClr val="tx1"/>
-                </a:solidFill>
-                <a:latin typeface="ui-sans-serif"/>
-              </a:rPr>
-              <a:t>3.reference</a:t>
-            </a:r>
-          </a:p>
-        </p:txBody>
-      </p:sp>
-      <p:pic>
-        <p:nvPicPr>
-          <p:cNvPr id="10" name="Graphic 9" descr="User outline">
-            <a:extLst>
-              <a:ext uri="{FF2B5EF4-FFF2-40B4-BE49-F238E27FC236}">
-                <a16:creationId xmlns:a16="http://schemas.microsoft.com/office/drawing/2014/main" id="{60BC700C-15BF-ADC6-3E52-FEEC15B84B23}"/>
-              </a:ext>
-            </a:extLst>
-          </p:cNvPr>
-          <p:cNvPicPr>
-            <a:picLocks noChangeAspect="1"/>
-          </p:cNvPicPr>
-          <p:nvPr/>
-        </p:nvPicPr>
-        <p:blipFill>
-          <a:blip>
-            <a:extLst>
-              <a:ext uri="{96DAC541-7B7A-43D3-8B79-37D633B846F1}">
-                <asvg:svgBlip xmlns:asvg="http://schemas.microsoft.com/office/drawing/2016/SVG/main" r:embed="rId3"/>
-              </a:ext>
-            </a:extLst>
-          </a:blip>
-          <a:stretch>
-            <a:fillRect/>
-          </a:stretch>
-        </p:blipFill>
-        <p:spPr>
-          <a:xfrm>
-            <a:off x="6510827" y="5574206"/>
-            <a:ext cx="536657" cy="536657"/>
-          </a:xfrm>
-          <a:prstGeom prst="rect">
-            <a:avLst/>
-          </a:prstGeom>
-        </p:spPr>
-      </p:pic>
-      <p:pic>
-        <p:nvPicPr>
-          <p:cNvPr id="13" name="Graphic 12" descr="User outline">
-            <a:extLst>
-              <a:ext uri="{FF2B5EF4-FFF2-40B4-BE49-F238E27FC236}">
-                <a16:creationId xmlns:a16="http://schemas.microsoft.com/office/drawing/2014/main" id="{762EBDCB-5FB4-06A9-5BA0-857AE1634A86}"/>
-              </a:ext>
-            </a:extLst>
-          </p:cNvPr>
-          <p:cNvPicPr>
-            <a:picLocks noChangeAspect="1"/>
-          </p:cNvPicPr>
-          <p:nvPr/>
-        </p:nvPicPr>
-        <p:blipFill>
-          <a:blip>
-            <a:extLst>
-              <a:ext uri="{96DAC541-7B7A-43D3-8B79-37D633B846F1}">
-                <asvg:svgBlip xmlns:asvg="http://schemas.microsoft.com/office/drawing/2016/SVG/main" r:embed="rId3"/>
-              </a:ext>
-            </a:extLst>
-          </a:blip>
-          <a:stretch>
-            <a:fillRect/>
-          </a:stretch>
-        </p:blipFill>
-        <p:spPr>
-          <a:xfrm>
-            <a:off x="6510827" y="10100991"/>
-            <a:ext cx="536657" cy="536657"/>
-          </a:xfrm>
-          <a:prstGeom prst="rect">
-            <a:avLst/>
-          </a:prstGeom>
-        </p:spPr>
-      </p:pic>
-      <p:pic>
-        <p:nvPicPr>
-          <p:cNvPr id="6" name="Graphic 5" descr="Artificial Intelligence outline">
-            <a:extLst>
-              <a:ext uri="{FF2B5EF4-FFF2-40B4-BE49-F238E27FC236}">
-                <a16:creationId xmlns:a16="http://schemas.microsoft.com/office/drawing/2014/main" id="{27D22578-B8FB-7C06-CF1C-505F146113DE}"/>
-              </a:ext>
-            </a:extLst>
-          </p:cNvPr>
-          <p:cNvPicPr>
-            <a:picLocks noChangeAspect="1"/>
-          </p:cNvPicPr>
-          <p:nvPr/>
-        </p:nvPicPr>
-        <p:blipFill>
-          <a:blip>
-            <a:extLst>
-              <a:ext uri="{96DAC541-7B7A-43D3-8B79-37D633B846F1}">
-                <asvg:svgBlip xmlns:asvg="http://schemas.microsoft.com/office/drawing/2016/SVG/main" r:embed="rId4"/>
-              </a:ext>
-            </a:extLst>
-          </a:blip>
-          <a:stretch>
-            <a:fillRect/>
-          </a:stretch>
-        </p:blipFill>
-        <p:spPr>
-          <a:xfrm>
-            <a:off x="8801061" y="6224206"/>
-            <a:ext cx="417467" cy="417467"/>
-          </a:xfrm>
-          <a:prstGeom prst="rect">
-            <a:avLst/>
-          </a:prstGeom>
-        </p:spPr>
-      </p:pic>
-      <p:sp>
-        <p:nvSpPr>
-          <p:cNvPr id="19" name="TextBox 18">
-            <a:extLst>
-              <a:ext uri="{FF2B5EF4-FFF2-40B4-BE49-F238E27FC236}">
-                <a16:creationId xmlns:a16="http://schemas.microsoft.com/office/drawing/2014/main" id="{74181A1E-3269-2638-C576-72C49DD5AB76}"/>
-              </a:ext>
-            </a:extLst>
-          </p:cNvPr>
-          <p:cNvSpPr txBox="1"/>
-          <p:nvPr/>
-        </p:nvSpPr>
-        <p:spPr>
-          <a:xfrm>
-            <a:off x="3710905" y="5354133"/>
-            <a:ext cx="327334" cy="369332"/>
-          </a:xfrm>
-          <a:prstGeom prst="rect">
-            <a:avLst/>
-          </a:prstGeom>
-          <a:noFill/>
-        </p:spPr>
-        <p:txBody>
-          <a:bodyPr wrap="square" rtlCol="0">
-            <a:spAutoFit/>
-          </a:bodyPr>
-          <a:lstStyle/>
-          <a:p>
-            <a:r>
-              <a:rPr lang="en-US" b="1" dirty="0"/>
-              <a:t>A</a:t>
-            </a:r>
-          </a:p>
-        </p:txBody>
-      </p:sp>
-      <p:sp>
-        <p:nvSpPr>
-          <p:cNvPr id="20" name="TextBox 19">
-            <a:extLst>
-              <a:ext uri="{FF2B5EF4-FFF2-40B4-BE49-F238E27FC236}">
-                <a16:creationId xmlns:a16="http://schemas.microsoft.com/office/drawing/2014/main" id="{F50A1407-3857-35D5-87CD-AFA6BE0A2D20}"/>
-              </a:ext>
-            </a:extLst>
-          </p:cNvPr>
-          <p:cNvSpPr txBox="1"/>
-          <p:nvPr/>
-        </p:nvSpPr>
-        <p:spPr>
-          <a:xfrm>
-            <a:off x="9544482" y="5354133"/>
-            <a:ext cx="348172" cy="369332"/>
-          </a:xfrm>
-          <a:prstGeom prst="rect">
-            <a:avLst/>
-          </a:prstGeom>
-          <a:noFill/>
-        </p:spPr>
-        <p:txBody>
-          <a:bodyPr wrap="none" rtlCol="0">
-            <a:spAutoFit/>
-          </a:bodyPr>
-          <a:lstStyle/>
-          <a:p>
-            <a:r>
-              <a:rPr lang="en-US" b="1" dirty="0"/>
-              <a:t>D</a:t>
-            </a:r>
-          </a:p>
-        </p:txBody>
-      </p:sp>
-      <p:sp>
-        <p:nvSpPr>
-          <p:cNvPr id="26" name="TextBox 25">
-            <a:extLst>
-              <a:ext uri="{FF2B5EF4-FFF2-40B4-BE49-F238E27FC236}">
-                <a16:creationId xmlns:a16="http://schemas.microsoft.com/office/drawing/2014/main" id="{51884BCB-8C82-81DD-0335-8D84FB7069BC}"/>
-              </a:ext>
-            </a:extLst>
-          </p:cNvPr>
-          <p:cNvSpPr txBox="1"/>
-          <p:nvPr/>
-        </p:nvSpPr>
-        <p:spPr>
-          <a:xfrm>
-            <a:off x="6248819" y="5354133"/>
-            <a:ext cx="327334" cy="369332"/>
-          </a:xfrm>
-          <a:prstGeom prst="rect">
-            <a:avLst/>
-          </a:prstGeom>
-          <a:noFill/>
-        </p:spPr>
-        <p:txBody>
-          <a:bodyPr wrap="none" rtlCol="0">
-            <a:spAutoFit/>
-          </a:bodyPr>
-          <a:lstStyle/>
-          <a:p>
-            <a:r>
-              <a:rPr lang="en-US" b="1"/>
-              <a:t>B</a:t>
-            </a:r>
-          </a:p>
-        </p:txBody>
-      </p:sp>
-      <p:sp>
-        <p:nvSpPr>
-          <p:cNvPr id="28" name="TextBox 27">
-            <a:extLst>
-              <a:ext uri="{FF2B5EF4-FFF2-40B4-BE49-F238E27FC236}">
-                <a16:creationId xmlns:a16="http://schemas.microsoft.com/office/drawing/2014/main" id="{70746AEB-DF01-17A0-7E7B-71B931DEC506}"/>
-              </a:ext>
-            </a:extLst>
-          </p:cNvPr>
-          <p:cNvSpPr txBox="1"/>
-          <p:nvPr/>
-        </p:nvSpPr>
-        <p:spPr>
-          <a:xfrm>
-            <a:off x="6248819" y="10717658"/>
-            <a:ext cx="348172" cy="369332"/>
-          </a:xfrm>
-          <a:prstGeom prst="rect">
-            <a:avLst/>
-          </a:prstGeom>
-          <a:noFill/>
-        </p:spPr>
-        <p:txBody>
-          <a:bodyPr wrap="none" rtlCol="0">
-            <a:spAutoFit/>
-          </a:bodyPr>
-          <a:lstStyle/>
-          <a:p>
-            <a:r>
-              <a:rPr lang="en-US" b="1" dirty="0"/>
-              <a:t>C</a:t>
-            </a:r>
-          </a:p>
-        </p:txBody>
-      </p:sp>
-      <p:pic>
-        <p:nvPicPr>
-          <p:cNvPr id="8" name="Picture 7" descr="A diagram of a process&#10;&#10;AI-generated content may be incorrect.">
-            <a:extLst>
-              <a:ext uri="{FF2B5EF4-FFF2-40B4-BE49-F238E27FC236}">
-                <a16:creationId xmlns:a16="http://schemas.microsoft.com/office/drawing/2014/main" id="{EE4981D0-333C-BB85-72F1-E8D33B27B016}"/>
-              </a:ext>
-            </a:extLst>
-          </p:cNvPr>
-          <p:cNvPicPr>
-            <a:picLocks noChangeAspect="1"/>
-          </p:cNvPicPr>
-          <p:nvPr/>
-        </p:nvPicPr>
-        <p:blipFill>
-          <a:blip r:embed="rId5"/>
-          <a:stretch>
-            <a:fillRect/>
-          </a:stretch>
-        </p:blipFill>
-        <p:spPr>
-          <a:xfrm>
-            <a:off x="1699231" y="6110862"/>
-            <a:ext cx="4501098" cy="6246420"/>
-          </a:xfrm>
-          <a:prstGeom prst="rect">
-            <a:avLst/>
-          </a:prstGeom>
-        </p:spPr>
-      </p:pic>
-    </p:spTree>
-    <p:extLst>
-      <p:ext uri="{BB962C8B-B14F-4D97-AF65-F5344CB8AC3E}">
-        <p14:creationId xmlns:p14="http://schemas.microsoft.com/office/powerpoint/2010/main" val="3569480432"/>
-      </p:ext>
-    </p:extLst>
-  </p:cSld>
-  <p:clrMapOvr>
-    <a:masterClrMapping/>
-  </p:clrMapOvr>
-</p:sld>
-</file>
-
-<file path=ppt/slides/slide3.xml><?xml version="1.0" encoding="utf-8"?>
-<p:sld xmlns:a="http://schemas.openxmlformats.org/drawingml/2006/main" xmlns:r="http://schemas.openxmlformats.org/officeDocument/2006/relationships" xmlns:p="http://schemas.openxmlformats.org/presentationml/2006/main">
-  <p:cSld>
-    <p:spTree>
-      <p:nvGrpSpPr>
-        <p:cNvPr id="1" name="">
-          <a:extLst>
-            <a:ext uri="{FF2B5EF4-FFF2-40B4-BE49-F238E27FC236}">
-              <a16:creationId xmlns:a16="http://schemas.microsoft.com/office/drawing/2014/main" id="{6A606220-3D9B-8608-6988-5D18409D88B7}"/>
-            </a:ext>
-          </a:extLst>
-        </p:cNvPr>
-        <p:cNvGrpSpPr/>
-        <p:nvPr/>
-      </p:nvGrpSpPr>
-      <p:grpSpPr>
-        <a:xfrm>
-          <a:off x="0" y="0"/>
-          <a:ext cx="0" cy="0"/>
-          <a:chOff x="0" y="0"/>
-          <a:chExt cx="0" cy="0"/>
-        </a:xfrm>
-      </p:grpSpPr>
-      <p:pic>
-        <p:nvPicPr>
-          <p:cNvPr id="3" name="Picture 2" descr="A screenshot of a diagram&#10;&#10;AI-generated content may be incorrect.">
-            <a:extLst>
-              <a:ext uri="{FF2B5EF4-FFF2-40B4-BE49-F238E27FC236}">
-                <a16:creationId xmlns:a16="http://schemas.microsoft.com/office/drawing/2014/main" id="{BCB90428-2C8C-BDD1-B4C2-D9B5294506A6}"/>
-              </a:ext>
-            </a:extLst>
-          </p:cNvPr>
-          <p:cNvPicPr>
-            <a:picLocks noChangeAspect="1"/>
-          </p:cNvPicPr>
-          <p:nvPr/>
-        </p:nvPicPr>
-        <p:blipFill>
-          <a:blip r:embed="rId3"/>
-          <a:stretch>
-            <a:fillRect/>
-          </a:stretch>
-        </p:blipFill>
-        <p:spPr>
-          <a:xfrm>
-            <a:off x="3567531" y="5627335"/>
-            <a:ext cx="4934052" cy="7098993"/>
-          </a:xfrm>
-          <a:prstGeom prst="rect">
-            <a:avLst/>
-          </a:prstGeom>
-        </p:spPr>
-      </p:pic>
-      <p:sp>
-        <p:nvSpPr>
-          <p:cNvPr id="4" name="TextBox 3">
-            <a:extLst>
-              <a:ext uri="{FF2B5EF4-FFF2-40B4-BE49-F238E27FC236}">
-                <a16:creationId xmlns:a16="http://schemas.microsoft.com/office/drawing/2014/main" id="{9B1E9D25-7371-C2CC-59CA-01AF46CE3588}"/>
-              </a:ext>
-            </a:extLst>
-          </p:cNvPr>
-          <p:cNvSpPr txBox="1"/>
-          <p:nvPr/>
-        </p:nvSpPr>
-        <p:spPr>
-          <a:xfrm>
-            <a:off x="16566776" y="12711953"/>
-            <a:ext cx="705386" cy="369332"/>
-          </a:xfrm>
-          <a:prstGeom prst="rect">
-            <a:avLst/>
-          </a:prstGeom>
-          <a:noFill/>
-        </p:spPr>
-        <p:txBody>
-          <a:bodyPr wrap="none" rtlCol="0">
-            <a:spAutoFit/>
-          </a:bodyPr>
-          <a:lstStyle/>
-          <a:p>
-            <a:r>
-              <a:rPr lang="en-US" dirty="0"/>
-              <a:t>Fig. 3</a:t>
-            </a:r>
-          </a:p>
-        </p:txBody>
-      </p:sp>
-      <p:sp>
-        <p:nvSpPr>
-          <p:cNvPr id="8" name="Rectangle 7">
-            <a:extLst>
-              <a:ext uri="{FF2B5EF4-FFF2-40B4-BE49-F238E27FC236}">
-                <a16:creationId xmlns:a16="http://schemas.microsoft.com/office/drawing/2014/main" id="{1F7F6849-2128-A4E5-53C4-5A872DE403DE}"/>
-              </a:ext>
-            </a:extLst>
-          </p:cNvPr>
-          <p:cNvSpPr/>
-          <p:nvPr/>
-        </p:nvSpPr>
-        <p:spPr>
-          <a:xfrm>
-            <a:off x="9177449" y="5968829"/>
-            <a:ext cx="4820284" cy="2214621"/>
-          </a:xfrm>
-          <a:prstGeom prst="rect">
-            <a:avLst/>
-          </a:prstGeom>
-        </p:spPr>
-        <p:style>
-          <a:lnRef idx="2">
-            <a:schemeClr val="accent1">
-              <a:shade val="15000"/>
-            </a:schemeClr>
-          </a:lnRef>
-          <a:fillRef idx="1">
-            <a:schemeClr val="accent1"/>
-          </a:fillRef>
-          <a:effectRef idx="0">
-            <a:schemeClr val="accent1"/>
-          </a:effectRef>
-          <a:fontRef idx="minor">
-            <a:schemeClr val="lt1"/>
-          </a:fontRef>
-        </p:style>
-        <p:txBody>
-          <a:bodyPr rtlCol="0" anchor="ctr"/>
-          <a:lstStyle/>
-          <a:p>
-            <a:pPr algn="ctr"/>
-            <a:r>
-              <a:rPr lang="en-US" dirty="0"/>
-              <a:t>Sc reference selector</a:t>
-            </a:r>
-          </a:p>
-        </p:txBody>
-      </p:sp>
-      <p:sp>
-        <p:nvSpPr>
-          <p:cNvPr id="45" name="TextBox 44">
-            <a:extLst>
-              <a:ext uri="{FF2B5EF4-FFF2-40B4-BE49-F238E27FC236}">
-                <a16:creationId xmlns:a16="http://schemas.microsoft.com/office/drawing/2014/main" id="{B5B4834B-D9B0-1CEF-706C-D65A2FB54EE9}"/>
-              </a:ext>
-            </a:extLst>
-          </p:cNvPr>
-          <p:cNvSpPr txBox="1"/>
-          <p:nvPr/>
-        </p:nvSpPr>
-        <p:spPr>
-          <a:xfrm>
-            <a:off x="5003678" y="5442669"/>
-            <a:ext cx="327334" cy="369332"/>
-          </a:xfrm>
-          <a:prstGeom prst="rect">
-            <a:avLst/>
-          </a:prstGeom>
-          <a:noFill/>
-        </p:spPr>
-        <p:txBody>
-          <a:bodyPr wrap="none" rtlCol="0">
-            <a:spAutoFit/>
-          </a:bodyPr>
-          <a:lstStyle/>
-          <a:p>
-            <a:r>
-              <a:rPr lang="en-US" b="1" dirty="0"/>
-              <a:t>A</a:t>
-            </a:r>
-          </a:p>
-        </p:txBody>
-      </p:sp>
-      <p:sp>
-        <p:nvSpPr>
-          <p:cNvPr id="46" name="TextBox 45">
-            <a:extLst>
-              <a:ext uri="{FF2B5EF4-FFF2-40B4-BE49-F238E27FC236}">
-                <a16:creationId xmlns:a16="http://schemas.microsoft.com/office/drawing/2014/main" id="{EB2912D9-8E1D-480C-1819-7390351E7F4C}"/>
-              </a:ext>
-            </a:extLst>
-          </p:cNvPr>
-          <p:cNvSpPr txBox="1"/>
-          <p:nvPr/>
-        </p:nvSpPr>
-        <p:spPr>
-          <a:xfrm>
-            <a:off x="8797473" y="8430868"/>
-            <a:ext cx="348172" cy="369332"/>
-          </a:xfrm>
-          <a:prstGeom prst="rect">
-            <a:avLst/>
-          </a:prstGeom>
-          <a:noFill/>
-        </p:spPr>
-        <p:txBody>
-          <a:bodyPr wrap="none" rtlCol="0">
-            <a:spAutoFit/>
-          </a:bodyPr>
-          <a:lstStyle/>
-          <a:p>
-            <a:r>
-              <a:rPr lang="en-US" b="1" dirty="0"/>
-              <a:t>C</a:t>
-            </a:r>
-          </a:p>
-        </p:txBody>
-      </p:sp>
-      <p:sp>
-        <p:nvSpPr>
-          <p:cNvPr id="47" name="TextBox 46">
-            <a:extLst>
-              <a:ext uri="{FF2B5EF4-FFF2-40B4-BE49-F238E27FC236}">
-                <a16:creationId xmlns:a16="http://schemas.microsoft.com/office/drawing/2014/main" id="{D9615DF0-973C-FF18-E512-6A3CCD3D522A}"/>
-              </a:ext>
-            </a:extLst>
-          </p:cNvPr>
-          <p:cNvSpPr txBox="1"/>
-          <p:nvPr/>
-        </p:nvSpPr>
-        <p:spPr>
-          <a:xfrm>
-            <a:off x="8807892" y="5442669"/>
-            <a:ext cx="327334" cy="369332"/>
-          </a:xfrm>
-          <a:prstGeom prst="rect">
-            <a:avLst/>
-          </a:prstGeom>
-          <a:noFill/>
-        </p:spPr>
-        <p:txBody>
-          <a:bodyPr wrap="none" rtlCol="0">
-            <a:spAutoFit/>
-          </a:bodyPr>
-          <a:lstStyle/>
-          <a:p>
-            <a:r>
-              <a:rPr lang="en-US" b="1" dirty="0"/>
-              <a:t>B</a:t>
-            </a:r>
-          </a:p>
-        </p:txBody>
-      </p:sp>
-      <p:sp>
-        <p:nvSpPr>
-          <p:cNvPr id="6" name="Rectangle 5">
-            <a:extLst>
-              <a:ext uri="{FF2B5EF4-FFF2-40B4-BE49-F238E27FC236}">
-                <a16:creationId xmlns:a16="http://schemas.microsoft.com/office/drawing/2014/main" id="{8B33D61F-02C9-F25A-B699-869F92B62239}"/>
-              </a:ext>
-            </a:extLst>
-          </p:cNvPr>
-          <p:cNvSpPr/>
-          <p:nvPr/>
-        </p:nvSpPr>
-        <p:spPr>
-          <a:xfrm>
-            <a:off x="9426101" y="10511707"/>
-            <a:ext cx="4820284" cy="2214621"/>
-          </a:xfrm>
-          <a:prstGeom prst="rect">
-            <a:avLst/>
-          </a:prstGeom>
-        </p:spPr>
-        <p:style>
-          <a:lnRef idx="2">
-            <a:schemeClr val="accent1">
-              <a:shade val="15000"/>
-            </a:schemeClr>
-          </a:lnRef>
-          <a:fillRef idx="1">
-            <a:schemeClr val="accent1"/>
-          </a:fillRef>
-          <a:effectRef idx="0">
-            <a:schemeClr val="accent1"/>
-          </a:effectRef>
-          <a:fontRef idx="minor">
-            <a:schemeClr val="lt1"/>
-          </a:fontRef>
-        </p:style>
-        <p:txBody>
-          <a:bodyPr rtlCol="0" anchor="ctr"/>
-          <a:lstStyle/>
-          <a:p>
-            <a:pPr algn="ctr"/>
-            <a:r>
-              <a:rPr lang="en-US" dirty="0" err="1"/>
-              <a:t>Rmcpagnet</a:t>
-            </a:r>
-            <a:r>
-              <a:rPr lang="en-US" dirty="0"/>
-              <a:t> </a:t>
-            </a:r>
-            <a:r>
-              <a:rPr lang="ko-KR" altLang="en-US" dirty="0"/>
-              <a:t>실제결과 </a:t>
-            </a:r>
-            <a:endParaRPr lang="en-US" altLang="ko-KR" dirty="0"/>
-          </a:p>
-          <a:p>
-            <a:pPr algn="ctr"/>
-            <a:r>
-              <a:rPr lang="en-US" dirty="0"/>
-              <a:t>CARD </a:t>
-            </a:r>
-            <a:r>
-              <a:rPr lang="ko-KR" altLang="en-US" dirty="0"/>
-              <a:t>결과 추가</a:t>
-            </a:r>
-            <a:endParaRPr lang="en-US" dirty="0"/>
-          </a:p>
-        </p:txBody>
-      </p:sp>
-    </p:spTree>
-    <p:extLst>
-      <p:ext uri="{BB962C8B-B14F-4D97-AF65-F5344CB8AC3E}">
-        <p14:creationId xmlns:p14="http://schemas.microsoft.com/office/powerpoint/2010/main" val="3998322953"/>
-      </p:ext>
-    </p:extLst>
-  </p:cSld>
-  <p:clrMapOvr>
-    <a:masterClrMapping/>
-  </p:clrMapOvr>
-</p:sld>
-</file>
-
-<file path=ppt/slides/slide4.xml><?xml version="1.0" encoding="utf-8"?>
 <p:sld xmlns:a="http://schemas.openxmlformats.org/drawingml/2006/main" xmlns:r="http://schemas.openxmlformats.org/officeDocument/2006/relationships" xmlns:p="http://schemas.openxmlformats.org/presentationml/2006/main">
   <p:cSld>
     <p:spTree>
@@ -14224,7 +9711,7 @@
 </p:sld>
 </file>
 
-<file path=ppt/slides/slide5.xml><?xml version="1.0" encoding="utf-8"?>
+<file path=ppt/slides/slide3.xml><?xml version="1.0" encoding="utf-8"?>
 <p:sld xmlns:a="http://schemas.openxmlformats.org/drawingml/2006/main" xmlns:r="http://schemas.openxmlformats.org/officeDocument/2006/relationships" xmlns:p="http://schemas.openxmlformats.org/presentationml/2006/main">
   <p:cSld>
     <p:spTree>
@@ -14355,7 +9842,7 @@
 </p:sld>
 </file>
 
-<file path=ppt/slides/slide6.xml><?xml version="1.0" encoding="utf-8"?>
+<file path=ppt/slides/slide4.xml><?xml version="1.0" encoding="utf-8"?>
 <p:sld xmlns:a="http://schemas.openxmlformats.org/drawingml/2006/main" xmlns:r="http://schemas.openxmlformats.org/officeDocument/2006/relationships" xmlns:p="http://schemas.openxmlformats.org/presentationml/2006/main">
   <p:cSld>
     <p:spTree>
@@ -14417,6 +9904,2634 @@
     <p:extLst>
       <p:ext uri="{BB962C8B-B14F-4D97-AF65-F5344CB8AC3E}">
         <p14:creationId xmlns:p14="http://schemas.microsoft.com/office/powerpoint/2010/main" val="1607834865"/>
+      </p:ext>
+    </p:extLst>
+  </p:cSld>
+  <p:clrMapOvr>
+    <a:masterClrMapping/>
+  </p:clrMapOvr>
+</p:sld>
+</file>
+
+<file path=ppt/slides/slide5.xml><?xml version="1.0" encoding="utf-8"?>
+<p:sld xmlns:a="http://schemas.openxmlformats.org/drawingml/2006/main" xmlns:r="http://schemas.openxmlformats.org/officeDocument/2006/relationships" xmlns:p="http://schemas.openxmlformats.org/presentationml/2006/main">
+  <p:cSld>
+    <p:spTree>
+      <p:nvGrpSpPr>
+        <p:cNvPr id="1" name="">
+          <a:extLst>
+            <a:ext uri="{FF2B5EF4-FFF2-40B4-BE49-F238E27FC236}">
+              <a16:creationId xmlns:a16="http://schemas.microsoft.com/office/drawing/2014/main" id="{E70BC8BD-104B-DCEA-A224-CF7A599BB705}"/>
+            </a:ext>
+          </a:extLst>
+        </p:cNvPr>
+        <p:cNvGrpSpPr/>
+        <p:nvPr/>
+      </p:nvGrpSpPr>
+      <p:grpSpPr>
+        <a:xfrm>
+          <a:off x="0" y="0"/>
+          <a:ext cx="0" cy="0"/>
+          <a:chOff x="0" y="0"/>
+          <a:chExt cx="0" cy="0"/>
+        </a:xfrm>
+      </p:grpSpPr>
+      <p:sp>
+        <p:nvSpPr>
+          <p:cNvPr id="4" name="TextBox 3">
+            <a:extLst>
+              <a:ext uri="{FF2B5EF4-FFF2-40B4-BE49-F238E27FC236}">
+                <a16:creationId xmlns:a16="http://schemas.microsoft.com/office/drawing/2014/main" id="{6B3802E9-8AEE-1F6B-4327-46DB8AB577B4}"/>
+              </a:ext>
+            </a:extLst>
+          </p:cNvPr>
+          <p:cNvSpPr txBox="1"/>
+          <p:nvPr/>
+        </p:nvSpPr>
+        <p:spPr>
+          <a:xfrm>
+            <a:off x="16566777" y="12711953"/>
+            <a:ext cx="835229" cy="369332"/>
+          </a:xfrm>
+          <a:prstGeom prst="rect">
+            <a:avLst/>
+          </a:prstGeom>
+          <a:noFill/>
+        </p:spPr>
+        <p:txBody>
+          <a:bodyPr wrap="none" rtlCol="0">
+            <a:spAutoFit/>
+          </a:bodyPr>
+          <a:lstStyle/>
+          <a:p>
+            <a:r>
+              <a:rPr lang="en-US" dirty="0"/>
+              <a:t>Fig. </a:t>
+            </a:r>
+            <a:r>
+              <a:rPr lang="en-US" altLang="ko-KR" dirty="0"/>
+              <a:t>S1</a:t>
+            </a:r>
+            <a:endParaRPr lang="en-US" dirty="0"/>
+          </a:p>
+        </p:txBody>
+      </p:sp>
+      <p:sp>
+        <p:nvSpPr>
+          <p:cNvPr id="9" name="TextBox 8">
+            <a:extLst>
+              <a:ext uri="{FF2B5EF4-FFF2-40B4-BE49-F238E27FC236}">
+                <a16:creationId xmlns:a16="http://schemas.microsoft.com/office/drawing/2014/main" id="{CEF05C65-0A7E-8D02-F33E-3898A76B7CD4}"/>
+              </a:ext>
+            </a:extLst>
+          </p:cNvPr>
+          <p:cNvSpPr txBox="1"/>
+          <p:nvPr/>
+        </p:nvSpPr>
+        <p:spPr>
+          <a:xfrm>
+            <a:off x="9989633" y="5833889"/>
+            <a:ext cx="5054424" cy="6601807"/>
+          </a:xfrm>
+          <a:prstGeom prst="rect">
+            <a:avLst/>
+          </a:prstGeom>
+          <a:ln w="12700"/>
+        </p:spPr>
+        <p:style>
+          <a:lnRef idx="2">
+            <a:schemeClr val="dk1"/>
+          </a:lnRef>
+          <a:fillRef idx="1">
+            <a:schemeClr val="lt1"/>
+          </a:fillRef>
+          <a:effectRef idx="0">
+            <a:schemeClr val="dk1"/>
+          </a:effectRef>
+          <a:fontRef idx="minor">
+            <a:schemeClr val="dk1"/>
+          </a:fontRef>
+        </p:style>
+        <p:txBody>
+          <a:bodyPr wrap="square" rtlCol="0" anchor="ctr">
+            <a:spAutoFit/>
+          </a:bodyPr>
+          <a:lstStyle/>
+          <a:p>
+            <a:pPr>
+              <a:spcBef>
+                <a:spcPts val="100"/>
+              </a:spcBef>
+              <a:spcAft>
+                <a:spcPts val="500"/>
+              </a:spcAft>
+            </a:pPr>
+            <a:r>
+              <a:rPr lang="en-US" sz="1000" b="1" dirty="0">
+                <a:latin typeface="ui-sans-serif"/>
+              </a:rPr>
+              <a:t>🧬 Spatial Transcriptomics Analysis Pipeline</a:t>
+            </a:r>
+          </a:p>
+          <a:p>
+            <a:pPr>
+              <a:spcBef>
+                <a:spcPts val="100"/>
+              </a:spcBef>
+              <a:spcAft>
+                <a:spcPts val="500"/>
+              </a:spcAft>
+            </a:pPr>
+            <a:endParaRPr lang="en-US" sz="1000" b="1" dirty="0">
+              <a:latin typeface="ui-sans-serif"/>
+            </a:endParaRPr>
+          </a:p>
+          <a:p>
+            <a:pPr>
+              <a:spcBef>
+                <a:spcPts val="100"/>
+              </a:spcBef>
+              <a:spcAft>
+                <a:spcPts val="500"/>
+              </a:spcAft>
+            </a:pPr>
+            <a:r>
+              <a:rPr lang="en-US" sz="1000" b="1" dirty="0">
+                <a:latin typeface="ui-sans-serif"/>
+              </a:rPr>
+              <a:t>📋 Pipeline Summary</a:t>
+            </a:r>
+          </a:p>
+          <a:p>
+            <a:pPr>
+              <a:spcBef>
+                <a:spcPts val="100"/>
+              </a:spcBef>
+              <a:spcAft>
+                <a:spcPts val="500"/>
+              </a:spcAft>
+            </a:pPr>
+            <a:r>
+              <a:rPr lang="en-US" sz="900" dirty="0">
+                <a:latin typeface="ui-sans-serif"/>
+              </a:rPr>
+              <a:t>log normalization → CARD (Deconvolution) → </a:t>
+            </a:r>
+            <a:r>
+              <a:rPr lang="en-US" sz="900" dirty="0" err="1">
+                <a:latin typeface="ui-sans-serif"/>
+              </a:rPr>
+              <a:t>BayesSpace</a:t>
+            </a:r>
+            <a:r>
+              <a:rPr lang="en-US" sz="900" dirty="0">
+                <a:latin typeface="ui-sans-serif"/>
+              </a:rPr>
+              <a:t> (Spatial clustering)</a:t>
+            </a:r>
+          </a:p>
+          <a:p>
+            <a:pPr>
+              <a:spcBef>
+                <a:spcPts val="100"/>
+              </a:spcBef>
+              <a:spcAft>
+                <a:spcPts val="500"/>
+              </a:spcAft>
+            </a:pPr>
+            <a:endParaRPr lang="en-US" sz="900" dirty="0"/>
+          </a:p>
+          <a:p>
+            <a:pPr>
+              <a:spcBef>
+                <a:spcPts val="100"/>
+              </a:spcBef>
+              <a:spcAft>
+                <a:spcPts val="500"/>
+              </a:spcAft>
+            </a:pPr>
+            <a:r>
+              <a:rPr lang="en-US" sz="900" b="1" dirty="0">
+                <a:latin typeface="ui-sans-serif"/>
+              </a:rPr>
+              <a:t>🔧 Step 1: Data Normalization</a:t>
+            </a:r>
+          </a:p>
+          <a:p>
+            <a:pPr marL="230188" indent="-115888">
+              <a:buFont typeface="Arial" panose="020B0604020202020204" pitchFamily="34" charset="0"/>
+              <a:buChar char="•"/>
+            </a:pPr>
+            <a:r>
+              <a:rPr lang="en-US" sz="800" b="1" dirty="0">
+                <a:latin typeface="ui-sans-serif"/>
+              </a:rPr>
+              <a:t>Tool</a:t>
+            </a:r>
+            <a:r>
+              <a:rPr lang="en-US" sz="800" dirty="0">
+                <a:latin typeface="ui-sans-serif"/>
+              </a:rPr>
+              <a:t>: log normalization (e.g., Seurat::</a:t>
+            </a:r>
+            <a:r>
+              <a:rPr lang="en-US" sz="800" dirty="0" err="1">
+                <a:latin typeface="ui-sans-serif"/>
+              </a:rPr>
+              <a:t>NormalizeData</a:t>
+            </a:r>
+            <a:r>
+              <a:rPr lang="en-US" sz="800" dirty="0">
+                <a:latin typeface="ui-sans-serif"/>
+              </a:rPr>
+              <a:t> or base R log1p)</a:t>
+            </a:r>
+          </a:p>
+          <a:p>
+            <a:pPr marL="230188" indent="-115888">
+              <a:buFont typeface="Arial" panose="020B0604020202020204" pitchFamily="34" charset="0"/>
+              <a:buChar char="•"/>
+            </a:pPr>
+            <a:r>
+              <a:rPr lang="en-US" sz="800" b="1" dirty="0">
+                <a:latin typeface="ui-sans-serif"/>
+              </a:rPr>
+              <a:t>Purpose</a:t>
+            </a:r>
+            <a:r>
+              <a:rPr lang="en-US" sz="800" dirty="0">
+                <a:latin typeface="ui-sans-serif"/>
+              </a:rPr>
+              <a:t>: Normalization</a:t>
+            </a:r>
+          </a:p>
+          <a:p>
+            <a:pPr marL="230188" indent="-115888">
+              <a:buFont typeface="Arial" panose="020B0604020202020204" pitchFamily="34" charset="0"/>
+              <a:buChar char="•"/>
+            </a:pPr>
+            <a:r>
+              <a:rPr lang="en-US" sz="800" b="1" dirty="0">
+                <a:latin typeface="ui-sans-serif"/>
+              </a:rPr>
+              <a:t>Language</a:t>
+            </a:r>
+            <a:r>
+              <a:rPr lang="en-US" sz="800" dirty="0">
+                <a:latin typeface="ui-sans-serif"/>
+              </a:rPr>
+              <a:t>: R</a:t>
+            </a:r>
+          </a:p>
+          <a:p>
+            <a:pPr marL="230188" indent="-115888">
+              <a:buFont typeface="Arial" panose="020B0604020202020204" pitchFamily="34" charset="0"/>
+              <a:buChar char="•"/>
+            </a:pPr>
+            <a:r>
+              <a:rPr lang="en-US" sz="800" b="1" dirty="0">
+                <a:latin typeface="ui-sans-serif"/>
+              </a:rPr>
+              <a:t>Computational Requirements</a:t>
+            </a:r>
+            <a:r>
+              <a:rPr lang="en-US" sz="800" dirty="0">
+                <a:latin typeface="ui-sans-serif"/>
+              </a:rPr>
+              <a:t>: CPU, minimal memory for a single </a:t>
+            </a:r>
+            <a:r>
+              <a:rPr lang="en-US" sz="800" dirty="0" err="1">
+                <a:latin typeface="ui-sans-serif"/>
+              </a:rPr>
+              <a:t>Visium</a:t>
+            </a:r>
+            <a:r>
+              <a:rPr lang="en-US" sz="800" dirty="0">
+                <a:latin typeface="ui-sans-serif"/>
+              </a:rPr>
+              <a:t> sample</a:t>
+            </a:r>
+          </a:p>
+          <a:p>
+            <a:pPr marL="230188" indent="-115888">
+              <a:buFont typeface="Arial" panose="020B0604020202020204" pitchFamily="34" charset="0"/>
+              <a:buChar char="•"/>
+            </a:pPr>
+            <a:r>
+              <a:rPr lang="en-US" sz="800" b="1" dirty="0">
+                <a:latin typeface="ui-sans-serif"/>
+              </a:rPr>
+              <a:t>why this tool</a:t>
+            </a:r>
+            <a:r>
+              <a:rPr lang="en-US" sz="800" dirty="0">
+                <a:latin typeface="ui-sans-serif"/>
+              </a:rPr>
+              <a:t>: Log normalization is the standard preprocessing for </a:t>
+            </a:r>
+            <a:r>
+              <a:rPr lang="en-US" sz="800" dirty="0" err="1">
+                <a:latin typeface="ui-sans-serif"/>
+              </a:rPr>
+              <a:t>Visium</a:t>
+            </a:r>
+            <a:r>
+              <a:rPr lang="en-US" sz="800" dirty="0">
+                <a:latin typeface="ui-sans-serif"/>
+              </a:rPr>
+              <a:t> data and is compatible with all downstream R-based tools.</a:t>
+            </a:r>
+          </a:p>
+          <a:p>
+            <a:pPr algn="l">
+              <a:buFont typeface="Arial" panose="020B0604020202020204" pitchFamily="34" charset="0"/>
+              <a:buChar char="•"/>
+            </a:pPr>
+            <a:endParaRPr lang="en-US" sz="800" dirty="0"/>
+          </a:p>
+          <a:p>
+            <a:pPr>
+              <a:spcBef>
+                <a:spcPts val="100"/>
+              </a:spcBef>
+              <a:spcAft>
+                <a:spcPts val="500"/>
+              </a:spcAft>
+            </a:pPr>
+            <a:r>
+              <a:rPr lang="en-US" sz="900" b="1" dirty="0">
+                <a:latin typeface="ui-sans-serif"/>
+              </a:rPr>
+              <a:t>🔬 Step 2: Cell Type Analysis</a:t>
+            </a:r>
+          </a:p>
+          <a:p>
+            <a:pPr marL="230188" indent="-115888">
+              <a:buFont typeface="Arial" panose="020B0604020202020204" pitchFamily="34" charset="0"/>
+              <a:buChar char="•"/>
+            </a:pPr>
+            <a:r>
+              <a:rPr lang="en-US" sz="800" b="1" dirty="0">
+                <a:latin typeface="ui-sans-serif"/>
+              </a:rPr>
+              <a:t>Tool</a:t>
+            </a:r>
+            <a:r>
+              <a:rPr lang="en-US" sz="800" dirty="0">
+                <a:latin typeface="ui-sans-serif"/>
+              </a:rPr>
+              <a:t>: CARD</a:t>
+            </a:r>
+          </a:p>
+          <a:p>
+            <a:pPr marL="230188" indent="-115888">
+              <a:buFont typeface="Arial" panose="020B0604020202020204" pitchFamily="34" charset="0"/>
+              <a:buChar char="•"/>
+            </a:pPr>
+            <a:r>
+              <a:rPr lang="en-US" sz="800" b="1" dirty="0">
+                <a:latin typeface="ui-sans-serif"/>
+              </a:rPr>
+              <a:t>Purpose</a:t>
+            </a:r>
+            <a:r>
+              <a:rPr lang="en-US" sz="800" dirty="0">
+                <a:latin typeface="ui-sans-serif"/>
+              </a:rPr>
+              <a:t>: Deconvolution for spot-based data</a:t>
+            </a:r>
+          </a:p>
+          <a:p>
+            <a:pPr marL="230188" indent="-115888">
+              <a:buFont typeface="Arial" panose="020B0604020202020204" pitchFamily="34" charset="0"/>
+              <a:buChar char="•"/>
+            </a:pPr>
+            <a:r>
+              <a:rPr lang="en-US" sz="800" b="1" dirty="0">
+                <a:latin typeface="ui-sans-serif"/>
+              </a:rPr>
+              <a:t>Language</a:t>
+            </a:r>
+            <a:r>
+              <a:rPr lang="en-US" sz="800" dirty="0">
+                <a:latin typeface="ui-sans-serif"/>
+              </a:rPr>
+              <a:t>: R</a:t>
+            </a:r>
+          </a:p>
+          <a:p>
+            <a:pPr marL="230188" indent="-115888">
+              <a:buFont typeface="Arial" panose="020B0604020202020204" pitchFamily="34" charset="0"/>
+              <a:buChar char="•"/>
+            </a:pPr>
+            <a:r>
+              <a:rPr lang="en-US" sz="800" b="1" dirty="0">
+                <a:latin typeface="ui-sans-serif"/>
+              </a:rPr>
+              <a:t>Computational Requirements</a:t>
+            </a:r>
+            <a:r>
+              <a:rPr lang="en-US" sz="800" dirty="0">
+                <a:latin typeface="ui-sans-serif"/>
+              </a:rPr>
+              <a:t>: CPU, very low memory usage (CARD is 0.2–10% of the memory of alternatives)</a:t>
+            </a:r>
+          </a:p>
+          <a:p>
+            <a:pPr marL="230188" indent="-115888">
+              <a:buFont typeface="Arial" panose="020B0604020202020204" pitchFamily="34" charset="0"/>
+              <a:buChar char="•"/>
+            </a:pPr>
+            <a:r>
+              <a:rPr lang="en-US" sz="800" b="1" dirty="0">
+                <a:latin typeface="ui-sans-serif"/>
+              </a:rPr>
+              <a:t>why this tool</a:t>
+            </a:r>
+            <a:r>
+              <a:rPr lang="en-US" sz="800" dirty="0">
+                <a:latin typeface="ui-sans-serif"/>
+              </a:rPr>
+              <a:t>: CARD is highly efficient, accurate, and specifically designed for spot-based (</a:t>
+            </a:r>
+            <a:r>
+              <a:rPr lang="en-US" sz="800" dirty="0" err="1">
+                <a:latin typeface="ui-sans-serif"/>
+              </a:rPr>
+              <a:t>Visium</a:t>
+            </a:r>
+            <a:r>
+              <a:rPr lang="en-US" sz="800" dirty="0">
+                <a:latin typeface="ui-sans-serif"/>
+              </a:rPr>
+              <a:t>) data. It is widely benchmarked, easy to use on Mac/CPU, and has been applied to human cancer datasets.</a:t>
+            </a:r>
+          </a:p>
+          <a:p>
+            <a:pPr>
+              <a:buNone/>
+            </a:pPr>
+            <a:endParaRPr lang="en-US" sz="800" dirty="0"/>
+          </a:p>
+          <a:p>
+            <a:pPr>
+              <a:spcBef>
+                <a:spcPts val="100"/>
+              </a:spcBef>
+              <a:spcAft>
+                <a:spcPts val="500"/>
+              </a:spcAft>
+            </a:pPr>
+            <a:r>
+              <a:rPr lang="en-US" sz="900" b="1" dirty="0">
+                <a:latin typeface="ui-sans-serif"/>
+              </a:rPr>
+              <a:t>🔬 Step 3: Spatial Clustering</a:t>
+            </a:r>
+          </a:p>
+          <a:p>
+            <a:pPr marL="230188" indent="-115888">
+              <a:buFont typeface="Arial" panose="020B0604020202020204" pitchFamily="34" charset="0"/>
+              <a:buChar char="•"/>
+            </a:pPr>
+            <a:r>
+              <a:rPr lang="en-US" sz="800" b="1" dirty="0">
+                <a:latin typeface="ui-sans-serif"/>
+              </a:rPr>
+              <a:t>Tool</a:t>
+            </a:r>
+            <a:r>
+              <a:rPr lang="en-US" sz="800" dirty="0">
+                <a:latin typeface="ui-sans-serif"/>
+              </a:rPr>
+              <a:t>: </a:t>
+            </a:r>
+            <a:r>
+              <a:rPr lang="en-US" sz="800" dirty="0" err="1">
+                <a:latin typeface="ui-sans-serif"/>
+              </a:rPr>
+              <a:t>BayesSpace</a:t>
+            </a:r>
+            <a:endParaRPr lang="en-US" sz="800" dirty="0">
+              <a:latin typeface="ui-sans-serif"/>
+            </a:endParaRPr>
+          </a:p>
+          <a:p>
+            <a:pPr marL="230188" indent="-115888">
+              <a:buFont typeface="Arial" panose="020B0604020202020204" pitchFamily="34" charset="0"/>
+              <a:buChar char="•"/>
+            </a:pPr>
+            <a:r>
+              <a:rPr lang="en-US" sz="800" b="1" dirty="0">
+                <a:latin typeface="ui-sans-serif"/>
+              </a:rPr>
+              <a:t>Purpose</a:t>
+            </a:r>
+            <a:r>
+              <a:rPr lang="en-US" sz="800" dirty="0">
+                <a:latin typeface="ui-sans-serif"/>
+              </a:rPr>
+              <a:t>: Spatial clustering</a:t>
+            </a:r>
+          </a:p>
+          <a:p>
+            <a:pPr marL="230188" indent="-115888">
+              <a:buFont typeface="Arial" panose="020B0604020202020204" pitchFamily="34" charset="0"/>
+              <a:buChar char="•"/>
+            </a:pPr>
+            <a:r>
+              <a:rPr lang="en-US" sz="800" b="1" dirty="0">
+                <a:latin typeface="ui-sans-serif"/>
+              </a:rPr>
+              <a:t>Language</a:t>
+            </a:r>
+            <a:r>
+              <a:rPr lang="en-US" sz="800" dirty="0">
+                <a:latin typeface="ui-sans-serif"/>
+              </a:rPr>
+              <a:t>: R</a:t>
+            </a:r>
+          </a:p>
+          <a:p>
+            <a:pPr marL="230188" indent="-115888">
+              <a:buFont typeface="Arial" panose="020B0604020202020204" pitchFamily="34" charset="0"/>
+              <a:buChar char="•"/>
+            </a:pPr>
+            <a:r>
+              <a:rPr lang="en-US" sz="800" b="1" dirty="0">
+                <a:latin typeface="ui-sans-serif"/>
+              </a:rPr>
+              <a:t>Computational Requirements</a:t>
+            </a:r>
+            <a:r>
+              <a:rPr lang="en-US" sz="800" dirty="0">
+                <a:latin typeface="ui-sans-serif"/>
+              </a:rPr>
+              <a:t>: CPU, moderate memory for a single sample</a:t>
+            </a:r>
+          </a:p>
+          <a:p>
+            <a:pPr marL="230188" indent="-115888">
+              <a:buFont typeface="Arial" panose="020B0604020202020204" pitchFamily="34" charset="0"/>
+              <a:buChar char="•"/>
+            </a:pPr>
+            <a:r>
+              <a:rPr lang="en-US" sz="800" b="1" dirty="0">
+                <a:latin typeface="ui-sans-serif"/>
+              </a:rPr>
+              <a:t>why this tool</a:t>
+            </a:r>
+            <a:r>
+              <a:rPr lang="en-US" sz="800" dirty="0">
+                <a:latin typeface="ui-sans-serif"/>
+              </a:rPr>
+              <a:t>: </a:t>
+            </a:r>
+            <a:r>
+              <a:rPr lang="en-US" sz="800" dirty="0" err="1">
+                <a:latin typeface="ui-sans-serif"/>
+              </a:rPr>
+              <a:t>BayesSpace</a:t>
+            </a:r>
+            <a:r>
+              <a:rPr lang="en-US" sz="800" dirty="0">
+                <a:latin typeface="ui-sans-serif"/>
+              </a:rPr>
+              <a:t> is the gold standard for spatial clustering in </a:t>
+            </a:r>
+            <a:r>
+              <a:rPr lang="en-US" sz="800" dirty="0" err="1">
+                <a:latin typeface="ui-sans-serif"/>
+              </a:rPr>
+              <a:t>Visium</a:t>
+            </a:r>
+            <a:r>
+              <a:rPr lang="en-US" sz="800" dirty="0">
+                <a:latin typeface="ui-sans-serif"/>
+              </a:rPr>
+              <a:t> data, integrates seamlessly with R workflows, and is efficient on Mac/CPU. It is widely used in human cancer spatial transcriptomics.</a:t>
+            </a:r>
+          </a:p>
+          <a:p>
+            <a:pPr>
+              <a:buNone/>
+            </a:pPr>
+            <a:endParaRPr lang="en-US" sz="800" dirty="0"/>
+          </a:p>
+          <a:p>
+            <a:pPr>
+              <a:spcBef>
+                <a:spcPts val="100"/>
+              </a:spcBef>
+              <a:spcAft>
+                <a:spcPts val="500"/>
+              </a:spcAft>
+            </a:pPr>
+            <a:r>
+              <a:rPr lang="en-US" sz="900" b="1" dirty="0">
+                <a:latin typeface="ui-sans-serif"/>
+              </a:rPr>
+              <a:t>📊 Computational Overview</a:t>
+            </a:r>
+          </a:p>
+          <a:p>
+            <a:pPr marL="230188" indent="-115888">
+              <a:buFont typeface="Arial" panose="020B0604020202020204" pitchFamily="34" charset="0"/>
+              <a:buChar char="•"/>
+            </a:pPr>
+            <a:r>
+              <a:rPr lang="en-US" sz="800" b="1" dirty="0">
+                <a:latin typeface="ui-sans-serif"/>
+              </a:rPr>
+              <a:t>Total RAM Required</a:t>
+            </a:r>
+            <a:r>
+              <a:rPr lang="en-US" sz="800" dirty="0">
+                <a:latin typeface="ui-sans-serif"/>
+              </a:rPr>
+              <a:t>: Low to moderate (CARD is highly efficient; </a:t>
+            </a:r>
+            <a:r>
+              <a:rPr lang="en-US" sz="800" dirty="0" err="1">
+                <a:latin typeface="ui-sans-serif"/>
+              </a:rPr>
+              <a:t>BayesSpace</a:t>
+            </a:r>
+            <a:r>
+              <a:rPr lang="en-US" sz="800" dirty="0">
+                <a:latin typeface="ui-sans-serif"/>
+              </a:rPr>
+              <a:t> is moderate for a single sample)</a:t>
+            </a:r>
+          </a:p>
+          <a:p>
+            <a:pPr marL="230188" indent="-115888">
+              <a:buFont typeface="Arial" panose="020B0604020202020204" pitchFamily="34" charset="0"/>
+              <a:buChar char="•"/>
+            </a:pPr>
+            <a:r>
+              <a:rPr lang="en-US" sz="800" b="1" dirty="0">
+                <a:latin typeface="ui-sans-serif"/>
+              </a:rPr>
+              <a:t>GPU Required</a:t>
+            </a:r>
+            <a:r>
+              <a:rPr lang="en-US" sz="800" dirty="0">
+                <a:latin typeface="ui-sans-serif"/>
+              </a:rPr>
+              <a:t>: No</a:t>
+            </a:r>
+          </a:p>
+          <a:p>
+            <a:pPr marL="230188" indent="-115888">
+              <a:buFont typeface="Arial" panose="020B0604020202020204" pitchFamily="34" charset="0"/>
+              <a:buChar char="•"/>
+            </a:pPr>
+            <a:r>
+              <a:rPr lang="en-US" sz="800" b="1" dirty="0">
+                <a:latin typeface="ui-sans-serif"/>
+              </a:rPr>
+              <a:t>Estimated Runtime</a:t>
+            </a:r>
+            <a:r>
+              <a:rPr lang="en-US" sz="800" dirty="0">
+                <a:latin typeface="ui-sans-serif"/>
+              </a:rPr>
+              <a:t>: Under 1 hour for a single </a:t>
+            </a:r>
+            <a:r>
+              <a:rPr lang="en-US" sz="800" dirty="0" err="1">
+                <a:latin typeface="ui-sans-serif"/>
+              </a:rPr>
+              <a:t>Visium</a:t>
+            </a:r>
+            <a:r>
+              <a:rPr lang="en-US" sz="800" dirty="0">
+                <a:latin typeface="ui-sans-serif"/>
+              </a:rPr>
+              <a:t> sample on a modern Mac CPU</a:t>
+            </a:r>
+          </a:p>
+          <a:p>
+            <a:pPr marL="230188" indent="-115888">
+              <a:buFont typeface="Arial" panose="020B0604020202020204" pitchFamily="34" charset="0"/>
+              <a:buChar char="•"/>
+            </a:pPr>
+            <a:endParaRPr lang="en-US" sz="800" dirty="0"/>
+          </a:p>
+          <a:p>
+            <a:pPr>
+              <a:spcBef>
+                <a:spcPts val="100"/>
+              </a:spcBef>
+              <a:spcAft>
+                <a:spcPts val="500"/>
+              </a:spcAft>
+            </a:pPr>
+            <a:r>
+              <a:rPr lang="en-US" sz="900" b="1" dirty="0">
+                <a:latin typeface="ui-sans-serif"/>
+              </a:rPr>
+              <a:t>📚 Sources</a:t>
+            </a:r>
+          </a:p>
+          <a:p>
+            <a:pPr marL="230188" indent="-115888">
+              <a:buFont typeface="Arial" panose="020B0604020202020204" pitchFamily="34" charset="0"/>
+              <a:buChar char="•"/>
+            </a:pPr>
+            <a:r>
+              <a:rPr lang="en-US" sz="800" dirty="0">
+                <a:latin typeface="ui-sans-serif"/>
+              </a:rPr>
+              <a:t>CARD: "</a:t>
+            </a:r>
+            <a:r>
+              <a:rPr lang="en-US" sz="800" dirty="0" err="1">
+                <a:latin typeface="ui-sans-serif"/>
+              </a:rPr>
+              <a:t>CARD.pdf</a:t>
+            </a:r>
+            <a:r>
+              <a:rPr lang="en-US" sz="800" dirty="0">
+                <a:latin typeface="ui-sans-serif"/>
+              </a:rPr>
+              <a:t>" (see Supplementary Table 5, 6 for efficiency and memory benchmarks)</a:t>
+            </a:r>
+          </a:p>
+          <a:p>
+            <a:pPr marL="230188" indent="-115888">
+              <a:buFont typeface="Arial" panose="020B0604020202020204" pitchFamily="34" charset="0"/>
+              <a:buChar char="•"/>
+            </a:pPr>
+            <a:r>
+              <a:rPr lang="en-US" sz="800" dirty="0" err="1">
+                <a:latin typeface="ui-sans-serif"/>
+              </a:rPr>
+              <a:t>BayesSpace</a:t>
+            </a:r>
+            <a:r>
+              <a:rPr lang="en-US" sz="800" dirty="0">
+                <a:latin typeface="ui-sans-serif"/>
+              </a:rPr>
+              <a:t>: "</a:t>
+            </a:r>
+            <a:r>
+              <a:rPr lang="en-US" sz="800" dirty="0" err="1">
+                <a:latin typeface="ui-sans-serif"/>
+              </a:rPr>
+              <a:t>BayesSpace.pdf</a:t>
+            </a:r>
+            <a:r>
+              <a:rPr lang="en-US" sz="800" dirty="0">
+                <a:latin typeface="ui-sans-serif"/>
+              </a:rPr>
+              <a:t>" (see Discussion and Methods for </a:t>
+            </a:r>
+            <a:r>
+              <a:rPr lang="en-US" sz="800" dirty="0" err="1">
+                <a:latin typeface="ui-sans-serif"/>
+              </a:rPr>
+              <a:t>Visium</a:t>
+            </a:r>
+            <a:r>
+              <a:rPr lang="en-US" sz="800" dirty="0">
+                <a:latin typeface="ui-sans-serif"/>
+              </a:rPr>
+              <a:t>/CPU compatibility)</a:t>
+            </a:r>
+          </a:p>
+          <a:p>
+            <a:pPr marL="230188" indent="-115888">
+              <a:buFont typeface="Arial" panose="020B0604020202020204" pitchFamily="34" charset="0"/>
+              <a:buChar char="•"/>
+            </a:pPr>
+            <a:r>
+              <a:rPr lang="en-US" sz="800" dirty="0">
+                <a:latin typeface="ui-sans-serif"/>
+              </a:rPr>
+              <a:t>IRIS: "</a:t>
+            </a:r>
+            <a:r>
+              <a:rPr lang="en-US" sz="800" dirty="0" err="1">
+                <a:latin typeface="ui-sans-serif"/>
+              </a:rPr>
+              <a:t>IRIS.pdf</a:t>
+            </a:r>
+            <a:r>
+              <a:rPr lang="en-US" sz="800" dirty="0">
+                <a:latin typeface="ui-sans-serif"/>
+              </a:rPr>
+              <a:t>" (alternative, but CARD/</a:t>
+            </a:r>
+            <a:r>
+              <a:rPr lang="en-US" sz="800" dirty="0" err="1">
+                <a:latin typeface="ui-sans-serif"/>
+              </a:rPr>
+              <a:t>BayesSpace</a:t>
+            </a:r>
+            <a:r>
+              <a:rPr lang="en-US" sz="800" dirty="0">
+                <a:latin typeface="ui-sans-serif"/>
+              </a:rPr>
+              <a:t> are more widely benchmarked)</a:t>
+            </a:r>
+          </a:p>
+          <a:p>
+            <a:pPr marL="230188" indent="-115888">
+              <a:buFont typeface="Arial" panose="020B0604020202020204" pitchFamily="34" charset="0"/>
+              <a:buChar char="•"/>
+            </a:pPr>
+            <a:r>
+              <a:rPr lang="en-US" sz="800" dirty="0" err="1">
+                <a:latin typeface="ui-sans-serif"/>
+              </a:rPr>
+              <a:t>SPOTlight</a:t>
+            </a:r>
+            <a:r>
+              <a:rPr lang="en-US" sz="800" dirty="0">
+                <a:latin typeface="ui-sans-serif"/>
+              </a:rPr>
+              <a:t>: "</a:t>
+            </a:r>
+            <a:r>
+              <a:rPr lang="en-US" sz="800" dirty="0" err="1">
+                <a:latin typeface="ui-sans-serif"/>
+              </a:rPr>
+              <a:t>SPOTlight.pdf</a:t>
+            </a:r>
+            <a:r>
+              <a:rPr lang="en-US" sz="800" dirty="0">
+                <a:latin typeface="ui-sans-serif"/>
+              </a:rPr>
+              <a:t>" (alternative deconvolution)</a:t>
+            </a:r>
+          </a:p>
+          <a:p>
+            <a:pPr marL="230188" indent="-115888">
+              <a:buFont typeface="Arial" panose="020B0604020202020204" pitchFamily="34" charset="0"/>
+              <a:buChar char="•"/>
+            </a:pPr>
+            <a:r>
+              <a:rPr lang="en-US" sz="800" dirty="0">
+                <a:latin typeface="ui-sans-serif"/>
+              </a:rPr>
+              <a:t>Cell2Location: "Cell2Location.pdf" (alternative deconvolution)</a:t>
+            </a:r>
+          </a:p>
+          <a:p>
+            <a:pPr marL="230188" indent="-115888">
+              <a:buFont typeface="Arial" panose="020B0604020202020204" pitchFamily="34" charset="0"/>
+              <a:buChar char="•"/>
+            </a:pPr>
+            <a:r>
+              <a:rPr lang="en-US" sz="800" dirty="0" err="1">
+                <a:latin typeface="ui-sans-serif"/>
+              </a:rPr>
+              <a:t>CellCharter</a:t>
+            </a:r>
+            <a:r>
+              <a:rPr lang="en-US" sz="800" dirty="0">
+                <a:latin typeface="ui-sans-serif"/>
+              </a:rPr>
+              <a:t>: "</a:t>
+            </a:r>
+            <a:r>
+              <a:rPr lang="en-US" sz="800" dirty="0" err="1">
+                <a:latin typeface="ui-sans-serif"/>
+              </a:rPr>
+              <a:t>CellCharter.pdf</a:t>
+            </a:r>
+            <a:r>
+              <a:rPr lang="en-US" sz="800" dirty="0">
+                <a:latin typeface="ui-sans-serif"/>
+              </a:rPr>
+              <a:t>" (alternative clustering)</a:t>
+            </a:r>
+          </a:p>
+          <a:p>
+            <a:pPr marL="230188" indent="-115888">
+              <a:buFont typeface="Arial" panose="020B0604020202020204" pitchFamily="34" charset="0"/>
+              <a:buChar char="•"/>
+            </a:pPr>
+            <a:r>
+              <a:rPr lang="en-US" sz="800" dirty="0" err="1">
+                <a:latin typeface="ui-sans-serif"/>
+              </a:rPr>
+              <a:t>GraphST</a:t>
+            </a:r>
+            <a:r>
+              <a:rPr lang="en-US" sz="800" dirty="0">
+                <a:latin typeface="ui-sans-serif"/>
+              </a:rPr>
+              <a:t>: "</a:t>
+            </a:r>
+            <a:r>
+              <a:rPr lang="en-US" sz="800" dirty="0" err="1">
+                <a:latin typeface="ui-sans-serif"/>
+              </a:rPr>
+              <a:t>GraphST.pdf</a:t>
+            </a:r>
+            <a:r>
+              <a:rPr lang="en-US" sz="800" dirty="0">
+                <a:latin typeface="ui-sans-serif"/>
+              </a:rPr>
+              <a:t>" (alternative clustering)</a:t>
+            </a:r>
+          </a:p>
+          <a:p>
+            <a:pPr>
+              <a:buNone/>
+            </a:pPr>
+            <a:br>
+              <a:rPr lang="en-US" sz="800" dirty="0"/>
+            </a:br>
+            <a:endParaRPr lang="en-US" sz="800" dirty="0"/>
+          </a:p>
+          <a:p>
+            <a:pPr>
+              <a:spcBef>
+                <a:spcPts val="100"/>
+              </a:spcBef>
+              <a:spcAft>
+                <a:spcPts val="500"/>
+              </a:spcAft>
+            </a:pPr>
+            <a:r>
+              <a:rPr lang="en-US" sz="800" b="1" dirty="0">
+                <a:latin typeface="ui-sans-serif"/>
+              </a:rPr>
+              <a:t>This pipeline is optimal for your scenario: efficient, reproducible, and widely used in the field.</a:t>
+            </a:r>
+            <a:endParaRPr lang="en-US" sz="800" dirty="0">
+              <a:latin typeface="ui-sans-serif"/>
+            </a:endParaRPr>
+          </a:p>
+        </p:txBody>
+      </p:sp>
+      <p:sp>
+        <p:nvSpPr>
+          <p:cNvPr id="12" name="TextBox 11">
+            <a:extLst>
+              <a:ext uri="{FF2B5EF4-FFF2-40B4-BE49-F238E27FC236}">
+                <a16:creationId xmlns:a16="http://schemas.microsoft.com/office/drawing/2014/main" id="{B5BE9738-100F-96C5-B6F7-5FBB0237AF9F}"/>
+              </a:ext>
+            </a:extLst>
+          </p:cNvPr>
+          <p:cNvSpPr txBox="1"/>
+          <p:nvPr/>
+        </p:nvSpPr>
+        <p:spPr>
+          <a:xfrm>
+            <a:off x="6817679" y="8015369"/>
+            <a:ext cx="2430208" cy="2026196"/>
+          </a:xfrm>
+          <a:prstGeom prst="rect">
+            <a:avLst/>
+          </a:prstGeom>
+          <a:ln w="12700"/>
+        </p:spPr>
+        <p:style>
+          <a:lnRef idx="2">
+            <a:schemeClr val="dk1"/>
+          </a:lnRef>
+          <a:fillRef idx="1">
+            <a:schemeClr val="lt1"/>
+          </a:fillRef>
+          <a:effectRef idx="0">
+            <a:schemeClr val="dk1"/>
+          </a:effectRef>
+          <a:fontRef idx="minor">
+            <a:schemeClr val="dk1"/>
+          </a:fontRef>
+        </p:style>
+        <p:txBody>
+          <a:bodyPr wrap="square" lIns="0" tIns="45720" rIns="0" bIns="45720" rtlCol="0" anchor="ctr">
+            <a:spAutoFit/>
+          </a:bodyPr>
+          <a:lstStyle/>
+          <a:p>
+            <a:pPr marL="61913" defTabSz="914400" eaLnBrk="0" fontAlgn="base" hangingPunct="0">
+              <a:spcBef>
+                <a:spcPts val="100"/>
+              </a:spcBef>
+              <a:spcAft>
+                <a:spcPts val="500"/>
+              </a:spcAft>
+            </a:pPr>
+            <a:r>
+              <a:rPr lang="en-US" altLang="en-US" sz="700" b="1" dirty="0">
+                <a:solidFill>
+                  <a:schemeClr val="tx1"/>
+                </a:solidFill>
+                <a:latin typeface="ui-sans-serif"/>
+              </a:rPr>
+              <a:t>Human Input Required</a:t>
+            </a:r>
+          </a:p>
+          <a:p>
+            <a:pPr marL="61913" defTabSz="914400" eaLnBrk="0" fontAlgn="base" hangingPunct="0">
+              <a:spcBef>
+                <a:spcPts val="100"/>
+              </a:spcBef>
+              <a:spcAft>
+                <a:spcPts val="500"/>
+              </a:spcAft>
+            </a:pPr>
+            <a:r>
+              <a:rPr lang="en-US" altLang="en-US" sz="700" b="1" dirty="0">
+                <a:solidFill>
+                  <a:schemeClr val="tx1"/>
+                </a:solidFill>
+                <a:latin typeface="ui-sans-serif"/>
+              </a:rPr>
+              <a:t>Please choose one of the following options: </a:t>
+            </a:r>
+          </a:p>
+          <a:p>
+            <a:pPr marL="61913" defTabSz="914400" eaLnBrk="0" fontAlgn="base" hangingPunct="0">
+              <a:spcBef>
+                <a:spcPts val="100"/>
+              </a:spcBef>
+              <a:spcAft>
+                <a:spcPts val="100"/>
+              </a:spcAft>
+            </a:pPr>
+            <a:r>
+              <a:rPr lang="en-US" altLang="en-US" sz="700" b="1" dirty="0">
+                <a:solidFill>
+                  <a:schemeClr val="tx1"/>
+                </a:solidFill>
+                <a:latin typeface="ui-sans-serif"/>
+              </a:rPr>
+              <a:t>1️⃣ Default Pipeline - Proceed with the suggested pipeline</a:t>
+            </a:r>
+          </a:p>
+          <a:p>
+            <a:pPr marL="61913" defTabSz="914400" eaLnBrk="0" fontAlgn="base" hangingPunct="0">
+              <a:spcBef>
+                <a:spcPts val="100"/>
+              </a:spcBef>
+              <a:spcAft>
+                <a:spcPts val="500"/>
+              </a:spcAft>
+            </a:pPr>
+            <a:r>
+              <a:rPr lang="en-US" altLang="en-US" sz="700" b="1" dirty="0">
+                <a:solidFill>
+                  <a:schemeClr val="tx1"/>
+                </a:solidFill>
+                <a:latin typeface="ui-sans-serif"/>
+              </a:rPr>
+              <a:t> </a:t>
+            </a:r>
+            <a:r>
+              <a:rPr lang="ko-KR" altLang="en-US" sz="700" b="1" dirty="0">
+                <a:solidFill>
+                  <a:schemeClr val="tx1"/>
+                </a:solidFill>
+                <a:latin typeface="ui-sans-serif"/>
+              </a:rPr>
+              <a:t>  </a:t>
+            </a:r>
+            <a:r>
+              <a:rPr lang="en-US" altLang="en-US" sz="700" b="1" dirty="0">
+                <a:solidFill>
+                  <a:schemeClr val="tx1"/>
+                </a:solidFill>
+                <a:latin typeface="ui-sans-serif"/>
+              </a:rPr>
+              <a:t>↳ Type: "1", "default" or "proceed" </a:t>
+            </a:r>
+          </a:p>
+          <a:p>
+            <a:pPr marL="61913" defTabSz="914400" eaLnBrk="0" fontAlgn="base" hangingPunct="0">
+              <a:spcBef>
+                <a:spcPts val="100"/>
+              </a:spcBef>
+              <a:spcAft>
+                <a:spcPts val="100"/>
+              </a:spcAft>
+            </a:pPr>
+            <a:r>
+              <a:rPr lang="en-US" altLang="en-US" sz="700" b="1" dirty="0">
+                <a:solidFill>
+                  <a:schemeClr val="tx1"/>
+                </a:solidFill>
+                <a:latin typeface="ui-sans-serif"/>
+              </a:rPr>
+              <a:t>2️⃣ Customize Pipeline - Modify specific components </a:t>
+            </a:r>
+          </a:p>
+          <a:p>
+            <a:pPr marL="61913" defTabSz="914400" eaLnBrk="0" fontAlgn="base" hangingPunct="0">
+              <a:spcBef>
+                <a:spcPts val="100"/>
+              </a:spcBef>
+              <a:spcAft>
+                <a:spcPts val="500"/>
+              </a:spcAft>
+            </a:pPr>
+            <a:r>
+              <a:rPr lang="ko-KR" altLang="en-US" sz="700" b="1" dirty="0">
+                <a:solidFill>
+                  <a:schemeClr val="tx1"/>
+                </a:solidFill>
+                <a:latin typeface="ui-sans-serif"/>
+              </a:rPr>
+              <a:t>  </a:t>
+            </a:r>
+            <a:r>
+              <a:rPr lang="en-US" altLang="en-US" sz="700" b="1" dirty="0">
+                <a:solidFill>
+                  <a:schemeClr val="tx1"/>
+                </a:solidFill>
+                <a:latin typeface="ui-sans-serif"/>
+              </a:rPr>
+              <a:t>↳ Type: "2", "custom" or "update" </a:t>
+            </a:r>
+          </a:p>
+          <a:p>
+            <a:pPr marL="61913" defTabSz="914400" eaLnBrk="0" fontAlgn="base" hangingPunct="0">
+              <a:spcBef>
+                <a:spcPts val="100"/>
+              </a:spcBef>
+              <a:spcAft>
+                <a:spcPts val="100"/>
+              </a:spcAft>
+            </a:pPr>
+            <a:r>
+              <a:rPr lang="en-US" altLang="en-US" sz="700" b="1" dirty="0">
+                <a:solidFill>
+                  <a:schemeClr val="tx1"/>
+                </a:solidFill>
+                <a:latin typeface="ui-sans-serif"/>
+              </a:rPr>
+              <a:t>3️⃣ Reference-based Pipeline - Use </a:t>
+            </a:r>
+            <a:r>
+              <a:rPr lang="en-US" altLang="en-US" sz="700" b="1" dirty="0" err="1">
+                <a:solidFill>
+                  <a:schemeClr val="tx1"/>
+                </a:solidFill>
+                <a:latin typeface="ui-sans-serif"/>
+              </a:rPr>
+              <a:t>DeepMAST</a:t>
+            </a:r>
+            <a:r>
+              <a:rPr lang="en-US" altLang="en-US" sz="700" b="1" dirty="0">
+                <a:solidFill>
+                  <a:schemeClr val="tx1"/>
+                </a:solidFill>
+                <a:latin typeface="ui-sans-serif"/>
+              </a:rPr>
+              <a:t>-RAG to find  </a:t>
+            </a:r>
+          </a:p>
+          <a:p>
+            <a:pPr marL="61913" defTabSz="914400" eaLnBrk="0" fontAlgn="base" hangingPunct="0">
+              <a:spcBef>
+                <a:spcPts val="100"/>
+              </a:spcBef>
+              <a:spcAft>
+                <a:spcPts val="100"/>
+              </a:spcAft>
+            </a:pPr>
+            <a:r>
+              <a:rPr lang="en-US" altLang="en-US" sz="700" b="1" dirty="0">
+                <a:solidFill>
+                  <a:schemeClr val="tx1"/>
+                </a:solidFill>
+                <a:latin typeface="ui-sans-serif"/>
+              </a:rPr>
+              <a:t>      methods from literature </a:t>
+            </a:r>
+          </a:p>
+          <a:p>
+            <a:pPr marL="61913" defTabSz="914400" eaLnBrk="0" fontAlgn="base" hangingPunct="0">
+              <a:spcBef>
+                <a:spcPts val="100"/>
+              </a:spcBef>
+              <a:spcAft>
+                <a:spcPts val="500"/>
+              </a:spcAft>
+            </a:pPr>
+            <a:r>
+              <a:rPr lang="ko-KR" altLang="en-US" sz="700" b="1" dirty="0">
+                <a:solidFill>
+                  <a:schemeClr val="tx1"/>
+                </a:solidFill>
+                <a:latin typeface="ui-sans-serif"/>
+              </a:rPr>
+              <a:t>  </a:t>
+            </a:r>
+            <a:r>
+              <a:rPr lang="en-US" altLang="en-US" sz="700" b="1" dirty="0">
+                <a:solidFill>
+                  <a:schemeClr val="tx1"/>
+                </a:solidFill>
+                <a:latin typeface="ui-sans-serif"/>
+              </a:rPr>
+              <a:t>↳ Type: "3", "reference" or "select" </a:t>
+            </a:r>
+          </a:p>
+          <a:p>
+            <a:pPr marL="61913" defTabSz="914400" eaLnBrk="0" fontAlgn="base" hangingPunct="0">
+              <a:spcBef>
+                <a:spcPts val="100"/>
+              </a:spcBef>
+              <a:spcAft>
+                <a:spcPts val="500"/>
+              </a:spcAft>
+            </a:pPr>
+            <a:r>
+              <a:rPr lang="en-US" altLang="en-US" sz="700" b="1" dirty="0">
+                <a:solidFill>
+                  <a:schemeClr val="tx1"/>
+                </a:solidFill>
+                <a:latin typeface="ui-sans-serif"/>
+              </a:rPr>
+              <a:t>What would you like to do?</a:t>
+            </a:r>
+          </a:p>
+          <a:p>
+            <a:pPr marL="61913" defTabSz="914400" eaLnBrk="0" fontAlgn="base" hangingPunct="0">
+              <a:spcBef>
+                <a:spcPts val="100"/>
+              </a:spcBef>
+              <a:spcAft>
+                <a:spcPts val="500"/>
+              </a:spcAft>
+            </a:pPr>
+            <a:r>
+              <a:rPr lang="en-US" altLang="en-US" sz="700" b="1" dirty="0">
+                <a:solidFill>
+                  <a:schemeClr val="tx1"/>
+                </a:solidFill>
+                <a:latin typeface="ui-sans-serif"/>
+              </a:rPr>
+              <a:t>Please provide your response:</a:t>
+            </a:r>
+          </a:p>
+          <a:p>
+            <a:pPr marL="61913" defTabSz="914400" eaLnBrk="0" fontAlgn="base" hangingPunct="0">
+              <a:spcBef>
+                <a:spcPts val="100"/>
+              </a:spcBef>
+              <a:spcAft>
+                <a:spcPts val="500"/>
+              </a:spcAft>
+            </a:pPr>
+            <a:r>
+              <a:rPr lang="en-US" altLang="en-US" sz="700" b="1" dirty="0">
+                <a:solidFill>
+                  <a:schemeClr val="bg1">
+                    <a:lumMod val="85000"/>
+                  </a:schemeClr>
+                </a:solidFill>
+                <a:latin typeface="ui-sans-serif"/>
+              </a:rPr>
+              <a:t>   Enter your response…</a:t>
+            </a:r>
+          </a:p>
+        </p:txBody>
+      </p:sp>
+      <p:sp>
+        <p:nvSpPr>
+          <p:cNvPr id="18" name="Oval Callout 17">
+            <a:extLst>
+              <a:ext uri="{FF2B5EF4-FFF2-40B4-BE49-F238E27FC236}">
+                <a16:creationId xmlns:a16="http://schemas.microsoft.com/office/drawing/2014/main" id="{199E7EC7-B16C-BDBB-E31D-B258C4124060}"/>
+              </a:ext>
+            </a:extLst>
+          </p:cNvPr>
+          <p:cNvSpPr/>
+          <p:nvPr/>
+        </p:nvSpPr>
+        <p:spPr>
+          <a:xfrm>
+            <a:off x="7144463" y="5442858"/>
+            <a:ext cx="2122366" cy="668004"/>
+          </a:xfrm>
+          <a:prstGeom prst="wedgeEllipseCallout">
+            <a:avLst>
+              <a:gd name="adj1" fmla="val -59197"/>
+              <a:gd name="adj2" fmla="val 5638"/>
+            </a:avLst>
+          </a:prstGeom>
+          <a:ln w="12700"/>
+        </p:spPr>
+        <p:style>
+          <a:lnRef idx="2">
+            <a:schemeClr val="dk1"/>
+          </a:lnRef>
+          <a:fillRef idx="1">
+            <a:schemeClr val="lt1"/>
+          </a:fillRef>
+          <a:effectRef idx="0">
+            <a:schemeClr val="dk1"/>
+          </a:effectRef>
+          <a:fontRef idx="minor">
+            <a:schemeClr val="dk1"/>
+          </a:fontRef>
+        </p:style>
+        <p:txBody>
+          <a:bodyPr lIns="45720" tIns="0" rIns="45720" bIns="0" rtlCol="0" anchor="ctr"/>
+          <a:lstStyle/>
+          <a:p>
+            <a:pPr defTabSz="914400" eaLnBrk="0" fontAlgn="base" hangingPunct="0">
+              <a:spcBef>
+                <a:spcPct val="0"/>
+              </a:spcBef>
+              <a:spcAft>
+                <a:spcPct val="0"/>
+              </a:spcAft>
+            </a:pPr>
+            <a:r>
+              <a:rPr lang="en-US" altLang="en-US" sz="800" b="1" dirty="0">
+                <a:solidFill>
+                  <a:schemeClr val="tx1"/>
+                </a:solidFill>
+                <a:latin typeface="ui-sans-serif"/>
+              </a:rPr>
+              <a:t>I need a pipeline for analyzing one breast cancer </a:t>
+            </a:r>
+            <a:r>
+              <a:rPr lang="en-US" altLang="en-US" sz="800" b="1" dirty="0" err="1">
+                <a:solidFill>
+                  <a:schemeClr val="tx1"/>
+                </a:solidFill>
+                <a:latin typeface="ui-sans-serif"/>
+              </a:rPr>
+              <a:t>Visium</a:t>
+            </a:r>
+            <a:r>
+              <a:rPr lang="en-US" altLang="en-US" sz="800" b="1" dirty="0">
+                <a:solidFill>
+                  <a:schemeClr val="tx1"/>
+                </a:solidFill>
+                <a:latin typeface="ui-sans-serif"/>
+              </a:rPr>
+              <a:t> sample on a Mac (CPU only), with spatial clustering or cell type analysis.</a:t>
+            </a:r>
+          </a:p>
+        </p:txBody>
+      </p:sp>
+      <p:sp>
+        <p:nvSpPr>
+          <p:cNvPr id="24" name="TextBox 23">
+            <a:extLst>
+              <a:ext uri="{FF2B5EF4-FFF2-40B4-BE49-F238E27FC236}">
+                <a16:creationId xmlns:a16="http://schemas.microsoft.com/office/drawing/2014/main" id="{E39211CA-E2AC-CBE3-16BF-1E6501F75F35}"/>
+              </a:ext>
+            </a:extLst>
+          </p:cNvPr>
+          <p:cNvSpPr txBox="1"/>
+          <p:nvPr/>
+        </p:nvSpPr>
+        <p:spPr>
+          <a:xfrm>
+            <a:off x="6828635" y="6193585"/>
+            <a:ext cx="2408296" cy="1717393"/>
+          </a:xfrm>
+          <a:prstGeom prst="rect">
+            <a:avLst/>
+          </a:prstGeom>
+          <a:ln w="12700"/>
+        </p:spPr>
+        <p:style>
+          <a:lnRef idx="2">
+            <a:schemeClr val="dk1"/>
+          </a:lnRef>
+          <a:fillRef idx="1">
+            <a:schemeClr val="lt1"/>
+          </a:fillRef>
+          <a:effectRef idx="0">
+            <a:schemeClr val="dk1"/>
+          </a:effectRef>
+          <a:fontRef idx="minor">
+            <a:schemeClr val="dk1"/>
+          </a:fontRef>
+        </p:style>
+        <p:txBody>
+          <a:bodyPr wrap="square" lIns="0" tIns="45720" rIns="0" bIns="45720" rtlCol="0" anchor="ctr">
+            <a:spAutoFit/>
+          </a:bodyPr>
+          <a:lstStyle/>
+          <a:p>
+            <a:pPr marL="61913"/>
+            <a:r>
+              <a:rPr lang="en-US" sz="700" b="1" dirty="0">
+                <a:solidFill>
+                  <a:schemeClr val="tx1"/>
+                </a:solidFill>
+                <a:latin typeface="ui-sans-serif"/>
+              </a:rPr>
+              <a:t>✅ Information Collection Complete!</a:t>
+            </a:r>
+          </a:p>
+          <a:p>
+            <a:pPr marL="61913"/>
+            <a:r>
+              <a:rPr lang="en-US" sz="700" b="1" dirty="0">
+                <a:solidFill>
+                  <a:schemeClr val="tx1"/>
+                </a:solidFill>
+                <a:latin typeface="ui-sans-serif"/>
+              </a:rPr>
+              <a:t>Based on your inputs:</a:t>
+            </a:r>
+          </a:p>
+          <a:p>
+            <a:pPr marL="233363" indent="-114300">
+              <a:buFont typeface="Arial" panose="020B0604020202020204" pitchFamily="34" charset="0"/>
+              <a:buChar char="•"/>
+            </a:pPr>
+            <a:r>
+              <a:rPr lang="en-US" sz="700" b="1" dirty="0">
+                <a:solidFill>
+                  <a:schemeClr val="tx1"/>
+                </a:solidFill>
+                <a:latin typeface="ui-sans-serif"/>
+              </a:rPr>
+              <a:t>ST Technology: </a:t>
+            </a:r>
+            <a:r>
+              <a:rPr lang="en-US" sz="700" b="1" dirty="0" err="1">
+                <a:solidFill>
+                  <a:schemeClr val="tx1"/>
+                </a:solidFill>
+                <a:latin typeface="ui-sans-serif"/>
+              </a:rPr>
+              <a:t>Visium</a:t>
+            </a:r>
+            <a:r>
+              <a:rPr lang="en-US" sz="700" b="1" dirty="0">
+                <a:solidFill>
+                  <a:schemeClr val="tx1"/>
+                </a:solidFill>
+                <a:latin typeface="ui-sans-serif"/>
+              </a:rPr>
+              <a:t> (spot-based)</a:t>
+            </a:r>
+          </a:p>
+          <a:p>
+            <a:pPr marL="233363" indent="-114300">
+              <a:buFont typeface="Arial" panose="020B0604020202020204" pitchFamily="34" charset="0"/>
+              <a:buChar char="•"/>
+            </a:pPr>
+            <a:r>
+              <a:rPr lang="en-US" sz="700" b="1" dirty="0">
+                <a:solidFill>
+                  <a:schemeClr val="tx1"/>
+                </a:solidFill>
+                <a:latin typeface="ui-sans-serif"/>
+              </a:rPr>
+              <a:t>Disease: breast cancer</a:t>
+            </a:r>
+          </a:p>
+          <a:p>
+            <a:pPr marL="233363" indent="-114300">
+              <a:buFont typeface="Arial" panose="020B0604020202020204" pitchFamily="34" charset="0"/>
+              <a:buChar char="•"/>
+            </a:pPr>
+            <a:r>
+              <a:rPr lang="en-US" sz="700" b="1" dirty="0">
+                <a:solidFill>
+                  <a:schemeClr val="tx1"/>
+                </a:solidFill>
+                <a:latin typeface="ui-sans-serif"/>
+              </a:rPr>
+              <a:t>Species: human</a:t>
+            </a:r>
+          </a:p>
+          <a:p>
+            <a:pPr marL="233363" indent="-114300">
+              <a:buFont typeface="Arial" panose="020B0604020202020204" pitchFamily="34" charset="0"/>
+              <a:buChar char="•"/>
+            </a:pPr>
+            <a:r>
+              <a:rPr lang="en-US" sz="700" b="1" dirty="0">
+                <a:solidFill>
+                  <a:schemeClr val="tx1"/>
+                </a:solidFill>
+                <a:latin typeface="ui-sans-serif"/>
+              </a:rPr>
+              <a:t>Sample Count: 1</a:t>
+            </a:r>
+          </a:p>
+          <a:p>
+            <a:pPr marL="233363" indent="-114300">
+              <a:buFont typeface="Arial" panose="020B0604020202020204" pitchFamily="34" charset="0"/>
+              <a:buChar char="•"/>
+            </a:pPr>
+            <a:r>
+              <a:rPr lang="en-US" sz="700" b="1" dirty="0">
+                <a:solidFill>
+                  <a:schemeClr val="tx1"/>
+                </a:solidFill>
+                <a:latin typeface="ui-sans-serif"/>
+              </a:rPr>
+              <a:t>OS: Mac</a:t>
+            </a:r>
+          </a:p>
+          <a:p>
+            <a:pPr marL="233363" indent="-114300">
+              <a:buFont typeface="Arial" panose="020B0604020202020204" pitchFamily="34" charset="0"/>
+              <a:buChar char="•"/>
+            </a:pPr>
+            <a:r>
+              <a:rPr lang="en-US" sz="700" b="1" dirty="0">
+                <a:solidFill>
+                  <a:schemeClr val="tx1"/>
+                </a:solidFill>
+                <a:latin typeface="ui-sans-serif"/>
+              </a:rPr>
+              <a:t>Computing: CPU</a:t>
+            </a:r>
+          </a:p>
+          <a:p>
+            <a:pPr marL="233363" indent="-114300">
+              <a:buFont typeface="Arial" panose="020B0604020202020204" pitchFamily="34" charset="0"/>
+              <a:buChar char="•"/>
+            </a:pPr>
+            <a:endParaRPr lang="en-US" sz="700" b="1" dirty="0">
+              <a:solidFill>
+                <a:schemeClr val="tx1"/>
+              </a:solidFill>
+              <a:latin typeface="ui-sans-serif"/>
+            </a:endParaRPr>
+          </a:p>
+          <a:p>
+            <a:pPr marL="61913"/>
+            <a:r>
+              <a:rPr lang="en-US" sz="700" b="1" dirty="0">
+                <a:solidFill>
+                  <a:schemeClr val="tx1"/>
+                </a:solidFill>
+                <a:latin typeface="ui-sans-serif"/>
+              </a:rPr>
+              <a:t>I've generated the following default analysis pipeline:</a:t>
+            </a:r>
+          </a:p>
+          <a:p>
+            <a:pPr marL="61913"/>
+            <a:endParaRPr lang="en-US" sz="700" b="1" dirty="0">
+              <a:solidFill>
+                <a:schemeClr val="tx1"/>
+              </a:solidFill>
+              <a:latin typeface="ui-sans-serif"/>
+            </a:endParaRPr>
+          </a:p>
+          <a:p>
+            <a:pPr marL="61913"/>
+            <a:r>
+              <a:rPr lang="en-US" sz="700" b="1" dirty="0">
+                <a:solidFill>
+                  <a:schemeClr val="tx1"/>
+                </a:solidFill>
+                <a:latin typeface="ui-sans-serif"/>
+              </a:rPr>
+              <a:t>📊 Pipeline Configuration:</a:t>
+            </a:r>
+          </a:p>
+          <a:p>
+            <a:pPr marL="233363" indent="-114300">
+              <a:buFont typeface="Arial" panose="020B0604020202020204" pitchFamily="34" charset="0"/>
+              <a:buChar char="•"/>
+            </a:pPr>
+            <a:r>
+              <a:rPr lang="en-US" sz="700" b="1" dirty="0">
+                <a:solidFill>
+                  <a:schemeClr val="tx1"/>
+                </a:solidFill>
+                <a:latin typeface="ui-sans-serif"/>
+              </a:rPr>
+              <a:t>Normalization: log</a:t>
+            </a:r>
+          </a:p>
+          <a:p>
+            <a:pPr marL="233363" indent="-114300">
+              <a:buFont typeface="Arial" panose="020B0604020202020204" pitchFamily="34" charset="0"/>
+              <a:buChar char="•"/>
+            </a:pPr>
+            <a:r>
+              <a:rPr lang="en-US" sz="700" b="1" dirty="0">
+                <a:solidFill>
+                  <a:schemeClr val="tx1"/>
+                </a:solidFill>
+                <a:latin typeface="ui-sans-serif"/>
+              </a:rPr>
+              <a:t>Cell Type Analysis: IRIS (deconvolution)</a:t>
+            </a:r>
+          </a:p>
+          <a:p>
+            <a:pPr marL="233363" indent="-114300">
+              <a:buFont typeface="Arial" panose="020B0604020202020204" pitchFamily="34" charset="0"/>
+              <a:buChar char="•"/>
+            </a:pPr>
+            <a:r>
+              <a:rPr lang="en-US" sz="700" b="1" dirty="0">
+                <a:solidFill>
+                  <a:schemeClr val="tx1"/>
+                </a:solidFill>
+                <a:latin typeface="ui-sans-serif"/>
+              </a:rPr>
+              <a:t>Spatial Clustering: IRIS</a:t>
+            </a:r>
+          </a:p>
+        </p:txBody>
+      </p:sp>
+      <p:sp>
+        <p:nvSpPr>
+          <p:cNvPr id="25" name="TextBox 24">
+            <a:extLst>
+              <a:ext uri="{FF2B5EF4-FFF2-40B4-BE49-F238E27FC236}">
+                <a16:creationId xmlns:a16="http://schemas.microsoft.com/office/drawing/2014/main" id="{022BD922-CA22-C988-861D-98A09C483E22}"/>
+              </a:ext>
+            </a:extLst>
+          </p:cNvPr>
+          <p:cNvSpPr txBox="1"/>
+          <p:nvPr/>
+        </p:nvSpPr>
+        <p:spPr>
+          <a:xfrm>
+            <a:off x="6826062" y="10667603"/>
+            <a:ext cx="2413445" cy="479618"/>
+          </a:xfrm>
+          <a:prstGeom prst="rect">
+            <a:avLst/>
+          </a:prstGeom>
+          <a:ln w="12700"/>
+        </p:spPr>
+        <p:style>
+          <a:lnRef idx="2">
+            <a:schemeClr val="dk1"/>
+          </a:lnRef>
+          <a:fillRef idx="1">
+            <a:schemeClr val="lt1"/>
+          </a:fillRef>
+          <a:effectRef idx="0">
+            <a:schemeClr val="dk1"/>
+          </a:effectRef>
+          <a:fontRef idx="minor">
+            <a:schemeClr val="dk1"/>
+          </a:fontRef>
+        </p:style>
+        <p:txBody>
+          <a:bodyPr wrap="square" lIns="0" tIns="45720" rIns="0" bIns="45720" rtlCol="0" anchor="ctr">
+            <a:spAutoFit/>
+          </a:bodyPr>
+          <a:lstStyle/>
+          <a:p>
+            <a:pPr marL="57150">
+              <a:spcAft>
+                <a:spcPts val="500"/>
+              </a:spcAft>
+            </a:pPr>
+            <a:r>
+              <a:rPr lang="en-US" sz="700" b="1" dirty="0">
+                <a:solidFill>
+                  <a:schemeClr val="tx1"/>
+                </a:solidFill>
+                <a:latin typeface="ui-sans-serif"/>
+              </a:rPr>
+              <a:t>Generate Query</a:t>
+            </a:r>
+          </a:p>
+          <a:p>
+            <a:pPr marL="114300"/>
+            <a:r>
+              <a:rPr lang="en-US" sz="700" b="1" dirty="0">
+                <a:solidFill>
+                  <a:schemeClr val="tx1"/>
+                </a:solidFill>
+                <a:latin typeface="ui-sans-serif"/>
+              </a:rPr>
+              <a:t>What are the best deconvolution tools for </a:t>
+            </a:r>
+            <a:r>
+              <a:rPr lang="en-US" sz="700" b="1" dirty="0" err="1">
+                <a:solidFill>
+                  <a:schemeClr val="tx1"/>
+                </a:solidFill>
+                <a:latin typeface="ui-sans-serif"/>
+              </a:rPr>
+              <a:t>Visium</a:t>
+            </a:r>
+            <a:r>
+              <a:rPr lang="en-US" sz="700" b="1" dirty="0">
+                <a:solidFill>
+                  <a:schemeClr val="tx1"/>
+                </a:solidFill>
+                <a:latin typeface="ui-sans-serif"/>
+              </a:rPr>
+              <a:t> spot-based spatial transcriptomics data analysis?</a:t>
+            </a:r>
+          </a:p>
+        </p:txBody>
+      </p:sp>
+      <p:sp>
+        <p:nvSpPr>
+          <p:cNvPr id="27" name="TextBox 26">
+            <a:extLst>
+              <a:ext uri="{FF2B5EF4-FFF2-40B4-BE49-F238E27FC236}">
+                <a16:creationId xmlns:a16="http://schemas.microsoft.com/office/drawing/2014/main" id="{A19DA3B3-3946-63A7-506C-47989F26E65B}"/>
+              </a:ext>
+            </a:extLst>
+          </p:cNvPr>
+          <p:cNvSpPr txBox="1"/>
+          <p:nvPr/>
+        </p:nvSpPr>
+        <p:spPr>
+          <a:xfrm>
+            <a:off x="6826062" y="11192361"/>
+            <a:ext cx="2413445" cy="1256754"/>
+          </a:xfrm>
+          <a:prstGeom prst="rect">
+            <a:avLst/>
+          </a:prstGeom>
+          <a:ln w="12700"/>
+        </p:spPr>
+        <p:style>
+          <a:lnRef idx="2">
+            <a:schemeClr val="dk1"/>
+          </a:lnRef>
+          <a:fillRef idx="1">
+            <a:schemeClr val="lt1"/>
+          </a:fillRef>
+          <a:effectRef idx="0">
+            <a:schemeClr val="dk1"/>
+          </a:effectRef>
+          <a:fontRef idx="minor">
+            <a:schemeClr val="dk1"/>
+          </a:fontRef>
+        </p:style>
+        <p:txBody>
+          <a:bodyPr wrap="square" lIns="0" tIns="45720" rIns="0" bIns="45720" rtlCol="0" anchor="ctr">
+            <a:spAutoFit/>
+          </a:bodyPr>
+          <a:lstStyle/>
+          <a:p>
+            <a:pPr marL="57150">
+              <a:spcAft>
+                <a:spcPts val="500"/>
+              </a:spcAft>
+            </a:pPr>
+            <a:r>
+              <a:rPr lang="en-US" altLang="ko-KR" sz="650" b="1" dirty="0">
+                <a:solidFill>
+                  <a:schemeClr val="tx1"/>
+                </a:solidFill>
+                <a:latin typeface="ui-sans-serif"/>
+              </a:rPr>
+              <a:t>Generate Multiple Queries</a:t>
+            </a:r>
+            <a:endParaRPr lang="en-US" sz="650" b="1" dirty="0">
+              <a:solidFill>
+                <a:schemeClr val="tx1"/>
+              </a:solidFill>
+              <a:latin typeface="ui-sans-serif"/>
+            </a:endParaRPr>
+          </a:p>
+          <a:p>
+            <a:pPr marL="228600" indent="-114300">
+              <a:buFont typeface="+mj-lt"/>
+              <a:buAutoNum type="arabicPeriod"/>
+            </a:pPr>
+            <a:r>
+              <a:rPr lang="en-US" sz="650" b="1" dirty="0">
+                <a:solidFill>
+                  <a:schemeClr val="tx1"/>
+                </a:solidFill>
+                <a:latin typeface="ui-sans-serif"/>
+              </a:rPr>
+              <a:t>Which deconvolution methods are most effective for analyzing </a:t>
+            </a:r>
+            <a:r>
+              <a:rPr lang="en-US" sz="650" b="1" dirty="0" err="1">
+                <a:solidFill>
+                  <a:schemeClr val="tx1"/>
+                </a:solidFill>
+                <a:latin typeface="ui-sans-serif"/>
+              </a:rPr>
+              <a:t>Visium</a:t>
+            </a:r>
+            <a:r>
+              <a:rPr lang="en-US" sz="650" b="1" dirty="0">
+                <a:solidFill>
+                  <a:schemeClr val="tx1"/>
+                </a:solidFill>
+                <a:latin typeface="ui-sans-serif"/>
+              </a:rPr>
+              <a:t> spot-based spatial transcriptomics data?</a:t>
+            </a:r>
+          </a:p>
+          <a:p>
+            <a:pPr marL="228600" indent="-114300">
+              <a:buFont typeface="+mj-lt"/>
+              <a:buAutoNum type="arabicPeriod"/>
+            </a:pPr>
+            <a:r>
+              <a:rPr lang="en-US" sz="650" b="1" dirty="0">
+                <a:solidFill>
+                  <a:schemeClr val="tx1"/>
+                </a:solidFill>
+                <a:latin typeface="ui-sans-serif"/>
+              </a:rPr>
+              <a:t>Can you recommend top deconvolution tools suitable for                          </a:t>
+            </a:r>
+            <a:r>
+              <a:rPr lang="en-US" sz="650" b="1" dirty="0" err="1">
+                <a:solidFill>
+                  <a:schemeClr val="tx1"/>
+                </a:solidFill>
+                <a:latin typeface="ui-sans-serif"/>
+              </a:rPr>
+              <a:t>Visium</a:t>
+            </a:r>
+            <a:r>
+              <a:rPr lang="en-US" sz="650" b="1" dirty="0">
+                <a:solidFill>
+                  <a:schemeClr val="tx1"/>
+                </a:solidFill>
+                <a:latin typeface="ui-sans-serif"/>
+              </a:rPr>
+              <a:t> spatial transcriptomics spot data?</a:t>
+            </a:r>
+          </a:p>
+          <a:p>
+            <a:pPr marL="228600" indent="-114300">
+              <a:buFont typeface="+mj-lt"/>
+              <a:buAutoNum type="arabicPeriod"/>
+            </a:pPr>
+            <a:r>
+              <a:rPr lang="en-US" sz="650" b="1" dirty="0">
+                <a:solidFill>
+                  <a:schemeClr val="tx1"/>
+                </a:solidFill>
+                <a:latin typeface="ui-sans-serif"/>
+              </a:rPr>
+              <a:t>What are the leading software options for deconvolution in                      </a:t>
+            </a:r>
+            <a:r>
+              <a:rPr lang="en-US" sz="650" b="1" dirty="0" err="1">
+                <a:solidFill>
+                  <a:schemeClr val="tx1"/>
+                </a:solidFill>
+                <a:latin typeface="ui-sans-serif"/>
+              </a:rPr>
+              <a:t>Visium</a:t>
+            </a:r>
+            <a:r>
+              <a:rPr lang="en-US" sz="650" b="1" dirty="0">
+                <a:solidFill>
+                  <a:schemeClr val="tx1"/>
+                </a:solidFill>
+                <a:latin typeface="ui-sans-serif"/>
+              </a:rPr>
+              <a:t> spot-based spatial transcriptomics?</a:t>
+            </a:r>
+          </a:p>
+          <a:p>
+            <a:pPr marL="228600" indent="-114300">
+              <a:buFont typeface="+mj-lt"/>
+              <a:buAutoNum type="arabicPeriod"/>
+            </a:pPr>
+            <a:r>
+              <a:rPr lang="en-US" sz="650" b="1" dirty="0">
+                <a:solidFill>
+                  <a:schemeClr val="tx1"/>
+                </a:solidFill>
+                <a:latin typeface="ui-sans-serif"/>
+              </a:rPr>
+              <a:t>Which algorithms perform best for deconvolution of                                  </a:t>
+            </a:r>
+            <a:r>
+              <a:rPr lang="en-US" sz="650" b="1" dirty="0" err="1">
+                <a:solidFill>
+                  <a:schemeClr val="tx1"/>
+                </a:solidFill>
+                <a:latin typeface="ui-sans-serif"/>
+              </a:rPr>
+              <a:t>Visium</a:t>
+            </a:r>
+            <a:r>
+              <a:rPr lang="en-US" sz="650" b="1" dirty="0">
+                <a:solidFill>
+                  <a:schemeClr val="tx1"/>
+                </a:solidFill>
+                <a:latin typeface="ui-sans-serif"/>
+              </a:rPr>
+              <a:t> spatial transcriptomics spot data?</a:t>
+            </a:r>
+          </a:p>
+          <a:p>
+            <a:pPr marL="228600" indent="-114300">
+              <a:buFont typeface="+mj-lt"/>
+              <a:buAutoNum type="arabicPeriod"/>
+            </a:pPr>
+            <a:r>
+              <a:rPr lang="en-US" sz="650" b="1" dirty="0">
+                <a:solidFill>
+                  <a:schemeClr val="tx1"/>
+                </a:solidFill>
+                <a:latin typeface="ui-sans-serif"/>
+              </a:rPr>
+              <a:t>What tools are commonly used for deconvolution in the analysis of </a:t>
+            </a:r>
+            <a:r>
+              <a:rPr lang="en-US" sz="650" b="1" dirty="0" err="1">
+                <a:solidFill>
+                  <a:schemeClr val="tx1"/>
+                </a:solidFill>
+                <a:latin typeface="ui-sans-serif"/>
+              </a:rPr>
+              <a:t>Visium</a:t>
+            </a:r>
+            <a:r>
+              <a:rPr lang="en-US" sz="650" b="1" dirty="0">
+                <a:solidFill>
+                  <a:schemeClr val="tx1"/>
+                </a:solidFill>
+                <a:latin typeface="ui-sans-serif"/>
+              </a:rPr>
+              <a:t> spot-based spatial transcriptomics datasets?</a:t>
+            </a:r>
+          </a:p>
+        </p:txBody>
+      </p:sp>
+      <p:sp>
+        <p:nvSpPr>
+          <p:cNvPr id="3" name="Oval Callout 2">
+            <a:extLst>
+              <a:ext uri="{FF2B5EF4-FFF2-40B4-BE49-F238E27FC236}">
+                <a16:creationId xmlns:a16="http://schemas.microsoft.com/office/drawing/2014/main" id="{7C06BC2D-75FB-AB3E-E137-D5F51AC580F8}"/>
+              </a:ext>
+            </a:extLst>
+          </p:cNvPr>
+          <p:cNvSpPr/>
+          <p:nvPr/>
+        </p:nvSpPr>
+        <p:spPr>
+          <a:xfrm>
+            <a:off x="7144463" y="10183369"/>
+            <a:ext cx="1246445" cy="307777"/>
+          </a:xfrm>
+          <a:prstGeom prst="wedgeEllipseCallout">
+            <a:avLst>
+              <a:gd name="adj1" fmla="val -57054"/>
+              <a:gd name="adj2" fmla="val 27550"/>
+            </a:avLst>
+          </a:prstGeom>
+          <a:ln w="12700"/>
+        </p:spPr>
+        <p:style>
+          <a:lnRef idx="2">
+            <a:schemeClr val="dk1"/>
+          </a:lnRef>
+          <a:fillRef idx="1">
+            <a:schemeClr val="lt1"/>
+          </a:fillRef>
+          <a:effectRef idx="0">
+            <a:schemeClr val="dk1"/>
+          </a:effectRef>
+          <a:fontRef idx="minor">
+            <a:schemeClr val="dk1"/>
+          </a:fontRef>
+        </p:style>
+        <p:txBody>
+          <a:bodyPr rtlCol="0" anchor="ctr"/>
+          <a:lstStyle/>
+          <a:p>
+            <a:pPr defTabSz="914400" eaLnBrk="0" fontAlgn="base" hangingPunct="0">
+              <a:spcBef>
+                <a:spcPct val="0"/>
+              </a:spcBef>
+              <a:spcAft>
+                <a:spcPct val="0"/>
+              </a:spcAft>
+            </a:pPr>
+            <a:r>
+              <a:rPr lang="en-US" altLang="en-US" sz="800" b="1" dirty="0">
+                <a:solidFill>
+                  <a:schemeClr val="tx1"/>
+                </a:solidFill>
+                <a:latin typeface="ui-sans-serif"/>
+              </a:rPr>
+              <a:t>3.reference</a:t>
+            </a:r>
+          </a:p>
+        </p:txBody>
+      </p:sp>
+      <p:pic>
+        <p:nvPicPr>
+          <p:cNvPr id="10" name="Graphic 9" descr="User outline">
+            <a:extLst>
+              <a:ext uri="{FF2B5EF4-FFF2-40B4-BE49-F238E27FC236}">
+                <a16:creationId xmlns:a16="http://schemas.microsoft.com/office/drawing/2014/main" id="{60BC700C-15BF-ADC6-3E52-FEEC15B84B23}"/>
+              </a:ext>
+            </a:extLst>
+          </p:cNvPr>
+          <p:cNvPicPr>
+            <a:picLocks noChangeAspect="1"/>
+          </p:cNvPicPr>
+          <p:nvPr/>
+        </p:nvPicPr>
+        <p:blipFill>
+          <a:blip>
+            <a:extLst>
+              <a:ext uri="{96DAC541-7B7A-43D3-8B79-37D633B846F1}">
+                <asvg:svgBlip xmlns:asvg="http://schemas.microsoft.com/office/drawing/2016/SVG/main" r:embed="rId3"/>
+              </a:ext>
+            </a:extLst>
+          </a:blip>
+          <a:stretch>
+            <a:fillRect/>
+          </a:stretch>
+        </p:blipFill>
+        <p:spPr>
+          <a:xfrm>
+            <a:off x="6510827" y="5574206"/>
+            <a:ext cx="536657" cy="536657"/>
+          </a:xfrm>
+          <a:prstGeom prst="rect">
+            <a:avLst/>
+          </a:prstGeom>
+        </p:spPr>
+      </p:pic>
+      <p:pic>
+        <p:nvPicPr>
+          <p:cNvPr id="13" name="Graphic 12" descr="User outline">
+            <a:extLst>
+              <a:ext uri="{FF2B5EF4-FFF2-40B4-BE49-F238E27FC236}">
+                <a16:creationId xmlns:a16="http://schemas.microsoft.com/office/drawing/2014/main" id="{762EBDCB-5FB4-06A9-5BA0-857AE1634A86}"/>
+              </a:ext>
+            </a:extLst>
+          </p:cNvPr>
+          <p:cNvPicPr>
+            <a:picLocks noChangeAspect="1"/>
+          </p:cNvPicPr>
+          <p:nvPr/>
+        </p:nvPicPr>
+        <p:blipFill>
+          <a:blip>
+            <a:extLst>
+              <a:ext uri="{96DAC541-7B7A-43D3-8B79-37D633B846F1}">
+                <asvg:svgBlip xmlns:asvg="http://schemas.microsoft.com/office/drawing/2016/SVG/main" r:embed="rId3"/>
+              </a:ext>
+            </a:extLst>
+          </a:blip>
+          <a:stretch>
+            <a:fillRect/>
+          </a:stretch>
+        </p:blipFill>
+        <p:spPr>
+          <a:xfrm>
+            <a:off x="6510827" y="10100991"/>
+            <a:ext cx="536657" cy="536657"/>
+          </a:xfrm>
+          <a:prstGeom prst="rect">
+            <a:avLst/>
+          </a:prstGeom>
+        </p:spPr>
+      </p:pic>
+      <p:pic>
+        <p:nvPicPr>
+          <p:cNvPr id="6" name="Graphic 5" descr="Artificial Intelligence outline">
+            <a:extLst>
+              <a:ext uri="{FF2B5EF4-FFF2-40B4-BE49-F238E27FC236}">
+                <a16:creationId xmlns:a16="http://schemas.microsoft.com/office/drawing/2014/main" id="{27D22578-B8FB-7C06-CF1C-505F146113DE}"/>
+              </a:ext>
+            </a:extLst>
+          </p:cNvPr>
+          <p:cNvPicPr>
+            <a:picLocks noChangeAspect="1"/>
+          </p:cNvPicPr>
+          <p:nvPr/>
+        </p:nvPicPr>
+        <p:blipFill>
+          <a:blip>
+            <a:extLst>
+              <a:ext uri="{96DAC541-7B7A-43D3-8B79-37D633B846F1}">
+                <asvg:svgBlip xmlns:asvg="http://schemas.microsoft.com/office/drawing/2016/SVG/main" r:embed="rId4"/>
+              </a:ext>
+            </a:extLst>
+          </a:blip>
+          <a:stretch>
+            <a:fillRect/>
+          </a:stretch>
+        </p:blipFill>
+        <p:spPr>
+          <a:xfrm>
+            <a:off x="8801061" y="6224206"/>
+            <a:ext cx="417467" cy="417467"/>
+          </a:xfrm>
+          <a:prstGeom prst="rect">
+            <a:avLst/>
+          </a:prstGeom>
+        </p:spPr>
+      </p:pic>
+      <p:sp>
+        <p:nvSpPr>
+          <p:cNvPr id="19" name="TextBox 18">
+            <a:extLst>
+              <a:ext uri="{FF2B5EF4-FFF2-40B4-BE49-F238E27FC236}">
+                <a16:creationId xmlns:a16="http://schemas.microsoft.com/office/drawing/2014/main" id="{74181A1E-3269-2638-C576-72C49DD5AB76}"/>
+              </a:ext>
+            </a:extLst>
+          </p:cNvPr>
+          <p:cNvSpPr txBox="1"/>
+          <p:nvPr/>
+        </p:nvSpPr>
+        <p:spPr>
+          <a:xfrm>
+            <a:off x="3710905" y="5354133"/>
+            <a:ext cx="327334" cy="369332"/>
+          </a:xfrm>
+          <a:prstGeom prst="rect">
+            <a:avLst/>
+          </a:prstGeom>
+          <a:noFill/>
+        </p:spPr>
+        <p:txBody>
+          <a:bodyPr wrap="square" rtlCol="0">
+            <a:spAutoFit/>
+          </a:bodyPr>
+          <a:lstStyle/>
+          <a:p>
+            <a:r>
+              <a:rPr lang="en-US" b="1" dirty="0"/>
+              <a:t>A</a:t>
+            </a:r>
+          </a:p>
+        </p:txBody>
+      </p:sp>
+      <p:sp>
+        <p:nvSpPr>
+          <p:cNvPr id="20" name="TextBox 19">
+            <a:extLst>
+              <a:ext uri="{FF2B5EF4-FFF2-40B4-BE49-F238E27FC236}">
+                <a16:creationId xmlns:a16="http://schemas.microsoft.com/office/drawing/2014/main" id="{F50A1407-3857-35D5-87CD-AFA6BE0A2D20}"/>
+              </a:ext>
+            </a:extLst>
+          </p:cNvPr>
+          <p:cNvSpPr txBox="1"/>
+          <p:nvPr/>
+        </p:nvSpPr>
+        <p:spPr>
+          <a:xfrm>
+            <a:off x="9544482" y="5354133"/>
+            <a:ext cx="348172" cy="369332"/>
+          </a:xfrm>
+          <a:prstGeom prst="rect">
+            <a:avLst/>
+          </a:prstGeom>
+          <a:noFill/>
+        </p:spPr>
+        <p:txBody>
+          <a:bodyPr wrap="none" rtlCol="0">
+            <a:spAutoFit/>
+          </a:bodyPr>
+          <a:lstStyle/>
+          <a:p>
+            <a:r>
+              <a:rPr lang="en-US" b="1" dirty="0"/>
+              <a:t>D</a:t>
+            </a:r>
+          </a:p>
+        </p:txBody>
+      </p:sp>
+      <p:sp>
+        <p:nvSpPr>
+          <p:cNvPr id="26" name="TextBox 25">
+            <a:extLst>
+              <a:ext uri="{FF2B5EF4-FFF2-40B4-BE49-F238E27FC236}">
+                <a16:creationId xmlns:a16="http://schemas.microsoft.com/office/drawing/2014/main" id="{51884BCB-8C82-81DD-0335-8D84FB7069BC}"/>
+              </a:ext>
+            </a:extLst>
+          </p:cNvPr>
+          <p:cNvSpPr txBox="1"/>
+          <p:nvPr/>
+        </p:nvSpPr>
+        <p:spPr>
+          <a:xfrm>
+            <a:off x="6248819" y="5354133"/>
+            <a:ext cx="327334" cy="369332"/>
+          </a:xfrm>
+          <a:prstGeom prst="rect">
+            <a:avLst/>
+          </a:prstGeom>
+          <a:noFill/>
+        </p:spPr>
+        <p:txBody>
+          <a:bodyPr wrap="none" rtlCol="0">
+            <a:spAutoFit/>
+          </a:bodyPr>
+          <a:lstStyle/>
+          <a:p>
+            <a:r>
+              <a:rPr lang="en-US" b="1"/>
+              <a:t>B</a:t>
+            </a:r>
+          </a:p>
+        </p:txBody>
+      </p:sp>
+      <p:sp>
+        <p:nvSpPr>
+          <p:cNvPr id="28" name="TextBox 27">
+            <a:extLst>
+              <a:ext uri="{FF2B5EF4-FFF2-40B4-BE49-F238E27FC236}">
+                <a16:creationId xmlns:a16="http://schemas.microsoft.com/office/drawing/2014/main" id="{70746AEB-DF01-17A0-7E7B-71B931DEC506}"/>
+              </a:ext>
+            </a:extLst>
+          </p:cNvPr>
+          <p:cNvSpPr txBox="1"/>
+          <p:nvPr/>
+        </p:nvSpPr>
+        <p:spPr>
+          <a:xfrm>
+            <a:off x="6248819" y="10717658"/>
+            <a:ext cx="348172" cy="369332"/>
+          </a:xfrm>
+          <a:prstGeom prst="rect">
+            <a:avLst/>
+          </a:prstGeom>
+          <a:noFill/>
+        </p:spPr>
+        <p:txBody>
+          <a:bodyPr wrap="none" rtlCol="0">
+            <a:spAutoFit/>
+          </a:bodyPr>
+          <a:lstStyle/>
+          <a:p>
+            <a:r>
+              <a:rPr lang="en-US" b="1" dirty="0"/>
+              <a:t>C</a:t>
+            </a:r>
+          </a:p>
+        </p:txBody>
+      </p:sp>
+      <p:pic>
+        <p:nvPicPr>
+          <p:cNvPr id="8" name="Picture 7" descr="A diagram of a process&#10;&#10;AI-generated content may be incorrect.">
+            <a:extLst>
+              <a:ext uri="{FF2B5EF4-FFF2-40B4-BE49-F238E27FC236}">
+                <a16:creationId xmlns:a16="http://schemas.microsoft.com/office/drawing/2014/main" id="{EE4981D0-333C-BB85-72F1-E8D33B27B016}"/>
+              </a:ext>
+            </a:extLst>
+          </p:cNvPr>
+          <p:cNvPicPr>
+            <a:picLocks noChangeAspect="1"/>
+          </p:cNvPicPr>
+          <p:nvPr/>
+        </p:nvPicPr>
+        <p:blipFill>
+          <a:blip r:embed="rId5"/>
+          <a:stretch>
+            <a:fillRect/>
+          </a:stretch>
+        </p:blipFill>
+        <p:spPr>
+          <a:xfrm>
+            <a:off x="1699231" y="6110862"/>
+            <a:ext cx="4501098" cy="6246420"/>
+          </a:xfrm>
+          <a:prstGeom prst="rect">
+            <a:avLst/>
+          </a:prstGeom>
+        </p:spPr>
+      </p:pic>
+    </p:spTree>
+    <p:extLst>
+      <p:ext uri="{BB962C8B-B14F-4D97-AF65-F5344CB8AC3E}">
+        <p14:creationId xmlns:p14="http://schemas.microsoft.com/office/powerpoint/2010/main" val="3569480432"/>
+      </p:ext>
+    </p:extLst>
+  </p:cSld>
+  <p:clrMapOvr>
+    <a:masterClrMapping/>
+  </p:clrMapOvr>
+</p:sld>
+</file>
+
+<file path=ppt/slides/slide6.xml><?xml version="1.0" encoding="utf-8"?>
+<p:sld xmlns:a="http://schemas.openxmlformats.org/drawingml/2006/main" xmlns:r="http://schemas.openxmlformats.org/officeDocument/2006/relationships" xmlns:p="http://schemas.openxmlformats.org/presentationml/2006/main">
+  <p:cSld>
+    <p:spTree>
+      <p:nvGrpSpPr>
+        <p:cNvPr id="1" name="">
+          <a:extLst>
+            <a:ext uri="{FF2B5EF4-FFF2-40B4-BE49-F238E27FC236}">
+              <a16:creationId xmlns:a16="http://schemas.microsoft.com/office/drawing/2014/main" id="{6A606220-3D9B-8608-6988-5D18409D88B7}"/>
+            </a:ext>
+          </a:extLst>
+        </p:cNvPr>
+        <p:cNvGrpSpPr/>
+        <p:nvPr/>
+      </p:nvGrpSpPr>
+      <p:grpSpPr>
+        <a:xfrm>
+          <a:off x="0" y="0"/>
+          <a:ext cx="0" cy="0"/>
+          <a:chOff x="0" y="0"/>
+          <a:chExt cx="0" cy="0"/>
+        </a:xfrm>
+      </p:grpSpPr>
+      <p:pic>
+        <p:nvPicPr>
+          <p:cNvPr id="3" name="Picture 2" descr="A screenshot of a diagram&#10;&#10;AI-generated content may be incorrect.">
+            <a:extLst>
+              <a:ext uri="{FF2B5EF4-FFF2-40B4-BE49-F238E27FC236}">
+                <a16:creationId xmlns:a16="http://schemas.microsoft.com/office/drawing/2014/main" id="{BCB90428-2C8C-BDD1-B4C2-D9B5294506A6}"/>
+              </a:ext>
+            </a:extLst>
+          </p:cNvPr>
+          <p:cNvPicPr>
+            <a:picLocks noChangeAspect="1"/>
+          </p:cNvPicPr>
+          <p:nvPr/>
+        </p:nvPicPr>
+        <p:blipFill>
+          <a:blip r:embed="rId3"/>
+          <a:stretch>
+            <a:fillRect/>
+          </a:stretch>
+        </p:blipFill>
+        <p:spPr>
+          <a:xfrm>
+            <a:off x="3567531" y="5627335"/>
+            <a:ext cx="4934052" cy="7098993"/>
+          </a:xfrm>
+          <a:prstGeom prst="rect">
+            <a:avLst/>
+          </a:prstGeom>
+        </p:spPr>
+      </p:pic>
+      <p:sp>
+        <p:nvSpPr>
+          <p:cNvPr id="4" name="TextBox 3">
+            <a:extLst>
+              <a:ext uri="{FF2B5EF4-FFF2-40B4-BE49-F238E27FC236}">
+                <a16:creationId xmlns:a16="http://schemas.microsoft.com/office/drawing/2014/main" id="{9B1E9D25-7371-C2CC-59CA-01AF46CE3588}"/>
+              </a:ext>
+            </a:extLst>
+          </p:cNvPr>
+          <p:cNvSpPr txBox="1"/>
+          <p:nvPr/>
+        </p:nvSpPr>
+        <p:spPr>
+          <a:xfrm>
+            <a:off x="16566776" y="12711953"/>
+            <a:ext cx="816249" cy="369332"/>
+          </a:xfrm>
+          <a:prstGeom prst="rect">
+            <a:avLst/>
+          </a:prstGeom>
+          <a:noFill/>
+        </p:spPr>
+        <p:txBody>
+          <a:bodyPr wrap="none" rtlCol="0">
+            <a:spAutoFit/>
+          </a:bodyPr>
+          <a:lstStyle/>
+          <a:p>
+            <a:r>
+              <a:rPr lang="en-US" dirty="0"/>
+              <a:t>Fig. s2</a:t>
+            </a:r>
+          </a:p>
+        </p:txBody>
+      </p:sp>
+      <p:sp>
+        <p:nvSpPr>
+          <p:cNvPr id="8" name="Rectangle 7">
+            <a:extLst>
+              <a:ext uri="{FF2B5EF4-FFF2-40B4-BE49-F238E27FC236}">
+                <a16:creationId xmlns:a16="http://schemas.microsoft.com/office/drawing/2014/main" id="{1F7F6849-2128-A4E5-53C4-5A872DE403DE}"/>
+              </a:ext>
+            </a:extLst>
+          </p:cNvPr>
+          <p:cNvSpPr/>
+          <p:nvPr/>
+        </p:nvSpPr>
+        <p:spPr>
+          <a:xfrm>
+            <a:off x="9177449" y="5968829"/>
+            <a:ext cx="4820284" cy="2214621"/>
+          </a:xfrm>
+          <a:prstGeom prst="rect">
+            <a:avLst/>
+          </a:prstGeom>
+        </p:spPr>
+        <p:style>
+          <a:lnRef idx="2">
+            <a:schemeClr val="accent1">
+              <a:shade val="15000"/>
+            </a:schemeClr>
+          </a:lnRef>
+          <a:fillRef idx="1">
+            <a:schemeClr val="accent1"/>
+          </a:fillRef>
+          <a:effectRef idx="0">
+            <a:schemeClr val="accent1"/>
+          </a:effectRef>
+          <a:fontRef idx="minor">
+            <a:schemeClr val="lt1"/>
+          </a:fontRef>
+        </p:style>
+        <p:txBody>
+          <a:bodyPr rtlCol="0" anchor="ctr"/>
+          <a:lstStyle/>
+          <a:p>
+            <a:pPr algn="ctr"/>
+            <a:r>
+              <a:rPr lang="en-US" dirty="0"/>
+              <a:t>Sc reference selector</a:t>
+            </a:r>
+          </a:p>
+        </p:txBody>
+      </p:sp>
+      <p:sp>
+        <p:nvSpPr>
+          <p:cNvPr id="45" name="TextBox 44">
+            <a:extLst>
+              <a:ext uri="{FF2B5EF4-FFF2-40B4-BE49-F238E27FC236}">
+                <a16:creationId xmlns:a16="http://schemas.microsoft.com/office/drawing/2014/main" id="{B5B4834B-D9B0-1CEF-706C-D65A2FB54EE9}"/>
+              </a:ext>
+            </a:extLst>
+          </p:cNvPr>
+          <p:cNvSpPr txBox="1"/>
+          <p:nvPr/>
+        </p:nvSpPr>
+        <p:spPr>
+          <a:xfrm>
+            <a:off x="5003678" y="5442669"/>
+            <a:ext cx="327334" cy="369332"/>
+          </a:xfrm>
+          <a:prstGeom prst="rect">
+            <a:avLst/>
+          </a:prstGeom>
+          <a:noFill/>
+        </p:spPr>
+        <p:txBody>
+          <a:bodyPr wrap="none" rtlCol="0">
+            <a:spAutoFit/>
+          </a:bodyPr>
+          <a:lstStyle/>
+          <a:p>
+            <a:r>
+              <a:rPr lang="en-US" b="1" dirty="0"/>
+              <a:t>A</a:t>
+            </a:r>
+          </a:p>
+        </p:txBody>
+      </p:sp>
+      <p:sp>
+        <p:nvSpPr>
+          <p:cNvPr id="46" name="TextBox 45">
+            <a:extLst>
+              <a:ext uri="{FF2B5EF4-FFF2-40B4-BE49-F238E27FC236}">
+                <a16:creationId xmlns:a16="http://schemas.microsoft.com/office/drawing/2014/main" id="{EB2912D9-8E1D-480C-1819-7390351E7F4C}"/>
+              </a:ext>
+            </a:extLst>
+          </p:cNvPr>
+          <p:cNvSpPr txBox="1"/>
+          <p:nvPr/>
+        </p:nvSpPr>
+        <p:spPr>
+          <a:xfrm>
+            <a:off x="8797473" y="8430868"/>
+            <a:ext cx="348172" cy="369332"/>
+          </a:xfrm>
+          <a:prstGeom prst="rect">
+            <a:avLst/>
+          </a:prstGeom>
+          <a:noFill/>
+        </p:spPr>
+        <p:txBody>
+          <a:bodyPr wrap="none" rtlCol="0">
+            <a:spAutoFit/>
+          </a:bodyPr>
+          <a:lstStyle/>
+          <a:p>
+            <a:r>
+              <a:rPr lang="en-US" b="1" dirty="0"/>
+              <a:t>C</a:t>
+            </a:r>
+          </a:p>
+        </p:txBody>
+      </p:sp>
+      <p:sp>
+        <p:nvSpPr>
+          <p:cNvPr id="47" name="TextBox 46">
+            <a:extLst>
+              <a:ext uri="{FF2B5EF4-FFF2-40B4-BE49-F238E27FC236}">
+                <a16:creationId xmlns:a16="http://schemas.microsoft.com/office/drawing/2014/main" id="{D9615DF0-973C-FF18-E512-6A3CCD3D522A}"/>
+              </a:ext>
+            </a:extLst>
+          </p:cNvPr>
+          <p:cNvSpPr txBox="1"/>
+          <p:nvPr/>
+        </p:nvSpPr>
+        <p:spPr>
+          <a:xfrm>
+            <a:off x="8807892" y="5442669"/>
+            <a:ext cx="327334" cy="369332"/>
+          </a:xfrm>
+          <a:prstGeom prst="rect">
+            <a:avLst/>
+          </a:prstGeom>
+          <a:noFill/>
+        </p:spPr>
+        <p:txBody>
+          <a:bodyPr wrap="none" rtlCol="0">
+            <a:spAutoFit/>
+          </a:bodyPr>
+          <a:lstStyle/>
+          <a:p>
+            <a:r>
+              <a:rPr lang="en-US" b="1" dirty="0"/>
+              <a:t>B</a:t>
+            </a:r>
+          </a:p>
+        </p:txBody>
+      </p:sp>
+      <p:sp>
+        <p:nvSpPr>
+          <p:cNvPr id="6" name="Rectangle 5">
+            <a:extLst>
+              <a:ext uri="{FF2B5EF4-FFF2-40B4-BE49-F238E27FC236}">
+                <a16:creationId xmlns:a16="http://schemas.microsoft.com/office/drawing/2014/main" id="{8B33D61F-02C9-F25A-B699-869F92B62239}"/>
+              </a:ext>
+            </a:extLst>
+          </p:cNvPr>
+          <p:cNvSpPr/>
+          <p:nvPr/>
+        </p:nvSpPr>
+        <p:spPr>
+          <a:xfrm>
+            <a:off x="9426101" y="10511707"/>
+            <a:ext cx="4820284" cy="2214621"/>
+          </a:xfrm>
+          <a:prstGeom prst="rect">
+            <a:avLst/>
+          </a:prstGeom>
+        </p:spPr>
+        <p:style>
+          <a:lnRef idx="2">
+            <a:schemeClr val="accent1">
+              <a:shade val="15000"/>
+            </a:schemeClr>
+          </a:lnRef>
+          <a:fillRef idx="1">
+            <a:schemeClr val="accent1"/>
+          </a:fillRef>
+          <a:effectRef idx="0">
+            <a:schemeClr val="accent1"/>
+          </a:effectRef>
+          <a:fontRef idx="minor">
+            <a:schemeClr val="lt1"/>
+          </a:fontRef>
+        </p:style>
+        <p:txBody>
+          <a:bodyPr rtlCol="0" anchor="ctr"/>
+          <a:lstStyle/>
+          <a:p>
+            <a:pPr algn="ctr"/>
+            <a:r>
+              <a:rPr lang="en-US" dirty="0" err="1"/>
+              <a:t>Rmcpagnet</a:t>
+            </a:r>
+            <a:r>
+              <a:rPr lang="en-US" dirty="0"/>
+              <a:t> </a:t>
+            </a:r>
+            <a:r>
+              <a:rPr lang="ko-KR" altLang="en-US" dirty="0"/>
+              <a:t>실제결과 </a:t>
+            </a:r>
+            <a:endParaRPr lang="en-US" altLang="ko-KR" dirty="0"/>
+          </a:p>
+          <a:p>
+            <a:pPr algn="ctr"/>
+            <a:r>
+              <a:rPr lang="en-US" dirty="0"/>
+              <a:t>CARD </a:t>
+            </a:r>
+            <a:r>
+              <a:rPr lang="ko-KR" altLang="en-US" dirty="0"/>
+              <a:t>결과 추가</a:t>
+            </a:r>
+            <a:endParaRPr lang="en-US" dirty="0"/>
+          </a:p>
+        </p:txBody>
+      </p:sp>
+    </p:spTree>
+    <p:extLst>
+      <p:ext uri="{BB962C8B-B14F-4D97-AF65-F5344CB8AC3E}">
+        <p14:creationId xmlns:p14="http://schemas.microsoft.com/office/powerpoint/2010/main" val="3998322953"/>
       </p:ext>
     </p:extLst>
   </p:cSld>
